--- a/Lectures/1.Introduction/Lecture1.pptx
+++ b/Lectures/1.Introduction/Lecture1.pptx
@@ -22,9 +22,9 @@
     <p:sldId id="276" r:id="rId13"/>
     <p:sldId id="339" r:id="rId14"/>
     <p:sldId id="341" r:id="rId15"/>
-    <p:sldId id="282" r:id="rId16"/>
-    <p:sldId id="277" r:id="rId17"/>
-    <p:sldId id="347" r:id="rId18"/>
+    <p:sldId id="277" r:id="rId16"/>
+    <p:sldId id="347" r:id="rId17"/>
+    <p:sldId id="282" r:id="rId18"/>
     <p:sldId id="319" r:id="rId19"/>
     <p:sldId id="279" r:id="rId20"/>
     <p:sldId id="274" r:id="rId21"/>
@@ -249,7 +249,7 @@
           <a:p>
             <a:fld id="{8A70136C-4900-4139-A65E-0FFE21BA8660}" type="datetimeFigureOut">
               <a:rPr lang="en-US" smtClean="0"/>
-              <a:t>9/8/2025</a:t>
+              <a:t>9/6/2026</a:t>
             </a:fld>
             <a:endParaRPr lang="en-US"/>
           </a:p>
@@ -666,7 +666,7 @@
           <a:p>
             <a:fld id="{A8B5C656-B1C2-48D6-B4C0-50C1DF62A042}" type="slidenum">
               <a:rPr lang="en-US" smtClean="0"/>
-              <a:t>19</a:t>
+              <a:t>18</a:t>
             </a:fld>
             <a:endParaRPr lang="en-US"/>
           </a:p>
@@ -675,7 +675,7 @@
     </p:spTree>
     <p:extLst>
       <p:ext uri="{BB962C8B-B14F-4D97-AF65-F5344CB8AC3E}">
-        <p14:creationId xmlns:p14="http://schemas.microsoft.com/office/powerpoint/2010/main" val="3607053906"/>
+        <p14:creationId xmlns:p14="http://schemas.microsoft.com/office/powerpoint/2010/main" val="1964003724"/>
       </p:ext>
     </p:extLst>
   </p:cSld>
@@ -729,7 +729,7 @@
           <a:bodyPr/>
           <a:lstStyle/>
           <a:p>
-            <a:endParaRPr lang="en-US" dirty="0"/>
+            <a:endParaRPr lang="ru-RU" dirty="0"/>
           </a:p>
         </p:txBody>
       </p:sp>
@@ -750,7 +750,7 @@
           <a:p>
             <a:fld id="{A8B5C656-B1C2-48D6-B4C0-50C1DF62A042}" type="slidenum">
               <a:rPr lang="en-US" smtClean="0"/>
-              <a:t>20</a:t>
+              <a:t>19</a:t>
             </a:fld>
             <a:endParaRPr lang="en-US"/>
           </a:p>
@@ -759,7 +759,7 @@
     </p:spTree>
     <p:extLst>
       <p:ext uri="{BB962C8B-B14F-4D97-AF65-F5344CB8AC3E}">
-        <p14:creationId xmlns:p14="http://schemas.microsoft.com/office/powerpoint/2010/main" val="1744485733"/>
+        <p14:creationId xmlns:p14="http://schemas.microsoft.com/office/powerpoint/2010/main" val="3607053906"/>
       </p:ext>
     </p:extLst>
   </p:cSld>
@@ -834,7 +834,7 @@
           <a:p>
             <a:fld id="{A8B5C656-B1C2-48D6-B4C0-50C1DF62A042}" type="slidenum">
               <a:rPr lang="en-US" smtClean="0"/>
-              <a:t>24</a:t>
+              <a:t>20</a:t>
             </a:fld>
             <a:endParaRPr lang="en-US"/>
           </a:p>
@@ -843,7 +843,7 @@
     </p:spTree>
     <p:extLst>
       <p:ext uri="{BB962C8B-B14F-4D97-AF65-F5344CB8AC3E}">
-        <p14:creationId xmlns:p14="http://schemas.microsoft.com/office/powerpoint/2010/main" val="1497788759"/>
+        <p14:creationId xmlns:p14="http://schemas.microsoft.com/office/powerpoint/2010/main" val="1744485733"/>
       </p:ext>
     </p:extLst>
   </p:cSld>
@@ -918,7 +918,7 @@
           <a:p>
             <a:fld id="{A8B5C656-B1C2-48D6-B4C0-50C1DF62A042}" type="slidenum">
               <a:rPr lang="en-US" smtClean="0"/>
-              <a:t>25</a:t>
+              <a:t>24</a:t>
             </a:fld>
             <a:endParaRPr lang="en-US"/>
           </a:p>
@@ -927,7 +927,7 @@
     </p:spTree>
     <p:extLst>
       <p:ext uri="{BB962C8B-B14F-4D97-AF65-F5344CB8AC3E}">
-        <p14:creationId xmlns:p14="http://schemas.microsoft.com/office/powerpoint/2010/main" val="2751928792"/>
+        <p14:creationId xmlns:p14="http://schemas.microsoft.com/office/powerpoint/2010/main" val="1497788759"/>
       </p:ext>
     </p:extLst>
   </p:cSld>
@@ -1002,7 +1002,7 @@
           <a:p>
             <a:fld id="{A8B5C656-B1C2-48D6-B4C0-50C1DF62A042}" type="slidenum">
               <a:rPr lang="en-US" smtClean="0"/>
-              <a:t>26</a:t>
+              <a:t>25</a:t>
             </a:fld>
             <a:endParaRPr lang="en-US"/>
           </a:p>
@@ -1011,7 +1011,7 @@
     </p:spTree>
     <p:extLst>
       <p:ext uri="{BB962C8B-B14F-4D97-AF65-F5344CB8AC3E}">
-        <p14:creationId xmlns:p14="http://schemas.microsoft.com/office/powerpoint/2010/main" val="748125179"/>
+        <p14:creationId xmlns:p14="http://schemas.microsoft.com/office/powerpoint/2010/main" val="2751928792"/>
       </p:ext>
     </p:extLst>
   </p:cSld>
@@ -1086,7 +1086,7 @@
           <a:p>
             <a:fld id="{A8B5C656-B1C2-48D6-B4C0-50C1DF62A042}" type="slidenum">
               <a:rPr lang="en-US" smtClean="0"/>
-              <a:t>27</a:t>
+              <a:t>26</a:t>
             </a:fld>
             <a:endParaRPr lang="en-US"/>
           </a:p>
@@ -1095,7 +1095,7 @@
     </p:spTree>
     <p:extLst>
       <p:ext uri="{BB962C8B-B14F-4D97-AF65-F5344CB8AC3E}">
-        <p14:creationId xmlns:p14="http://schemas.microsoft.com/office/powerpoint/2010/main" val="863038794"/>
+        <p14:creationId xmlns:p14="http://schemas.microsoft.com/office/powerpoint/2010/main" val="748125179"/>
       </p:ext>
     </p:extLst>
   </p:cSld>
@@ -1170,7 +1170,7 @@
           <a:p>
             <a:fld id="{A8B5C656-B1C2-48D6-B4C0-50C1DF62A042}" type="slidenum">
               <a:rPr lang="en-US" smtClean="0"/>
-              <a:t>28</a:t>
+              <a:t>27</a:t>
             </a:fld>
             <a:endParaRPr lang="en-US"/>
           </a:p>
@@ -1179,7 +1179,7 @@
     </p:spTree>
     <p:extLst>
       <p:ext uri="{BB962C8B-B14F-4D97-AF65-F5344CB8AC3E}">
-        <p14:creationId xmlns:p14="http://schemas.microsoft.com/office/powerpoint/2010/main" val="898154454"/>
+        <p14:creationId xmlns:p14="http://schemas.microsoft.com/office/powerpoint/2010/main" val="863038794"/>
       </p:ext>
     </p:extLst>
   </p:cSld>
@@ -1254,7 +1254,7 @@
           <a:p>
             <a:fld id="{A8B5C656-B1C2-48D6-B4C0-50C1DF62A042}" type="slidenum">
               <a:rPr lang="en-US" smtClean="0"/>
-              <a:t>29</a:t>
+              <a:t>28</a:t>
             </a:fld>
             <a:endParaRPr lang="en-US"/>
           </a:p>
@@ -1263,7 +1263,7 @@
     </p:spTree>
     <p:extLst>
       <p:ext uri="{BB962C8B-B14F-4D97-AF65-F5344CB8AC3E}">
-        <p14:creationId xmlns:p14="http://schemas.microsoft.com/office/powerpoint/2010/main" val="2027881567"/>
+        <p14:creationId xmlns:p14="http://schemas.microsoft.com/office/powerpoint/2010/main" val="898154454"/>
       </p:ext>
     </p:extLst>
   </p:cSld>
@@ -1338,7 +1338,7 @@
           <a:p>
             <a:fld id="{A8B5C656-B1C2-48D6-B4C0-50C1DF62A042}" type="slidenum">
               <a:rPr lang="en-US" smtClean="0"/>
-              <a:t>30</a:t>
+              <a:t>29</a:t>
             </a:fld>
             <a:endParaRPr lang="en-US"/>
           </a:p>
@@ -1347,7 +1347,7 @@
     </p:spTree>
     <p:extLst>
       <p:ext uri="{BB962C8B-B14F-4D97-AF65-F5344CB8AC3E}">
-        <p14:creationId xmlns:p14="http://schemas.microsoft.com/office/powerpoint/2010/main" val="1614767899"/>
+        <p14:creationId xmlns:p14="http://schemas.microsoft.com/office/powerpoint/2010/main" val="2027881567"/>
       </p:ext>
     </p:extLst>
   </p:cSld>
@@ -1422,7 +1422,7 @@
           <a:p>
             <a:fld id="{A8B5C656-B1C2-48D6-B4C0-50C1DF62A042}" type="slidenum">
               <a:rPr lang="en-US" smtClean="0"/>
-              <a:t>32</a:t>
+              <a:t>30</a:t>
             </a:fld>
             <a:endParaRPr lang="en-US"/>
           </a:p>
@@ -1431,7 +1431,7 @@
     </p:spTree>
     <p:extLst>
       <p:ext uri="{BB962C8B-B14F-4D97-AF65-F5344CB8AC3E}">
-        <p14:creationId xmlns:p14="http://schemas.microsoft.com/office/powerpoint/2010/main" val="3688342312"/>
+        <p14:creationId xmlns:p14="http://schemas.microsoft.com/office/powerpoint/2010/main" val="1614767899"/>
       </p:ext>
     </p:extLst>
   </p:cSld>
@@ -1635,7 +1635,7 @@
           <a:p>
             <a:fld id="{A8B5C656-B1C2-48D6-B4C0-50C1DF62A042}" type="slidenum">
               <a:rPr lang="en-US" smtClean="0"/>
-              <a:t>33</a:t>
+              <a:t>32</a:t>
             </a:fld>
             <a:endParaRPr lang="en-US"/>
           </a:p>
@@ -1644,7 +1644,7 @@
     </p:spTree>
     <p:extLst>
       <p:ext uri="{BB962C8B-B14F-4D97-AF65-F5344CB8AC3E}">
-        <p14:creationId xmlns:p14="http://schemas.microsoft.com/office/powerpoint/2010/main" val="3062634471"/>
+        <p14:creationId xmlns:p14="http://schemas.microsoft.com/office/powerpoint/2010/main" val="3688342312"/>
       </p:ext>
     </p:extLst>
   </p:cSld>
@@ -1719,7 +1719,7 @@
           <a:p>
             <a:fld id="{A8B5C656-B1C2-48D6-B4C0-50C1DF62A042}" type="slidenum">
               <a:rPr lang="en-US" smtClean="0"/>
-              <a:t>34</a:t>
+              <a:t>33</a:t>
             </a:fld>
             <a:endParaRPr lang="en-US"/>
           </a:p>
@@ -1728,7 +1728,7 @@
     </p:spTree>
     <p:extLst>
       <p:ext uri="{BB962C8B-B14F-4D97-AF65-F5344CB8AC3E}">
-        <p14:creationId xmlns:p14="http://schemas.microsoft.com/office/powerpoint/2010/main" val="1888034848"/>
+        <p14:creationId xmlns:p14="http://schemas.microsoft.com/office/powerpoint/2010/main" val="3062634471"/>
       </p:ext>
     </p:extLst>
   </p:cSld>
@@ -1803,7 +1803,7 @@
           <a:p>
             <a:fld id="{A8B5C656-B1C2-48D6-B4C0-50C1DF62A042}" type="slidenum">
               <a:rPr lang="en-US" smtClean="0"/>
-              <a:t>35</a:t>
+              <a:t>34</a:t>
             </a:fld>
             <a:endParaRPr lang="en-US"/>
           </a:p>
@@ -1812,7 +1812,7 @@
     </p:spTree>
     <p:extLst>
       <p:ext uri="{BB962C8B-B14F-4D97-AF65-F5344CB8AC3E}">
-        <p14:creationId xmlns:p14="http://schemas.microsoft.com/office/powerpoint/2010/main" val="3626151719"/>
+        <p14:creationId xmlns:p14="http://schemas.microsoft.com/office/powerpoint/2010/main" val="1888034848"/>
       </p:ext>
     </p:extLst>
   </p:cSld>
@@ -1887,7 +1887,7 @@
           <a:p>
             <a:fld id="{A8B5C656-B1C2-48D6-B4C0-50C1DF62A042}" type="slidenum">
               <a:rPr lang="en-US" smtClean="0"/>
-              <a:t>36</a:t>
+              <a:t>35</a:t>
             </a:fld>
             <a:endParaRPr lang="en-US"/>
           </a:p>
@@ -1896,7 +1896,7 @@
     </p:spTree>
     <p:extLst>
       <p:ext uri="{BB962C8B-B14F-4D97-AF65-F5344CB8AC3E}">
-        <p14:creationId xmlns:p14="http://schemas.microsoft.com/office/powerpoint/2010/main" val="2491589131"/>
+        <p14:creationId xmlns:p14="http://schemas.microsoft.com/office/powerpoint/2010/main" val="3626151719"/>
       </p:ext>
     </p:extLst>
   </p:cSld>
@@ -1971,7 +1971,7 @@
           <a:p>
             <a:fld id="{A8B5C656-B1C2-48D6-B4C0-50C1DF62A042}" type="slidenum">
               <a:rPr lang="en-US" smtClean="0"/>
-              <a:t>37</a:t>
+              <a:t>36</a:t>
             </a:fld>
             <a:endParaRPr lang="en-US"/>
           </a:p>
@@ -1980,7 +1980,7 @@
     </p:spTree>
     <p:extLst>
       <p:ext uri="{BB962C8B-B14F-4D97-AF65-F5344CB8AC3E}">
-        <p14:creationId xmlns:p14="http://schemas.microsoft.com/office/powerpoint/2010/main" val="3789829400"/>
+        <p14:creationId xmlns:p14="http://schemas.microsoft.com/office/powerpoint/2010/main" val="2491589131"/>
       </p:ext>
     </p:extLst>
   </p:cSld>
@@ -2034,7 +2034,7 @@
           <a:bodyPr/>
           <a:lstStyle/>
           <a:p>
-            <a:endParaRPr lang="ru-RU" dirty="0"/>
+            <a:endParaRPr lang="en-US" dirty="0"/>
           </a:p>
         </p:txBody>
       </p:sp>
@@ -2055,6 +2055,90 @@
           <a:p>
             <a:fld id="{A8B5C656-B1C2-48D6-B4C0-50C1DF62A042}" type="slidenum">
               <a:rPr lang="en-US" smtClean="0"/>
+              <a:t>37</a:t>
+            </a:fld>
+            <a:endParaRPr lang="en-US"/>
+          </a:p>
+        </p:txBody>
+      </p:sp>
+    </p:spTree>
+    <p:extLst>
+      <p:ext uri="{BB962C8B-B14F-4D97-AF65-F5344CB8AC3E}">
+        <p14:creationId xmlns:p14="http://schemas.microsoft.com/office/powerpoint/2010/main" val="3789829400"/>
+      </p:ext>
+    </p:extLst>
+  </p:cSld>
+  <p:clrMapOvr>
+    <a:masterClrMapping/>
+  </p:clrMapOvr>
+</p:notes>
+</file>
+
+<file path=ppt/notesSlides/notesSlide26.xml><?xml version="1.0" encoding="utf-8"?>
+<p:notes xmlns:a="http://schemas.openxmlformats.org/drawingml/2006/main" xmlns:r="http://schemas.openxmlformats.org/officeDocument/2006/relationships" xmlns:p="http://schemas.openxmlformats.org/presentationml/2006/main">
+  <p:cSld>
+    <p:spTree>
+      <p:nvGrpSpPr>
+        <p:cNvPr id="1" name=""/>
+        <p:cNvGrpSpPr/>
+        <p:nvPr/>
+      </p:nvGrpSpPr>
+      <p:grpSpPr>
+        <a:xfrm>
+          <a:off x="0" y="0"/>
+          <a:ext cx="0" cy="0"/>
+          <a:chOff x="0" y="0"/>
+          <a:chExt cx="0" cy="0"/>
+        </a:xfrm>
+      </p:grpSpPr>
+      <p:sp>
+        <p:nvSpPr>
+          <p:cNvPr id="2" name="Образ слайда 1"/>
+          <p:cNvSpPr>
+            <a:spLocks noGrp="1" noRot="1" noChangeAspect="1"/>
+          </p:cNvSpPr>
+          <p:nvPr>
+            <p:ph type="sldImg"/>
+          </p:nvPr>
+        </p:nvSpPr>
+        <p:spPr/>
+      </p:sp>
+      <p:sp>
+        <p:nvSpPr>
+          <p:cNvPr id="3" name="Заметки 2"/>
+          <p:cNvSpPr>
+            <a:spLocks noGrp="1"/>
+          </p:cNvSpPr>
+          <p:nvPr>
+            <p:ph type="body" idx="1"/>
+          </p:nvPr>
+        </p:nvSpPr>
+        <p:spPr/>
+        <p:txBody>
+          <a:bodyPr/>
+          <a:lstStyle/>
+          <a:p>
+            <a:endParaRPr lang="ru-RU" dirty="0"/>
+          </a:p>
+        </p:txBody>
+      </p:sp>
+      <p:sp>
+        <p:nvSpPr>
+          <p:cNvPr id="4" name="Номер слайда 3"/>
+          <p:cNvSpPr>
+            <a:spLocks noGrp="1"/>
+          </p:cNvSpPr>
+          <p:nvPr>
+            <p:ph type="sldNum" sz="quarter" idx="5"/>
+          </p:nvPr>
+        </p:nvSpPr>
+        <p:spPr/>
+        <p:txBody>
+          <a:bodyPr/>
+          <a:lstStyle/>
+          <a:p>
+            <a:fld id="{A8B5C656-B1C2-48D6-B4C0-50C1DF62A042}" type="slidenum">
+              <a:rPr lang="en-US" smtClean="0"/>
               <a:t>40</a:t>
             </a:fld>
             <a:endParaRPr lang="en-US"/>
@@ -2074,7 +2158,7 @@
 </p:notes>
 </file>
 
-<file path=ppt/notesSlides/notesSlide26.xml><?xml version="1.0" encoding="utf-8"?>
+<file path=ppt/notesSlides/notesSlide27.xml><?xml version="1.0" encoding="utf-8"?>
 <p:notes xmlns:a="http://schemas.openxmlformats.org/drawingml/2006/main" xmlns:r="http://schemas.openxmlformats.org/officeDocument/2006/relationships" xmlns:p="http://schemas.openxmlformats.org/presentationml/2006/main">
   <p:cSld>
     <p:spTree>
@@ -2429,7 +2513,7 @@
       </p:grpSpPr>
       <p:sp>
         <p:nvSpPr>
-          <p:cNvPr id="2" name="Образ слайда 1"/>
+          <p:cNvPr id="2" name="Slide Image Placeholder 1"/>
           <p:cNvSpPr>
             <a:spLocks noGrp="1" noRot="1" noChangeAspect="1"/>
           </p:cNvSpPr>
@@ -2441,7 +2525,7 @@
       </p:sp>
       <p:sp>
         <p:nvSpPr>
-          <p:cNvPr id="3" name="Заметки 2"/>
+          <p:cNvPr id="3" name="Notes Placeholder 2"/>
           <p:cNvSpPr>
             <a:spLocks noGrp="1"/>
           </p:cNvSpPr>
@@ -2460,7 +2544,7 @@
       </p:sp>
       <p:sp>
         <p:nvSpPr>
-          <p:cNvPr id="4" name="Номер слайда 3"/>
+          <p:cNvPr id="4" name="Slide Number Placeholder 3"/>
           <p:cNvSpPr>
             <a:spLocks noGrp="1"/>
           </p:cNvSpPr>
@@ -2475,7 +2559,7 @@
           <a:p>
             <a:fld id="{A8B5C656-B1C2-48D6-B4C0-50C1DF62A042}" type="slidenum">
               <a:rPr lang="en-US" smtClean="0"/>
-              <a:t>12</a:t>
+              <a:t>11</a:t>
             </a:fld>
             <a:endParaRPr lang="en-US"/>
           </a:p>
@@ -2484,7 +2568,7 @@
     </p:spTree>
     <p:extLst>
       <p:ext uri="{BB962C8B-B14F-4D97-AF65-F5344CB8AC3E}">
-        <p14:creationId xmlns:p14="http://schemas.microsoft.com/office/powerpoint/2010/main" val="396562301"/>
+        <p14:creationId xmlns:p14="http://schemas.microsoft.com/office/powerpoint/2010/main" val="3350311711"/>
       </p:ext>
     </p:extLst>
   </p:cSld>
@@ -2538,140 +2622,7 @@
           <a:bodyPr/>
           <a:lstStyle/>
           <a:p>
-            <a:r>
-              <a:rPr lang="ru-RU" dirty="0"/>
-              <a:t>В общем случае процесс перевода кода программы из представления на языке А в представление на языке Б называется трансляцией.</a:t>
-            </a:r>
-          </a:p>
-          <a:p>
-            <a:r>
-              <a:rPr lang="ru-RU" dirty="0"/>
-              <a:t>Ассемблирование является частным случаем трансляции.</a:t>
-            </a:r>
-          </a:p>
-          <a:p>
-            <a:r>
-              <a:rPr lang="ru-RU" dirty="0"/>
-              <a:t>Компилятор – программа, выполняющая трансляцию из языка высокого уровня (под этим будем понимать язык, не имеющий однозначного отображения на машинный код) в машинный код.</a:t>
-            </a:r>
-          </a:p>
-          <a:p>
-            <a:r>
-              <a:rPr lang="ru-RU" dirty="0"/>
-              <a:t>Некоторые компиляторы (например,</a:t>
-            </a:r>
-            <a:r>
-              <a:rPr lang="en-US" dirty="0"/>
-              <a:t> GCC</a:t>
-            </a:r>
-            <a:r>
-              <a:rPr lang="ru-RU" dirty="0"/>
-              <a:t>)</a:t>
-            </a:r>
-            <a:r>
-              <a:rPr lang="en-US" dirty="0"/>
-              <a:t>, </a:t>
-            </a:r>
-            <a:r>
-              <a:rPr lang="ru-RU" dirty="0"/>
-              <a:t>выполняют трансляцию кода в язык ассемблера, а затем вызывают ассемблер для окончательной генерации машинного кода.</a:t>
-            </a:r>
-            <a:r>
-              <a:rPr lang="en-US" dirty="0"/>
-              <a:t> </a:t>
-            </a:r>
-            <a:r>
-              <a:rPr lang="ru-RU" dirty="0"/>
-              <a:t>Примером компилятора, который поступает иначе, является компилятор </a:t>
-            </a:r>
-            <a:r>
-              <a:rPr lang="en-US" dirty="0"/>
-              <a:t>MSVC </a:t>
-            </a:r>
-            <a:r>
-              <a:rPr lang="ru-RU" dirty="0"/>
-              <a:t>самостоятельно генерирует машинный код.</a:t>
-            </a:r>
-          </a:p>
-          <a:p>
-            <a:r>
-              <a:rPr lang="ru-RU" dirty="0"/>
-              <a:t>Отдельным случаем являются </a:t>
-            </a:r>
-            <a:r>
-              <a:rPr lang="ru-RU" dirty="0" err="1"/>
-              <a:t>транспиляторы</a:t>
-            </a:r>
-            <a:r>
-              <a:rPr lang="ru-RU" dirty="0"/>
-              <a:t> – программы, выполняющие перевод кода программы между языками высокого уровня. Примером является </a:t>
-            </a:r>
-            <a:r>
-              <a:rPr lang="ru-RU" dirty="0" err="1"/>
-              <a:t>транспилятор</a:t>
-            </a:r>
-            <a:r>
-              <a:rPr lang="ru-RU" dirty="0"/>
-              <a:t> языка </a:t>
-            </a:r>
-            <a:r>
-              <a:rPr lang="en-US" dirty="0"/>
-              <a:t>TypeScript</a:t>
-            </a:r>
-            <a:r>
-              <a:rPr lang="ru-RU" dirty="0"/>
-              <a:t>, генерирующий на выходе код на</a:t>
-            </a:r>
-            <a:r>
-              <a:rPr lang="en-US" dirty="0"/>
-              <a:t> JavaScript</a:t>
-            </a:r>
-            <a:r>
-              <a:rPr lang="ru-RU" dirty="0"/>
-              <a:t>.</a:t>
-            </a:r>
-          </a:p>
-          <a:p>
-            <a:r>
-              <a:rPr lang="ru-RU" dirty="0"/>
-              <a:t>Историческим примером является </a:t>
-            </a:r>
-            <a:r>
-              <a:rPr lang="ru-RU" dirty="0" err="1"/>
-              <a:t>транспилятор</a:t>
-            </a:r>
-            <a:r>
-              <a:rPr lang="ru-RU" dirty="0"/>
-              <a:t> языка  </a:t>
-            </a:r>
-            <a:r>
-              <a:rPr lang="en-US" dirty="0"/>
-              <a:t>C With Classes</a:t>
-            </a:r>
-            <a:r>
-              <a:rPr lang="ru-RU" dirty="0"/>
-              <a:t>, из которого развился С++. Для экономии ресурсов Б. Страуструп создал для своего языка </a:t>
-            </a:r>
-            <a:r>
-              <a:rPr lang="ru-RU" dirty="0" err="1"/>
-              <a:t>транспилятор</a:t>
-            </a:r>
-            <a:r>
-              <a:rPr lang="ru-RU" dirty="0"/>
-              <a:t> в язык С вместо полноценного компилятора. </a:t>
-            </a:r>
-          </a:p>
-          <a:p>
-            <a:r>
-              <a:rPr lang="ru-RU" dirty="0"/>
-              <a:t>Наконец, стоит отметить, что трансляция в общем случае является преобразованием с потерями, поскольку не гарантируется возможность точного обратного преобразования. Особенно это верно для компиляции, поскольку</a:t>
-            </a:r>
-          </a:p>
-          <a:p>
-            <a:r>
-              <a:rPr lang="ru-RU" dirty="0"/>
-              <a:t>машинный код содержит только инструкции, задающие выполнение программы, в то время как остальная информация  - имена переменных и функций - может быть отброшена. Как следствие, точная декомпиляция не является выполнимой.</a:t>
-            </a:r>
+            <a:endParaRPr lang="ru-RU" dirty="0"/>
           </a:p>
         </p:txBody>
       </p:sp>
@@ -2692,7 +2643,7 @@
           <a:p>
             <a:fld id="{A8B5C656-B1C2-48D6-B4C0-50C1DF62A042}" type="slidenum">
               <a:rPr lang="en-US" smtClean="0"/>
-              <a:t>13</a:t>
+              <a:t>12</a:t>
             </a:fld>
             <a:endParaRPr lang="en-US"/>
           </a:p>
@@ -2701,7 +2652,7 @@
     </p:spTree>
     <p:extLst>
       <p:ext uri="{BB962C8B-B14F-4D97-AF65-F5344CB8AC3E}">
-        <p14:creationId xmlns:p14="http://schemas.microsoft.com/office/powerpoint/2010/main" val="2270911349"/>
+        <p14:creationId xmlns:p14="http://schemas.microsoft.com/office/powerpoint/2010/main" val="396562301"/>
       </p:ext>
     </p:extLst>
   </p:cSld>
@@ -2755,7 +2706,140 @@
           <a:bodyPr/>
           <a:lstStyle/>
           <a:p>
-            <a:endParaRPr lang="ru-RU" dirty="0"/>
+            <a:r>
+              <a:rPr lang="ru-RU" dirty="0"/>
+              <a:t>В общем случае процесс перевода кода программы из представления на языке А в представление на языке Б называется трансляцией.</a:t>
+            </a:r>
+          </a:p>
+          <a:p>
+            <a:r>
+              <a:rPr lang="ru-RU" dirty="0"/>
+              <a:t>Ассемблирование является частным случаем трансляции.</a:t>
+            </a:r>
+          </a:p>
+          <a:p>
+            <a:r>
+              <a:rPr lang="ru-RU" dirty="0"/>
+              <a:t>Компилятор – программа, выполняющая трансляцию из языка высокого уровня (под этим будем понимать язык, не имеющий однозначного отображения на машинный код) в машинный код.</a:t>
+            </a:r>
+          </a:p>
+          <a:p>
+            <a:r>
+              <a:rPr lang="ru-RU" dirty="0"/>
+              <a:t>Некоторые компиляторы (например,</a:t>
+            </a:r>
+            <a:r>
+              <a:rPr lang="en-US" dirty="0"/>
+              <a:t> GCC</a:t>
+            </a:r>
+            <a:r>
+              <a:rPr lang="ru-RU" dirty="0"/>
+              <a:t>)</a:t>
+            </a:r>
+            <a:r>
+              <a:rPr lang="en-US" dirty="0"/>
+              <a:t>, </a:t>
+            </a:r>
+            <a:r>
+              <a:rPr lang="ru-RU" dirty="0"/>
+              <a:t>выполняют трансляцию кода в язык ассемблера, а затем вызывают ассемблер для окончательной генерации машинного кода.</a:t>
+            </a:r>
+            <a:r>
+              <a:rPr lang="en-US" dirty="0"/>
+              <a:t> </a:t>
+            </a:r>
+            <a:r>
+              <a:rPr lang="ru-RU" dirty="0"/>
+              <a:t>Примером компилятора, который поступает иначе, является компилятор </a:t>
+            </a:r>
+            <a:r>
+              <a:rPr lang="en-US" dirty="0"/>
+              <a:t>MSVC </a:t>
+            </a:r>
+            <a:r>
+              <a:rPr lang="ru-RU" dirty="0"/>
+              <a:t>самостоятельно генерирует машинный код.</a:t>
+            </a:r>
+          </a:p>
+          <a:p>
+            <a:r>
+              <a:rPr lang="ru-RU" dirty="0"/>
+              <a:t>Отдельным случаем являются </a:t>
+            </a:r>
+            <a:r>
+              <a:rPr lang="ru-RU" dirty="0" err="1"/>
+              <a:t>транспиляторы</a:t>
+            </a:r>
+            <a:r>
+              <a:rPr lang="ru-RU" dirty="0"/>
+              <a:t> – программы, выполняющие перевод кода программы между языками высокого уровня. Примером является </a:t>
+            </a:r>
+            <a:r>
+              <a:rPr lang="ru-RU" dirty="0" err="1"/>
+              <a:t>транспилятор</a:t>
+            </a:r>
+            <a:r>
+              <a:rPr lang="ru-RU" dirty="0"/>
+              <a:t> языка </a:t>
+            </a:r>
+            <a:r>
+              <a:rPr lang="en-US" dirty="0"/>
+              <a:t>TypeScript</a:t>
+            </a:r>
+            <a:r>
+              <a:rPr lang="ru-RU" dirty="0"/>
+              <a:t>, генерирующий на выходе код на</a:t>
+            </a:r>
+            <a:r>
+              <a:rPr lang="en-US" dirty="0"/>
+              <a:t> JavaScript</a:t>
+            </a:r>
+            <a:r>
+              <a:rPr lang="ru-RU" dirty="0"/>
+              <a:t>.</a:t>
+            </a:r>
+          </a:p>
+          <a:p>
+            <a:r>
+              <a:rPr lang="ru-RU" dirty="0"/>
+              <a:t>Историческим примером является </a:t>
+            </a:r>
+            <a:r>
+              <a:rPr lang="ru-RU" dirty="0" err="1"/>
+              <a:t>транспилятор</a:t>
+            </a:r>
+            <a:r>
+              <a:rPr lang="ru-RU" dirty="0"/>
+              <a:t> языка  </a:t>
+            </a:r>
+            <a:r>
+              <a:rPr lang="en-US" dirty="0"/>
+              <a:t>C With Classes</a:t>
+            </a:r>
+            <a:r>
+              <a:rPr lang="ru-RU" dirty="0"/>
+              <a:t>, из которого развился С++. Для экономии ресурсов Б. Страуструп создал для своего языка </a:t>
+            </a:r>
+            <a:r>
+              <a:rPr lang="ru-RU" dirty="0" err="1"/>
+              <a:t>транспилятор</a:t>
+            </a:r>
+            <a:r>
+              <a:rPr lang="ru-RU" dirty="0"/>
+              <a:t> в язык С вместо полноценного компилятора. </a:t>
+            </a:r>
+          </a:p>
+          <a:p>
+            <a:r>
+              <a:rPr lang="ru-RU" dirty="0"/>
+              <a:t>Наконец, стоит отметить, что трансляция в общем случае является преобразованием с потерями, поскольку не гарантируется возможность точного обратного преобразования. Особенно это верно для компиляции, поскольку</a:t>
+            </a:r>
+          </a:p>
+          <a:p>
+            <a:r>
+              <a:rPr lang="ru-RU" dirty="0"/>
+              <a:t>машинный код содержит только инструкции, задающие выполнение программы, в то время как остальная информация  - имена переменных и функций - может быть отброшена. Как следствие, точная декомпиляция не является выполнимой.</a:t>
+            </a:r>
           </a:p>
         </p:txBody>
       </p:sp>
@@ -2776,7 +2860,7 @@
           <a:p>
             <a:fld id="{A8B5C656-B1C2-48D6-B4C0-50C1DF62A042}" type="slidenum">
               <a:rPr lang="en-US" smtClean="0"/>
-              <a:t>17</a:t>
+              <a:t>13</a:t>
             </a:fld>
             <a:endParaRPr lang="en-US"/>
           </a:p>
@@ -2785,7 +2869,7 @@
     </p:spTree>
     <p:extLst>
       <p:ext uri="{BB962C8B-B14F-4D97-AF65-F5344CB8AC3E}">
-        <p14:creationId xmlns:p14="http://schemas.microsoft.com/office/powerpoint/2010/main" val="1630279279"/>
+        <p14:creationId xmlns:p14="http://schemas.microsoft.com/office/powerpoint/2010/main" val="2270911349"/>
       </p:ext>
     </p:extLst>
   </p:cSld>
@@ -2860,7 +2944,7 @@
           <a:p>
             <a:fld id="{A8B5C656-B1C2-48D6-B4C0-50C1DF62A042}" type="slidenum">
               <a:rPr lang="en-US" smtClean="0"/>
-              <a:t>18</a:t>
+              <a:t>16</a:t>
             </a:fld>
             <a:endParaRPr lang="en-US"/>
           </a:p>
@@ -2869,7 +2953,7 @@
     </p:spTree>
     <p:extLst>
       <p:ext uri="{BB962C8B-B14F-4D97-AF65-F5344CB8AC3E}">
-        <p14:creationId xmlns:p14="http://schemas.microsoft.com/office/powerpoint/2010/main" val="1964003724"/>
+        <p14:creationId xmlns:p14="http://schemas.microsoft.com/office/powerpoint/2010/main" val="1630279279"/>
       </p:ext>
     </p:extLst>
   </p:cSld>
@@ -6891,7 +6975,12 @@
             <p:ph type="sldNum" sz="quarter" idx="12"/>
           </p:nvPr>
         </p:nvSpPr>
-        <p:spPr/>
+        <p:spPr>
+          <a:xfrm>
+            <a:off x="10863072" y="6356350"/>
+            <a:ext cx="490728" cy="365125"/>
+          </a:xfrm>
+        </p:spPr>
         <p:txBody>
           <a:bodyPr/>
           <a:lstStyle/>
@@ -7065,7 +7154,7 @@
         </p:nvSpPr>
         <p:spPr>
           <a:xfrm>
-            <a:off x="2629233" y="1801177"/>
+            <a:off x="2629233" y="1807245"/>
             <a:ext cx="1440000" cy="365125"/>
           </a:xfrm>
           <a:prstGeom prst="rect">
@@ -7114,7 +7203,7 @@
         </p:nvSpPr>
         <p:spPr>
           <a:xfrm>
-            <a:off x="2629233" y="3380409"/>
+            <a:off x="2629233" y="3348014"/>
             <a:ext cx="1440000" cy="365125"/>
           </a:xfrm>
           <a:prstGeom prst="rect">
@@ -7169,7 +7258,7 @@
         </p:nvSpPr>
         <p:spPr>
           <a:xfrm>
-            <a:off x="1102278" y="3384825"/>
+            <a:off x="1102278" y="3348014"/>
             <a:ext cx="1440000" cy="365125"/>
           </a:xfrm>
           <a:prstGeom prst="rect">
@@ -7224,7 +7313,7 @@
         </p:nvSpPr>
         <p:spPr>
           <a:xfrm>
-            <a:off x="4616849" y="1384029"/>
+            <a:off x="1102278" y="3800831"/>
             <a:ext cx="1440000" cy="365125"/>
           </a:xfrm>
           <a:prstGeom prst="rect">
@@ -7273,7 +7362,7 @@
         </p:nvSpPr>
         <p:spPr>
           <a:xfrm>
-            <a:off x="6143804" y="1384028"/>
+            <a:off x="2629233" y="3799577"/>
             <a:ext cx="1440000" cy="365125"/>
           </a:xfrm>
           <a:prstGeom prst="rect">
@@ -7371,7 +7460,7 @@
         </p:nvSpPr>
         <p:spPr>
           <a:xfrm>
-            <a:off x="2629233" y="2216001"/>
+            <a:off x="2629233" y="2219381"/>
             <a:ext cx="1440000" cy="365125"/>
           </a:xfrm>
           <a:prstGeom prst="rect">
@@ -7420,7 +7509,7 @@
         </p:nvSpPr>
         <p:spPr>
           <a:xfrm>
-            <a:off x="1088659" y="2813622"/>
+            <a:off x="1102278" y="2705775"/>
             <a:ext cx="1440000" cy="365125"/>
           </a:xfrm>
           <a:prstGeom prst="rect">
@@ -7469,7 +7558,7 @@
         </p:nvSpPr>
         <p:spPr>
           <a:xfrm>
-            <a:off x="2633250" y="2813623"/>
+            <a:off x="2629233" y="2705776"/>
             <a:ext cx="1440000" cy="365125"/>
           </a:xfrm>
           <a:prstGeom prst="rect">
@@ -7518,7 +7607,7 @@
         </p:nvSpPr>
         <p:spPr>
           <a:xfrm>
-            <a:off x="2414074" y="2446727"/>
+            <a:off x="2414074" y="2401007"/>
             <a:ext cx="343364" cy="369332"/>
           </a:xfrm>
           <a:prstGeom prst="rect">
@@ -7553,7 +7642,7 @@
         </p:nvSpPr>
         <p:spPr>
           <a:xfrm>
-            <a:off x="6135813" y="2582348"/>
+            <a:off x="10137555" y="1379614"/>
             <a:ext cx="1440000" cy="365125"/>
           </a:xfrm>
           <a:prstGeom prst="rect">
@@ -7611,7 +7700,7 @@
         </p:nvSpPr>
         <p:spPr>
           <a:xfrm>
-            <a:off x="4608858" y="2586619"/>
+            <a:off x="8610600" y="1383885"/>
             <a:ext cx="1440000" cy="365125"/>
           </a:xfrm>
           <a:prstGeom prst="rect">
@@ -7669,7 +7758,7 @@
         </p:nvSpPr>
         <p:spPr>
           <a:xfrm>
-            <a:off x="4608858" y="3007339"/>
+            <a:off x="8610600" y="1804605"/>
             <a:ext cx="1440000" cy="365125"/>
           </a:xfrm>
           <a:prstGeom prst="rect">
@@ -7727,7 +7816,7 @@
         </p:nvSpPr>
         <p:spPr>
           <a:xfrm>
-            <a:off x="6135813" y="3007338"/>
+            <a:off x="10137555" y="1804604"/>
             <a:ext cx="1440000" cy="365125"/>
           </a:xfrm>
           <a:prstGeom prst="rect">
@@ -7785,7 +7874,7 @@
         </p:nvSpPr>
         <p:spPr>
           <a:xfrm>
-            <a:off x="8337926" y="1808688"/>
+            <a:off x="8643658" y="2818230"/>
             <a:ext cx="1440000" cy="365125"/>
           </a:xfrm>
           <a:prstGeom prst="rect">
@@ -7840,7 +7929,7 @@
         </p:nvSpPr>
         <p:spPr>
           <a:xfrm>
-            <a:off x="8337926" y="1378057"/>
+            <a:off x="8643658" y="2387599"/>
             <a:ext cx="1440000" cy="365125"/>
           </a:xfrm>
           <a:prstGeom prst="rect">
@@ -7895,7 +7984,7 @@
         </p:nvSpPr>
         <p:spPr>
           <a:xfrm>
-            <a:off x="9864881" y="1807620"/>
+            <a:off x="10170613" y="2817162"/>
             <a:ext cx="1440000" cy="365125"/>
           </a:xfrm>
           <a:prstGeom prst="rect">
@@ -7950,7 +8039,7 @@
         </p:nvSpPr>
         <p:spPr>
           <a:xfrm>
-            <a:off x="8337926" y="3629688"/>
+            <a:off x="8643658" y="4311570"/>
             <a:ext cx="1440000" cy="365125"/>
           </a:xfrm>
           <a:prstGeom prst="rect">
@@ -8005,7 +8094,7 @@
         </p:nvSpPr>
         <p:spPr>
           <a:xfrm>
-            <a:off x="9864881" y="3629688"/>
+            <a:off x="10170613" y="4311570"/>
             <a:ext cx="1440000" cy="365125"/>
           </a:xfrm>
           <a:prstGeom prst="rect">
@@ -8060,7 +8149,7 @@
         </p:nvSpPr>
         <p:spPr>
           <a:xfrm>
-            <a:off x="9648772" y="3897574"/>
+            <a:off x="9954504" y="4503256"/>
             <a:ext cx="343364" cy="369332"/>
           </a:xfrm>
           <a:prstGeom prst="rect">
@@ -8095,7 +8184,7 @@
         </p:nvSpPr>
         <p:spPr>
           <a:xfrm>
-            <a:off x="8337926" y="4227311"/>
+            <a:off x="8643658" y="4832993"/>
             <a:ext cx="1440000" cy="365125"/>
           </a:xfrm>
           <a:prstGeom prst="rect">
@@ -8150,7 +8239,7 @@
         </p:nvSpPr>
         <p:spPr>
           <a:xfrm>
-            <a:off x="9864881" y="4227311"/>
+            <a:off x="10170613" y="4832993"/>
             <a:ext cx="1440000" cy="365125"/>
           </a:xfrm>
           <a:prstGeom prst="rect">
@@ -8205,7 +8294,7 @@
         </p:nvSpPr>
         <p:spPr>
           <a:xfrm>
-            <a:off x="8337926" y="2454668"/>
+            <a:off x="8643658" y="3334670"/>
             <a:ext cx="1440000" cy="365125"/>
           </a:xfrm>
           <a:prstGeom prst="rect">
@@ -8260,7 +8349,7 @@
         </p:nvSpPr>
         <p:spPr>
           <a:xfrm>
-            <a:off x="9864881" y="2454668"/>
+            <a:off x="10170613" y="3334670"/>
             <a:ext cx="1440000" cy="365125"/>
           </a:xfrm>
           <a:prstGeom prst="rect">
@@ -8315,7 +8404,7 @@
         </p:nvSpPr>
         <p:spPr>
           <a:xfrm>
-            <a:off x="9648772" y="2722554"/>
+            <a:off x="9954504" y="3518736"/>
             <a:ext cx="343364" cy="369332"/>
           </a:xfrm>
           <a:prstGeom prst="rect">
@@ -8350,7 +8439,7 @@
         </p:nvSpPr>
         <p:spPr>
           <a:xfrm>
-            <a:off x="8337926" y="3052291"/>
+            <a:off x="8643658" y="3802753"/>
             <a:ext cx="1440000" cy="365125"/>
           </a:xfrm>
           <a:prstGeom prst="rect">
@@ -8405,7 +8494,7 @@
         </p:nvSpPr>
         <p:spPr>
           <a:xfrm>
-            <a:off x="9864881" y="3052291"/>
+            <a:off x="10170613" y="3802753"/>
             <a:ext cx="1440000" cy="365125"/>
           </a:xfrm>
           <a:prstGeom prst="rect">
@@ -8460,7 +8549,7 @@
         </p:nvSpPr>
         <p:spPr>
           <a:xfrm>
-            <a:off x="4608828" y="3660540"/>
+            <a:off x="4838830" y="1392671"/>
             <a:ext cx="1440000" cy="365125"/>
           </a:xfrm>
           <a:prstGeom prst="rect">
@@ -8512,7 +8601,7 @@
         </p:nvSpPr>
         <p:spPr>
           <a:xfrm>
-            <a:off x="6143804" y="3657160"/>
+            <a:off x="6373806" y="1389291"/>
             <a:ext cx="1440000" cy="365125"/>
           </a:xfrm>
           <a:prstGeom prst="rect">
@@ -8564,7 +8653,7 @@
         </p:nvSpPr>
         <p:spPr>
           <a:xfrm>
-            <a:off x="4603230" y="4254781"/>
+            <a:off x="4833232" y="1903092"/>
             <a:ext cx="1440000" cy="365125"/>
           </a:xfrm>
           <a:prstGeom prst="rect">
@@ -8616,7 +8705,7 @@
         </p:nvSpPr>
         <p:spPr>
           <a:xfrm>
-            <a:off x="6147821" y="4254782"/>
+            <a:off x="6377823" y="1903093"/>
             <a:ext cx="1440000" cy="365125"/>
           </a:xfrm>
           <a:prstGeom prst="rect">
@@ -8668,7 +8757,7 @@
         </p:nvSpPr>
         <p:spPr>
           <a:xfrm>
-            <a:off x="5921135" y="3887886"/>
+            <a:off x="6151137" y="1589537"/>
             <a:ext cx="343364" cy="369332"/>
           </a:xfrm>
           <a:prstGeom prst="rect">
@@ -8808,7 +8897,7 @@
         </p:nvSpPr>
         <p:spPr>
           <a:xfrm>
-            <a:off x="4510349" y="5333527"/>
+            <a:off x="1102200" y="6330065"/>
             <a:ext cx="4100251" cy="369332"/>
           </a:xfrm>
           <a:prstGeom prst="rect">
@@ -8851,7 +8940,7 @@
         </p:nvSpPr>
         <p:spPr>
           <a:xfrm>
-            <a:off x="4510350" y="5993661"/>
+            <a:off x="5059966" y="5327671"/>
             <a:ext cx="2200282" cy="369332"/>
           </a:xfrm>
           <a:prstGeom prst="rect">
@@ -8886,7 +8975,7 @@
         </p:nvSpPr>
         <p:spPr>
           <a:xfrm>
-            <a:off x="4603230" y="4832180"/>
+            <a:off x="4833232" y="2334258"/>
             <a:ext cx="1440000" cy="365125"/>
           </a:xfrm>
           <a:prstGeom prst="rect">
@@ -8940,7 +9029,7 @@
         </p:nvSpPr>
         <p:spPr>
           <a:xfrm>
-            <a:off x="9332784" y="5339970"/>
+            <a:off x="8707380" y="5735593"/>
             <a:ext cx="2206566" cy="369332"/>
           </a:xfrm>
           <a:prstGeom prst="rect">
@@ -8975,7 +9064,7 @@
         </p:nvSpPr>
         <p:spPr>
           <a:xfrm>
-            <a:off x="9332784" y="5668256"/>
+            <a:off x="8707380" y="6063879"/>
             <a:ext cx="2514984" cy="369332"/>
           </a:xfrm>
           <a:prstGeom prst="rect">
@@ -9010,7 +9099,7 @@
         </p:nvSpPr>
         <p:spPr>
           <a:xfrm>
-            <a:off x="9332784" y="5996542"/>
+            <a:off x="8707380" y="6392165"/>
             <a:ext cx="2322046" cy="369332"/>
           </a:xfrm>
           <a:prstGeom prst="rect">
@@ -9045,7 +9134,7 @@
         </p:nvSpPr>
         <p:spPr>
           <a:xfrm>
-            <a:off x="4510350" y="5673493"/>
+            <a:off x="8718024" y="5362275"/>
             <a:ext cx="2311402" cy="369332"/>
           </a:xfrm>
           <a:prstGeom prst="rect">
@@ -9218,52 +9307,6 @@
       </p:sp>
       <p:sp>
         <p:nvSpPr>
-          <p:cNvPr id="32" name="Прямоугольник 31">
-            <a:extLst>
-              <a:ext uri="{FF2B5EF4-FFF2-40B4-BE49-F238E27FC236}">
-                <a16:creationId xmlns:a16="http://schemas.microsoft.com/office/drawing/2014/main" id="{07297CD4-A811-DEE1-767F-DF1C3555CA53}"/>
-              </a:ext>
-            </a:extLst>
-          </p:cNvPr>
-          <p:cNvSpPr/>
-          <p:nvPr/>
-        </p:nvSpPr>
-        <p:spPr>
-          <a:xfrm>
-            <a:off x="4289958" y="5417366"/>
-            <a:ext cx="246996" cy="259739"/>
-          </a:xfrm>
-          <a:prstGeom prst="rect">
-            <a:avLst/>
-          </a:prstGeom>
-        </p:spPr>
-        <p:style>
-          <a:lnRef idx="2">
-            <a:schemeClr val="accent3">
-              <a:shade val="50000"/>
-            </a:schemeClr>
-          </a:lnRef>
-          <a:fillRef idx="1">
-            <a:schemeClr val="accent3"/>
-          </a:fillRef>
-          <a:effectRef idx="0">
-            <a:schemeClr val="accent3"/>
-          </a:effectRef>
-          <a:fontRef idx="minor">
-            <a:schemeClr val="lt1"/>
-          </a:fontRef>
-        </p:style>
-        <p:txBody>
-          <a:bodyPr rtlCol="0" anchor="ctr"/>
-          <a:lstStyle/>
-          <a:p>
-            <a:pPr algn="ctr"/>
-            <a:endParaRPr lang="en-US" dirty="0"/>
-          </a:p>
-        </p:txBody>
-      </p:sp>
-      <p:sp>
-        <p:nvSpPr>
           <p:cNvPr id="33" name="Прямоугольник 32">
             <a:extLst>
               <a:ext uri="{FF2B5EF4-FFF2-40B4-BE49-F238E27FC236}">
@@ -9276,8 +9319,8 @@
         </p:nvSpPr>
         <p:spPr>
           <a:xfrm>
-            <a:off x="4283623" y="5719424"/>
-            <a:ext cx="270390" cy="278055"/>
+            <a:off x="8493728" y="5430265"/>
+            <a:ext cx="244526" cy="266738"/>
           </a:xfrm>
           <a:prstGeom prst="rect">
             <a:avLst/>
@@ -9331,7 +9374,7 @@
         </p:nvSpPr>
         <p:spPr>
           <a:xfrm>
-            <a:off x="4278261" y="6042825"/>
+            <a:off x="4833232" y="5401189"/>
             <a:ext cx="270390" cy="277118"/>
           </a:xfrm>
           <a:prstGeom prst="rect">
@@ -9380,7 +9423,7 @@
         </p:nvSpPr>
         <p:spPr>
           <a:xfrm>
-            <a:off x="9116662" y="5410368"/>
+            <a:off x="8491258" y="5805991"/>
             <a:ext cx="246996" cy="266738"/>
           </a:xfrm>
           <a:prstGeom prst="rect">
@@ -9432,7 +9475,7 @@
         </p:nvSpPr>
         <p:spPr>
           <a:xfrm>
-            <a:off x="9116662" y="5726122"/>
+            <a:off x="8491258" y="6121745"/>
             <a:ext cx="246996" cy="262530"/>
           </a:xfrm>
           <a:prstGeom prst="rect">
@@ -9488,7 +9531,7 @@
         </p:nvSpPr>
         <p:spPr>
           <a:xfrm>
-            <a:off x="9116662" y="6054408"/>
+            <a:off x="8491258" y="6450031"/>
             <a:ext cx="246996" cy="262530"/>
           </a:xfrm>
           <a:prstGeom prst="rect">
@@ -9610,7 +9653,7 @@
         </p:nvSpPr>
         <p:spPr>
           <a:xfrm>
-            <a:off x="6143804" y="1959511"/>
+            <a:off x="2628231" y="4311570"/>
             <a:ext cx="1440000" cy="365125"/>
           </a:xfrm>
           <a:prstGeom prst="rect">
@@ -9659,7 +9702,7 @@
         </p:nvSpPr>
         <p:spPr>
           <a:xfrm>
-            <a:off x="4616849" y="1959511"/>
+            <a:off x="1102278" y="4311570"/>
             <a:ext cx="1440000" cy="365125"/>
           </a:xfrm>
           <a:prstGeom prst="rect">
@@ -9691,6 +9734,615 @@
               <a:rPr lang="en-US" dirty="0"/>
               <a:t>RIP</a:t>
             </a:r>
+          </a:p>
+        </p:txBody>
+      </p:sp>
+      <p:sp>
+        <p:nvSpPr>
+          <p:cNvPr id="51" name="Прямоугольник 7">
+            <a:extLst>
+              <a:ext uri="{FF2B5EF4-FFF2-40B4-BE49-F238E27FC236}">
+                <a16:creationId xmlns:a16="http://schemas.microsoft.com/office/drawing/2014/main" id="{31A7A28F-19FB-602C-E04F-2C8D72E44ACB}"/>
+              </a:ext>
+            </a:extLst>
+          </p:cNvPr>
+          <p:cNvSpPr/>
+          <p:nvPr/>
+        </p:nvSpPr>
+        <p:spPr>
+          <a:xfrm>
+            <a:off x="840384" y="6390473"/>
+            <a:ext cx="261894" cy="264701"/>
+          </a:xfrm>
+          <a:prstGeom prst="rect">
+            <a:avLst/>
+          </a:prstGeom>
+        </p:spPr>
+        <p:style>
+          <a:lnRef idx="2">
+            <a:schemeClr val="accent3">
+              <a:shade val="15000"/>
+            </a:schemeClr>
+          </a:lnRef>
+          <a:fillRef idx="1">
+            <a:schemeClr val="accent3"/>
+          </a:fillRef>
+          <a:effectRef idx="0">
+            <a:schemeClr val="accent3"/>
+          </a:effectRef>
+          <a:fontRef idx="minor">
+            <a:schemeClr val="lt1"/>
+          </a:fontRef>
+        </p:style>
+        <p:txBody>
+          <a:bodyPr rtlCol="0" anchor="ctr"/>
+          <a:lstStyle/>
+          <a:p>
+            <a:pPr algn="ctr"/>
+            <a:endParaRPr lang="en-US" dirty="0"/>
+          </a:p>
+        </p:txBody>
+      </p:sp>
+      <p:sp>
+        <p:nvSpPr>
+          <p:cNvPr id="52" name="Прямоугольник 25">
+            <a:extLst>
+              <a:ext uri="{FF2B5EF4-FFF2-40B4-BE49-F238E27FC236}">
+                <a16:creationId xmlns:a16="http://schemas.microsoft.com/office/drawing/2014/main" id="{BF76E437-6BBF-5DAE-7184-8B48DA18F7B4}"/>
+              </a:ext>
+            </a:extLst>
+          </p:cNvPr>
+          <p:cNvSpPr/>
+          <p:nvPr/>
+        </p:nvSpPr>
+        <p:spPr>
+          <a:xfrm>
+            <a:off x="4838830" y="2840085"/>
+            <a:ext cx="1440000" cy="365125"/>
+          </a:xfrm>
+          <a:prstGeom prst="rect">
+            <a:avLst/>
+          </a:prstGeom>
+          <a:solidFill>
+            <a:schemeClr val="accent2">
+              <a:lumMod val="50000"/>
+            </a:schemeClr>
+          </a:solidFill>
+          <a:ln>
+            <a:solidFill>
+              <a:schemeClr val="accent2">
+                <a:lumMod val="75000"/>
+              </a:schemeClr>
+            </a:solidFill>
+          </a:ln>
+        </p:spPr>
+        <p:style>
+          <a:lnRef idx="2">
+            <a:schemeClr val="accent6"/>
+          </a:lnRef>
+          <a:fillRef idx="1">
+            <a:schemeClr val="lt1"/>
+          </a:fillRef>
+          <a:effectRef idx="0">
+            <a:schemeClr val="accent6"/>
+          </a:effectRef>
+          <a:fontRef idx="minor">
+            <a:schemeClr val="dk1"/>
+          </a:fontRef>
+        </p:style>
+        <p:txBody>
+          <a:bodyPr rtlCol="0" anchor="ctr"/>
+          <a:lstStyle/>
+          <a:p>
+            <a:pPr algn="ctr"/>
+            <a:r>
+              <a:rPr lang="en-US" dirty="0">
+                <a:solidFill>
+                  <a:schemeClr val="bg1"/>
+                </a:solidFill>
+              </a:rPr>
+              <a:t>R0</a:t>
+            </a:r>
+          </a:p>
+        </p:txBody>
+      </p:sp>
+      <p:sp>
+        <p:nvSpPr>
+          <p:cNvPr id="53" name="Прямоугольник 26">
+            <a:extLst>
+              <a:ext uri="{FF2B5EF4-FFF2-40B4-BE49-F238E27FC236}">
+                <a16:creationId xmlns:a16="http://schemas.microsoft.com/office/drawing/2014/main" id="{438742D0-031E-08C0-F264-BA6C2C081D80}"/>
+              </a:ext>
+            </a:extLst>
+          </p:cNvPr>
+          <p:cNvSpPr/>
+          <p:nvPr/>
+        </p:nvSpPr>
+        <p:spPr>
+          <a:xfrm>
+            <a:off x="6373806" y="2836705"/>
+            <a:ext cx="1440000" cy="365125"/>
+          </a:xfrm>
+          <a:prstGeom prst="rect">
+            <a:avLst/>
+          </a:prstGeom>
+          <a:solidFill>
+            <a:schemeClr val="accent2">
+              <a:lumMod val="50000"/>
+            </a:schemeClr>
+          </a:solidFill>
+          <a:ln>
+            <a:solidFill>
+              <a:schemeClr val="accent2">
+                <a:lumMod val="75000"/>
+              </a:schemeClr>
+            </a:solidFill>
+          </a:ln>
+        </p:spPr>
+        <p:style>
+          <a:lnRef idx="2">
+            <a:schemeClr val="accent6"/>
+          </a:lnRef>
+          <a:fillRef idx="1">
+            <a:schemeClr val="lt1"/>
+          </a:fillRef>
+          <a:effectRef idx="0">
+            <a:schemeClr val="accent6"/>
+          </a:effectRef>
+          <a:fontRef idx="minor">
+            <a:schemeClr val="dk1"/>
+          </a:fontRef>
+        </p:style>
+        <p:txBody>
+          <a:bodyPr rtlCol="0" anchor="ctr"/>
+          <a:lstStyle/>
+          <a:p>
+            <a:pPr algn="ctr"/>
+            <a:r>
+              <a:rPr lang="en-US" dirty="0">
+                <a:solidFill>
+                  <a:schemeClr val="bg1"/>
+                </a:solidFill>
+              </a:rPr>
+              <a:t>R1</a:t>
+            </a:r>
+          </a:p>
+        </p:txBody>
+      </p:sp>
+      <p:sp>
+        <p:nvSpPr>
+          <p:cNvPr id="54" name="Прямоугольник 27">
+            <a:extLst>
+              <a:ext uri="{FF2B5EF4-FFF2-40B4-BE49-F238E27FC236}">
+                <a16:creationId xmlns:a16="http://schemas.microsoft.com/office/drawing/2014/main" id="{0C346D8C-DCE3-ACC8-2B29-38B113ECABDA}"/>
+              </a:ext>
+            </a:extLst>
+          </p:cNvPr>
+          <p:cNvSpPr/>
+          <p:nvPr/>
+        </p:nvSpPr>
+        <p:spPr>
+          <a:xfrm>
+            <a:off x="4833232" y="3348014"/>
+            <a:ext cx="1440000" cy="365125"/>
+          </a:xfrm>
+          <a:prstGeom prst="rect">
+            <a:avLst/>
+          </a:prstGeom>
+          <a:solidFill>
+            <a:schemeClr val="accent2">
+              <a:lumMod val="50000"/>
+            </a:schemeClr>
+          </a:solidFill>
+          <a:ln>
+            <a:solidFill>
+              <a:schemeClr val="accent2">
+                <a:lumMod val="75000"/>
+              </a:schemeClr>
+            </a:solidFill>
+          </a:ln>
+        </p:spPr>
+        <p:style>
+          <a:lnRef idx="2">
+            <a:schemeClr val="accent6"/>
+          </a:lnRef>
+          <a:fillRef idx="1">
+            <a:schemeClr val="lt1"/>
+          </a:fillRef>
+          <a:effectRef idx="0">
+            <a:schemeClr val="accent6"/>
+          </a:effectRef>
+          <a:fontRef idx="minor">
+            <a:schemeClr val="dk1"/>
+          </a:fontRef>
+        </p:style>
+        <p:txBody>
+          <a:bodyPr rtlCol="0" anchor="ctr"/>
+          <a:lstStyle/>
+          <a:p>
+            <a:pPr algn="ctr"/>
+            <a:r>
+              <a:rPr lang="en-US" dirty="0">
+                <a:solidFill>
+                  <a:schemeClr val="bg1"/>
+                </a:solidFill>
+              </a:rPr>
+              <a:t>R6</a:t>
+            </a:r>
+          </a:p>
+        </p:txBody>
+      </p:sp>
+      <p:sp>
+        <p:nvSpPr>
+          <p:cNvPr id="55" name="Прямоугольник 28">
+            <a:extLst>
+              <a:ext uri="{FF2B5EF4-FFF2-40B4-BE49-F238E27FC236}">
+                <a16:creationId xmlns:a16="http://schemas.microsoft.com/office/drawing/2014/main" id="{CE1ED0C3-2CF7-E4CF-5F93-3D644A7E48F0}"/>
+              </a:ext>
+            </a:extLst>
+          </p:cNvPr>
+          <p:cNvSpPr/>
+          <p:nvPr/>
+        </p:nvSpPr>
+        <p:spPr>
+          <a:xfrm>
+            <a:off x="6377823" y="3348015"/>
+            <a:ext cx="1440000" cy="365125"/>
+          </a:xfrm>
+          <a:prstGeom prst="rect">
+            <a:avLst/>
+          </a:prstGeom>
+          <a:solidFill>
+            <a:schemeClr val="accent2">
+              <a:lumMod val="50000"/>
+            </a:schemeClr>
+          </a:solidFill>
+          <a:ln>
+            <a:solidFill>
+              <a:schemeClr val="accent2">
+                <a:lumMod val="75000"/>
+              </a:schemeClr>
+            </a:solidFill>
+          </a:ln>
+        </p:spPr>
+        <p:style>
+          <a:lnRef idx="2">
+            <a:schemeClr val="accent6"/>
+          </a:lnRef>
+          <a:fillRef idx="1">
+            <a:schemeClr val="lt1"/>
+          </a:fillRef>
+          <a:effectRef idx="0">
+            <a:schemeClr val="accent6"/>
+          </a:effectRef>
+          <a:fontRef idx="minor">
+            <a:schemeClr val="dk1"/>
+          </a:fontRef>
+        </p:style>
+        <p:txBody>
+          <a:bodyPr rtlCol="0" anchor="ctr"/>
+          <a:lstStyle/>
+          <a:p>
+            <a:pPr algn="ctr"/>
+            <a:r>
+              <a:rPr lang="en-US" dirty="0">
+                <a:solidFill>
+                  <a:schemeClr val="bg1"/>
+                </a:solidFill>
+              </a:rPr>
+              <a:t>R7</a:t>
+            </a:r>
+          </a:p>
+        </p:txBody>
+      </p:sp>
+      <p:sp>
+        <p:nvSpPr>
+          <p:cNvPr id="56" name="TextBox 55">
+            <a:extLst>
+              <a:ext uri="{FF2B5EF4-FFF2-40B4-BE49-F238E27FC236}">
+                <a16:creationId xmlns:a16="http://schemas.microsoft.com/office/drawing/2014/main" id="{0789F14E-64FE-907D-94A2-2E790CFABEA2}"/>
+              </a:ext>
+            </a:extLst>
+          </p:cNvPr>
+          <p:cNvSpPr txBox="1"/>
+          <p:nvPr/>
+        </p:nvSpPr>
+        <p:spPr>
+          <a:xfrm>
+            <a:off x="6163726" y="3039875"/>
+            <a:ext cx="343364" cy="369332"/>
+          </a:xfrm>
+          <a:prstGeom prst="rect">
+            <a:avLst/>
+          </a:prstGeom>
+          <a:noFill/>
+        </p:spPr>
+        <p:txBody>
+          <a:bodyPr wrap="none" rtlCol="0">
+            <a:spAutoFit/>
+          </a:bodyPr>
+          <a:lstStyle/>
+          <a:p>
+            <a:r>
+              <a:rPr lang="en-US" dirty="0"/>
+              <a:t>…</a:t>
+            </a:r>
+          </a:p>
+        </p:txBody>
+      </p:sp>
+      <p:sp>
+        <p:nvSpPr>
+          <p:cNvPr id="57" name="Прямоугольник 27">
+            <a:extLst>
+              <a:ext uri="{FF2B5EF4-FFF2-40B4-BE49-F238E27FC236}">
+                <a16:creationId xmlns:a16="http://schemas.microsoft.com/office/drawing/2014/main" id="{14582F6E-8739-837E-79B4-407A09486C4F}"/>
+              </a:ext>
+            </a:extLst>
+          </p:cNvPr>
+          <p:cNvSpPr/>
+          <p:nvPr/>
+        </p:nvSpPr>
+        <p:spPr>
+          <a:xfrm>
+            <a:off x="4833232" y="3761477"/>
+            <a:ext cx="1440000" cy="365125"/>
+          </a:xfrm>
+          <a:prstGeom prst="rect">
+            <a:avLst/>
+          </a:prstGeom>
+          <a:solidFill>
+            <a:schemeClr val="accent2">
+              <a:lumMod val="50000"/>
+            </a:schemeClr>
+          </a:solidFill>
+          <a:ln>
+            <a:solidFill>
+              <a:schemeClr val="accent2">
+                <a:lumMod val="75000"/>
+              </a:schemeClr>
+            </a:solidFill>
+          </a:ln>
+        </p:spPr>
+        <p:style>
+          <a:lnRef idx="2">
+            <a:schemeClr val="accent6"/>
+          </a:lnRef>
+          <a:fillRef idx="1">
+            <a:schemeClr val="lt1"/>
+          </a:fillRef>
+          <a:effectRef idx="0">
+            <a:schemeClr val="accent6"/>
+          </a:effectRef>
+          <a:fontRef idx="minor">
+            <a:schemeClr val="dk1"/>
+          </a:fontRef>
+        </p:style>
+        <p:txBody>
+          <a:bodyPr rtlCol="0" anchor="ctr"/>
+          <a:lstStyle/>
+          <a:p>
+            <a:pPr algn="ctr"/>
+            <a:r>
+              <a:rPr lang="en-US" dirty="0">
+                <a:solidFill>
+                  <a:schemeClr val="bg1"/>
+                </a:solidFill>
+              </a:rPr>
+              <a:t>FTAG</a:t>
+            </a:r>
+          </a:p>
+        </p:txBody>
+      </p:sp>
+      <p:sp>
+        <p:nvSpPr>
+          <p:cNvPr id="58" name="Прямоугольник 27">
+            <a:extLst>
+              <a:ext uri="{FF2B5EF4-FFF2-40B4-BE49-F238E27FC236}">
+                <a16:creationId xmlns:a16="http://schemas.microsoft.com/office/drawing/2014/main" id="{C0FCC791-D93F-7B5D-9703-ACABC540B8A7}"/>
+              </a:ext>
+            </a:extLst>
+          </p:cNvPr>
+          <p:cNvSpPr/>
+          <p:nvPr/>
+        </p:nvSpPr>
+        <p:spPr>
+          <a:xfrm>
+            <a:off x="6377823" y="3761477"/>
+            <a:ext cx="1440000" cy="365125"/>
+          </a:xfrm>
+          <a:prstGeom prst="rect">
+            <a:avLst/>
+          </a:prstGeom>
+          <a:solidFill>
+            <a:schemeClr val="accent2">
+              <a:lumMod val="50000"/>
+            </a:schemeClr>
+          </a:solidFill>
+          <a:ln>
+            <a:solidFill>
+              <a:schemeClr val="accent2">
+                <a:lumMod val="75000"/>
+              </a:schemeClr>
+            </a:solidFill>
+          </a:ln>
+        </p:spPr>
+        <p:style>
+          <a:lnRef idx="2">
+            <a:schemeClr val="accent6"/>
+          </a:lnRef>
+          <a:fillRef idx="1">
+            <a:schemeClr val="lt1"/>
+          </a:fillRef>
+          <a:effectRef idx="0">
+            <a:schemeClr val="accent6"/>
+          </a:effectRef>
+          <a:fontRef idx="minor">
+            <a:schemeClr val="dk1"/>
+          </a:fontRef>
+        </p:style>
+        <p:txBody>
+          <a:bodyPr rtlCol="0" anchor="ctr"/>
+          <a:lstStyle/>
+          <a:p>
+            <a:pPr algn="ctr"/>
+            <a:r>
+              <a:rPr lang="en-US" dirty="0">
+                <a:solidFill>
+                  <a:schemeClr val="bg1"/>
+                </a:solidFill>
+              </a:rPr>
+              <a:t>FSTATE</a:t>
+            </a:r>
+          </a:p>
+        </p:txBody>
+      </p:sp>
+      <p:sp>
+        <p:nvSpPr>
+          <p:cNvPr id="59" name="Прямоугольник 27">
+            <a:extLst>
+              <a:ext uri="{FF2B5EF4-FFF2-40B4-BE49-F238E27FC236}">
+                <a16:creationId xmlns:a16="http://schemas.microsoft.com/office/drawing/2014/main" id="{CE35028E-169E-C85C-5A4C-B6FA364DDF47}"/>
+              </a:ext>
+            </a:extLst>
+          </p:cNvPr>
+          <p:cNvSpPr/>
+          <p:nvPr/>
+        </p:nvSpPr>
+        <p:spPr>
+          <a:xfrm>
+            <a:off x="4833232" y="4196488"/>
+            <a:ext cx="1440000" cy="365125"/>
+          </a:xfrm>
+          <a:prstGeom prst="rect">
+            <a:avLst/>
+          </a:prstGeom>
+          <a:solidFill>
+            <a:schemeClr val="accent2">
+              <a:lumMod val="50000"/>
+            </a:schemeClr>
+          </a:solidFill>
+          <a:ln>
+            <a:solidFill>
+              <a:schemeClr val="accent2">
+                <a:lumMod val="75000"/>
+              </a:schemeClr>
+            </a:solidFill>
+          </a:ln>
+        </p:spPr>
+        <p:style>
+          <a:lnRef idx="2">
+            <a:schemeClr val="accent6"/>
+          </a:lnRef>
+          <a:fillRef idx="1">
+            <a:schemeClr val="lt1"/>
+          </a:fillRef>
+          <a:effectRef idx="0">
+            <a:schemeClr val="accent6"/>
+          </a:effectRef>
+          <a:fontRef idx="minor">
+            <a:schemeClr val="dk1"/>
+          </a:fontRef>
+        </p:style>
+        <p:txBody>
+          <a:bodyPr rtlCol="0" anchor="ctr"/>
+          <a:lstStyle/>
+          <a:p>
+            <a:pPr algn="ctr"/>
+            <a:r>
+              <a:rPr lang="en-US" dirty="0">
+                <a:solidFill>
+                  <a:schemeClr val="bg1"/>
+                </a:solidFill>
+              </a:rPr>
+              <a:t>FTAG</a:t>
+            </a:r>
+          </a:p>
+        </p:txBody>
+      </p:sp>
+      <p:sp>
+        <p:nvSpPr>
+          <p:cNvPr id="32" name="TextBox 31">
+            <a:extLst>
+              <a:ext uri="{FF2B5EF4-FFF2-40B4-BE49-F238E27FC236}">
+                <a16:creationId xmlns:a16="http://schemas.microsoft.com/office/drawing/2014/main" id="{B3737AC7-D1DA-36DD-5297-CDDA8B6A552D}"/>
+              </a:ext>
+            </a:extLst>
+          </p:cNvPr>
+          <p:cNvSpPr txBox="1"/>
+          <p:nvPr/>
+        </p:nvSpPr>
+        <p:spPr>
+          <a:xfrm>
+            <a:off x="5059966" y="5665152"/>
+            <a:ext cx="2513701" cy="369332"/>
+          </a:xfrm>
+          <a:prstGeom prst="rect">
+            <a:avLst/>
+          </a:prstGeom>
+          <a:noFill/>
+        </p:spPr>
+        <p:txBody>
+          <a:bodyPr wrap="none" rtlCol="0">
+            <a:spAutoFit/>
+          </a:bodyPr>
+          <a:lstStyle/>
+          <a:p>
+            <a:r>
+              <a:rPr lang="ru-RU" dirty="0"/>
+              <a:t>регистры сопроцессора</a:t>
+            </a:r>
+          </a:p>
+        </p:txBody>
+      </p:sp>
+      <p:sp>
+        <p:nvSpPr>
+          <p:cNvPr id="43" name="Прямоугольник 33">
+            <a:extLst>
+              <a:ext uri="{FF2B5EF4-FFF2-40B4-BE49-F238E27FC236}">
+                <a16:creationId xmlns:a16="http://schemas.microsoft.com/office/drawing/2014/main" id="{DD3C3D0E-A591-ABEC-D198-A762FDB0D31F}"/>
+              </a:ext>
+            </a:extLst>
+          </p:cNvPr>
+          <p:cNvSpPr/>
+          <p:nvPr/>
+        </p:nvSpPr>
+        <p:spPr>
+          <a:xfrm>
+            <a:off x="4833232" y="5735331"/>
+            <a:ext cx="270390" cy="277118"/>
+          </a:xfrm>
+          <a:prstGeom prst="rect">
+            <a:avLst/>
+          </a:prstGeom>
+          <a:solidFill>
+            <a:srgbClr val="843C0C"/>
+          </a:solidFill>
+          <a:ln>
+            <a:solidFill>
+              <a:srgbClr val="C55A11"/>
+            </a:solidFill>
+          </a:ln>
+        </p:spPr>
+        <p:style>
+          <a:lnRef idx="1">
+            <a:schemeClr val="accent3"/>
+          </a:lnRef>
+          <a:fillRef idx="3">
+            <a:schemeClr val="accent3"/>
+          </a:fillRef>
+          <a:effectRef idx="2">
+            <a:schemeClr val="accent3"/>
+          </a:effectRef>
+          <a:fontRef idx="minor">
+            <a:schemeClr val="lt1"/>
+          </a:fontRef>
+        </p:style>
+        <p:txBody>
+          <a:bodyPr rtlCol="0" anchor="ctr"/>
+          <a:lstStyle/>
+          <a:p>
+            <a:pPr algn="ctr"/>
+            <a:endParaRPr lang="en-US" dirty="0"/>
           </a:p>
         </p:txBody>
       </p:sp>
@@ -9917,7 +10569,15 @@
             </a:pPr>
             <a:r>
               <a:rPr lang="ru-RU" sz="2000" dirty="0"/>
-              <a:t>Запись 1-/2-байтовую часть регистра </a:t>
+              <a:t>Запись</a:t>
+            </a:r>
+            <a:r>
+              <a:rPr lang="en-US" sz="2000" dirty="0"/>
+              <a:t> </a:t>
+            </a:r>
+            <a:r>
+              <a:rPr lang="ru-RU" sz="2000" dirty="0"/>
+              <a:t>в 1-/2-байтовую часть регистра </a:t>
             </a:r>
             <a:r>
               <a:rPr lang="ru-RU" sz="2000" b="1" dirty="0"/>
@@ -11552,14 +12212,24 @@
           </a:p>
           <a:p>
             <a:r>
-              <a:rPr lang="ru-RU" sz="2000" dirty="0"/>
-              <a:t>отсутствие проверок корректности действий программиста </a:t>
+              <a:rPr lang="ru-RU" sz="2000" u="sng" dirty="0"/>
+              <a:t>отсутствие проверок </a:t>
+            </a:r>
+            <a:r>
+              <a:rPr lang="ru-RU" sz="2000" u="sng"/>
+              <a:t>корректности программы </a:t>
+            </a:r>
+            <a:r>
+              <a:rPr lang="ru-RU" sz="1800">
+                <a:sym typeface="Wingdings" panose="05000000000000000000" pitchFamily="2" charset="2"/>
+              </a:rPr>
+              <a:t></a:t>
             </a:r>
             <a:r>
               <a:rPr lang="ru-RU" sz="1800" dirty="0">
                 <a:sym typeface="Wingdings" panose="05000000000000000000" pitchFamily="2" charset="2"/>
               </a:rPr>
-              <a:t>;</a:t>
+              <a:t>;</a:t>
             </a:r>
           </a:p>
           <a:p>
@@ -11680,6 +12350,1329 @@
             <p:ph type="title"/>
           </p:nvPr>
         </p:nvSpPr>
+        <p:spPr/>
+        <p:txBody>
+          <a:bodyPr/>
+          <a:lstStyle/>
+          <a:p>
+            <a:r>
+              <a:rPr lang="ru-RU" dirty="0"/>
+              <a:t>Структура программы</a:t>
+            </a:r>
+            <a:endParaRPr lang="en-US" dirty="0"/>
+          </a:p>
+        </p:txBody>
+      </p:sp>
+      <p:sp>
+        <p:nvSpPr>
+          <p:cNvPr id="3" name="Объект 2">
+            <a:extLst>
+              <a:ext uri="{FF2B5EF4-FFF2-40B4-BE49-F238E27FC236}">
+                <a16:creationId xmlns:a16="http://schemas.microsoft.com/office/drawing/2014/main" id="{D4A55D7F-95B1-4B4F-BCE0-8CE97F5FD713}"/>
+              </a:ext>
+            </a:extLst>
+          </p:cNvPr>
+          <p:cNvSpPr>
+            <a:spLocks noGrp="1"/>
+          </p:cNvSpPr>
+          <p:nvPr>
+            <p:ph idx="1"/>
+          </p:nvPr>
+        </p:nvSpPr>
+        <p:spPr>
+          <a:xfrm>
+            <a:off x="838199" y="1477882"/>
+            <a:ext cx="6677891" cy="5151518"/>
+          </a:xfrm>
+        </p:spPr>
+        <p:txBody>
+          <a:bodyPr>
+            <a:normAutofit lnSpcReduction="10000"/>
+          </a:bodyPr>
+          <a:lstStyle/>
+          <a:p>
+            <a:pPr marL="0" indent="0">
+              <a:buNone/>
+            </a:pPr>
+            <a:r>
+              <a:rPr lang="ru-RU" sz="2000" dirty="0"/>
+              <a:t>В языке ассемблера необходимо определить не только программу, но и структуру исполняемого файла в целом.</a:t>
+            </a:r>
+          </a:p>
+          <a:p>
+            <a:pPr marL="0" indent="0">
+              <a:buNone/>
+            </a:pPr>
+            <a:r>
+              <a:rPr lang="ru-RU" sz="2000" dirty="0"/>
+              <a:t>Всякий исполняемый файл содержит в себе несколько областей (</a:t>
+            </a:r>
+            <a:r>
+              <a:rPr lang="ru-RU" sz="2000" b="1" dirty="0"/>
+              <a:t>сегментов</a:t>
+            </a:r>
+            <a:r>
+              <a:rPr lang="ru-RU" sz="2000" dirty="0"/>
+              <a:t>/секций), хранящих код или данные программы или, в некоторых случаях, служебную информацию. Каждый сегмент имеет свое место загрузки и свои разрешения на доступ к нему.</a:t>
+            </a:r>
+          </a:p>
+          <a:p>
+            <a:pPr marL="0" indent="0">
+              <a:buNone/>
+            </a:pPr>
+            <a:r>
+              <a:rPr lang="ru-RU" sz="2000" dirty="0"/>
+              <a:t>При написании программы на языке ассемблера основные сегменты программы приходится определять самостоятельно.</a:t>
+            </a:r>
+          </a:p>
+          <a:p>
+            <a:pPr marL="0" indent="0">
+              <a:buNone/>
+            </a:pPr>
+            <a:r>
+              <a:rPr lang="ru-RU" sz="2000" dirty="0"/>
+              <a:t>Основные сегменты:</a:t>
+            </a:r>
+          </a:p>
+          <a:p>
+            <a:pPr marL="179388" indent="0">
+              <a:buNone/>
+            </a:pPr>
+            <a:r>
+              <a:rPr lang="en-US" sz="2000" b="1" dirty="0"/>
+              <a:t>.data </a:t>
+            </a:r>
+            <a:r>
+              <a:rPr lang="en-US" sz="2000" dirty="0"/>
+              <a:t>– </a:t>
+            </a:r>
+            <a:r>
+              <a:rPr lang="ru-RU" sz="2000" dirty="0"/>
+              <a:t>сегмент глобальных/статических переменных с заданным значением</a:t>
+            </a:r>
+          </a:p>
+          <a:p>
+            <a:pPr marL="179388" indent="0">
+              <a:buNone/>
+            </a:pPr>
+            <a:r>
+              <a:rPr lang="en-US" sz="2000" b="1" dirty="0"/>
+              <a:t>.</a:t>
+            </a:r>
+            <a:r>
+              <a:rPr lang="en-US" sz="2000" b="1" dirty="0" err="1"/>
+              <a:t>rodata</a:t>
+            </a:r>
+            <a:r>
+              <a:rPr lang="en-US" sz="2000" b="1" dirty="0"/>
+              <a:t> </a:t>
+            </a:r>
+            <a:r>
+              <a:rPr lang="en-US" sz="2000" dirty="0"/>
+              <a:t>– </a:t>
+            </a:r>
+            <a:r>
+              <a:rPr lang="ru-RU" sz="2000" dirty="0"/>
+              <a:t>сегмент констант</a:t>
+            </a:r>
+          </a:p>
+          <a:p>
+            <a:pPr marL="179388" indent="0">
+              <a:buNone/>
+            </a:pPr>
+            <a:r>
+              <a:rPr lang="en-US" sz="2000" b="1" dirty="0"/>
+              <a:t>.</a:t>
+            </a:r>
+            <a:r>
+              <a:rPr lang="en-US" sz="2000" b="1" dirty="0" err="1"/>
+              <a:t>bss</a:t>
+            </a:r>
+            <a:r>
+              <a:rPr lang="en-US" sz="2000" dirty="0"/>
+              <a:t> - </a:t>
+            </a:r>
+            <a:r>
+              <a:rPr lang="ru-RU" sz="2000" dirty="0"/>
+              <a:t>сегмент глобальных/статических переменных без заданного значения (инициализируются нулем).</a:t>
+            </a:r>
+          </a:p>
+          <a:p>
+            <a:pPr marL="179388" indent="0">
+              <a:buNone/>
+            </a:pPr>
+            <a:r>
+              <a:rPr lang="en-US" sz="2000" b="1" dirty="0"/>
+              <a:t>.text</a:t>
+            </a:r>
+            <a:r>
+              <a:rPr lang="en-US" sz="2000" dirty="0"/>
+              <a:t> – </a:t>
+            </a:r>
+            <a:r>
+              <a:rPr lang="ru-RU" sz="2000" dirty="0"/>
+              <a:t>сегмент кода.</a:t>
+            </a:r>
+          </a:p>
+          <a:p>
+            <a:pPr marL="0" indent="0">
+              <a:buNone/>
+            </a:pPr>
+            <a:endParaRPr lang="en-US" sz="2000" b="1" dirty="0"/>
+          </a:p>
+        </p:txBody>
+      </p:sp>
+      <p:sp>
+        <p:nvSpPr>
+          <p:cNvPr id="5" name="Номер слайда 4">
+            <a:extLst>
+              <a:ext uri="{FF2B5EF4-FFF2-40B4-BE49-F238E27FC236}">
+                <a16:creationId xmlns:a16="http://schemas.microsoft.com/office/drawing/2014/main" id="{9DB92496-D89E-46CC-BD94-449C7A865604}"/>
+              </a:ext>
+            </a:extLst>
+          </p:cNvPr>
+          <p:cNvSpPr>
+            <a:spLocks noGrp="1"/>
+          </p:cNvSpPr>
+          <p:nvPr>
+            <p:ph type="sldNum" sz="quarter" idx="12"/>
+          </p:nvPr>
+        </p:nvSpPr>
+        <p:spPr/>
+        <p:txBody>
+          <a:bodyPr/>
+          <a:lstStyle/>
+          <a:p>
+            <a:fld id="{B67FBA2B-964F-4C4D-AAF7-5A8399264638}" type="slidenum">
+              <a:rPr lang="en-US" smtClean="0"/>
+              <a:t>15</a:t>
+            </a:fld>
+            <a:endParaRPr lang="en-US" dirty="0"/>
+          </a:p>
+        </p:txBody>
+      </p:sp>
+      <p:sp>
+        <p:nvSpPr>
+          <p:cNvPr id="6" name="TextBox 5">
+            <a:extLst>
+              <a:ext uri="{FF2B5EF4-FFF2-40B4-BE49-F238E27FC236}">
+                <a16:creationId xmlns:a16="http://schemas.microsoft.com/office/drawing/2014/main" id="{8E55AC4F-7E2E-4DB7-8477-91FC371F34A5}"/>
+              </a:ext>
+            </a:extLst>
+          </p:cNvPr>
+          <p:cNvSpPr txBox="1"/>
+          <p:nvPr/>
+        </p:nvSpPr>
+        <p:spPr>
+          <a:xfrm>
+            <a:off x="7907278" y="1028343"/>
+            <a:ext cx="4149843" cy="4801314"/>
+          </a:xfrm>
+          <a:prstGeom prst="rect">
+            <a:avLst/>
+          </a:prstGeom>
+          <a:noFill/>
+        </p:spPr>
+        <p:txBody>
+          <a:bodyPr wrap="square" rtlCol="0">
+            <a:spAutoFit/>
+          </a:bodyPr>
+          <a:lstStyle/>
+          <a:p>
+            <a:r>
+              <a:rPr lang="en-US" b="1" dirty="0">
+                <a:effectLst/>
+                <a:latin typeface="Courier New" panose="02070309020205020404" pitchFamily="49" charset="0"/>
+                <a:cs typeface="Courier New" panose="02070309020205020404" pitchFamily="49" charset="0"/>
+              </a:rPr>
+              <a:t>section .data</a:t>
+            </a:r>
+          </a:p>
+          <a:p>
+            <a:r>
+              <a:rPr lang="en-US" dirty="0">
+                <a:effectLst/>
+                <a:latin typeface="Courier New" panose="02070309020205020404" pitchFamily="49" charset="0"/>
+                <a:cs typeface="Courier New" panose="02070309020205020404" pitchFamily="49" charset="0"/>
+              </a:rPr>
+              <a:t>  a: </a:t>
+            </a:r>
+            <a:r>
+              <a:rPr lang="en-US" dirty="0" err="1">
+                <a:effectLst/>
+                <a:latin typeface="Courier New" panose="02070309020205020404" pitchFamily="49" charset="0"/>
+                <a:cs typeface="Courier New" panose="02070309020205020404" pitchFamily="49" charset="0"/>
+              </a:rPr>
+              <a:t>db</a:t>
+            </a:r>
+            <a:r>
+              <a:rPr lang="en-US" dirty="0">
+                <a:effectLst/>
+                <a:latin typeface="Courier New" panose="02070309020205020404" pitchFamily="49" charset="0"/>
+                <a:cs typeface="Courier New" panose="02070309020205020404" pitchFamily="49" charset="0"/>
+              </a:rPr>
+              <a:t> 5</a:t>
+            </a:r>
+          </a:p>
+          <a:p>
+            <a:r>
+              <a:rPr lang="en-US" dirty="0">
+                <a:effectLst/>
+                <a:latin typeface="Courier New" panose="02070309020205020404" pitchFamily="49" charset="0"/>
+                <a:cs typeface="Courier New" panose="02070309020205020404" pitchFamily="49" charset="0"/>
+              </a:rPr>
+              <a:t>  b: </a:t>
+            </a:r>
+            <a:r>
+              <a:rPr lang="en-US" dirty="0" err="1">
+                <a:effectLst/>
+                <a:latin typeface="Courier New" panose="02070309020205020404" pitchFamily="49" charset="0"/>
+                <a:cs typeface="Courier New" panose="02070309020205020404" pitchFamily="49" charset="0"/>
+              </a:rPr>
+              <a:t>dq</a:t>
+            </a:r>
+            <a:r>
+              <a:rPr lang="en-US" dirty="0">
+                <a:effectLst/>
+                <a:latin typeface="Courier New" panose="02070309020205020404" pitchFamily="49" charset="0"/>
+                <a:cs typeface="Courier New" panose="02070309020205020404" pitchFamily="49" charset="0"/>
+              </a:rPr>
+              <a:t> 0xFF</a:t>
+            </a:r>
+          </a:p>
+          <a:p>
+            <a:r>
+              <a:rPr lang="en-US" dirty="0">
+                <a:effectLst/>
+                <a:latin typeface="Courier New" panose="02070309020205020404" pitchFamily="49" charset="0"/>
+                <a:cs typeface="Courier New" panose="02070309020205020404" pitchFamily="49" charset="0"/>
+              </a:rPr>
+              <a:t>  array: times 16 </a:t>
+            </a:r>
+            <a:r>
+              <a:rPr lang="en-US" dirty="0" err="1">
+                <a:effectLst/>
+                <a:latin typeface="Courier New" panose="02070309020205020404" pitchFamily="49" charset="0"/>
+                <a:cs typeface="Courier New" panose="02070309020205020404" pitchFamily="49" charset="0"/>
+              </a:rPr>
+              <a:t>db</a:t>
+            </a:r>
+            <a:r>
+              <a:rPr lang="en-US" dirty="0">
+                <a:effectLst/>
+                <a:latin typeface="Courier New" panose="02070309020205020404" pitchFamily="49" charset="0"/>
+                <a:cs typeface="Courier New" panose="02070309020205020404" pitchFamily="49" charset="0"/>
+              </a:rPr>
+              <a:t> 0</a:t>
+            </a:r>
+          </a:p>
+          <a:p>
+            <a:endParaRPr lang="en-US" dirty="0">
+              <a:effectLst/>
+              <a:latin typeface="Courier New" panose="02070309020205020404" pitchFamily="49" charset="0"/>
+              <a:cs typeface="Courier New" panose="02070309020205020404" pitchFamily="49" charset="0"/>
+            </a:endParaRPr>
+          </a:p>
+          <a:p>
+            <a:r>
+              <a:rPr lang="en-US" b="1" dirty="0">
+                <a:effectLst/>
+                <a:latin typeface="Courier New" panose="02070309020205020404" pitchFamily="49" charset="0"/>
+                <a:cs typeface="Courier New" panose="02070309020205020404" pitchFamily="49" charset="0"/>
+              </a:rPr>
+              <a:t>section .</a:t>
+            </a:r>
+            <a:r>
+              <a:rPr lang="en-US" b="1" dirty="0" err="1">
+                <a:effectLst/>
+                <a:latin typeface="Courier New" panose="02070309020205020404" pitchFamily="49" charset="0"/>
+                <a:cs typeface="Courier New" panose="02070309020205020404" pitchFamily="49" charset="0"/>
+              </a:rPr>
+              <a:t>rodata</a:t>
+            </a:r>
+            <a:endParaRPr lang="en-US" b="1" dirty="0">
+              <a:effectLst/>
+              <a:latin typeface="Courier New" panose="02070309020205020404" pitchFamily="49" charset="0"/>
+              <a:cs typeface="Courier New" panose="02070309020205020404" pitchFamily="49" charset="0"/>
+            </a:endParaRPr>
+          </a:p>
+          <a:p>
+            <a:r>
+              <a:rPr lang="en-US" dirty="0">
+                <a:effectLst/>
+                <a:latin typeface="Courier New" panose="02070309020205020404" pitchFamily="49" charset="0"/>
+                <a:cs typeface="Courier New" panose="02070309020205020404" pitchFamily="49" charset="0"/>
+              </a:rPr>
+              <a:t>  const: </a:t>
+            </a:r>
+            <a:r>
+              <a:rPr lang="en-US" dirty="0" err="1">
+                <a:effectLst/>
+                <a:latin typeface="Courier New" panose="02070309020205020404" pitchFamily="49" charset="0"/>
+                <a:cs typeface="Courier New" panose="02070309020205020404" pitchFamily="49" charset="0"/>
+              </a:rPr>
+              <a:t>db</a:t>
+            </a:r>
+            <a:r>
+              <a:rPr lang="en-US" dirty="0">
+                <a:effectLst/>
+                <a:latin typeface="Courier New" panose="02070309020205020404" pitchFamily="49" charset="0"/>
+                <a:cs typeface="Courier New" panose="02070309020205020404" pitchFamily="49" charset="0"/>
+              </a:rPr>
+              <a:t> 7</a:t>
+            </a:r>
+            <a:br>
+              <a:rPr lang="en-US" dirty="0">
+                <a:effectLst/>
+                <a:latin typeface="Courier New" panose="02070309020205020404" pitchFamily="49" charset="0"/>
+                <a:cs typeface="Courier New" panose="02070309020205020404" pitchFamily="49" charset="0"/>
+              </a:rPr>
+            </a:br>
+            <a:endParaRPr lang="en-US" dirty="0">
+              <a:effectLst/>
+              <a:latin typeface="Courier New" panose="02070309020205020404" pitchFamily="49" charset="0"/>
+              <a:cs typeface="Courier New" panose="02070309020205020404" pitchFamily="49" charset="0"/>
+            </a:endParaRPr>
+          </a:p>
+          <a:p>
+            <a:r>
+              <a:rPr lang="en-US" b="1" dirty="0">
+                <a:effectLst/>
+                <a:latin typeface="Courier New" panose="02070309020205020404" pitchFamily="49" charset="0"/>
+                <a:cs typeface="Courier New" panose="02070309020205020404" pitchFamily="49" charset="0"/>
+              </a:rPr>
+              <a:t>section .</a:t>
+            </a:r>
+            <a:r>
+              <a:rPr lang="en-US" b="1" dirty="0" err="1">
+                <a:effectLst/>
+                <a:latin typeface="Courier New" panose="02070309020205020404" pitchFamily="49" charset="0"/>
+                <a:cs typeface="Courier New" panose="02070309020205020404" pitchFamily="49" charset="0"/>
+              </a:rPr>
+              <a:t>bss</a:t>
+            </a:r>
+            <a:endParaRPr lang="en-US" b="1" dirty="0">
+              <a:effectLst/>
+              <a:latin typeface="Courier New" panose="02070309020205020404" pitchFamily="49" charset="0"/>
+              <a:cs typeface="Courier New" panose="02070309020205020404" pitchFamily="49" charset="0"/>
+            </a:endParaRPr>
+          </a:p>
+          <a:p>
+            <a:r>
+              <a:rPr lang="en-US" dirty="0">
+                <a:effectLst/>
+                <a:latin typeface="Courier New" panose="02070309020205020404" pitchFamily="49" charset="0"/>
+                <a:cs typeface="Courier New" panose="02070309020205020404" pitchFamily="49" charset="0"/>
+              </a:rPr>
+              <a:t>  c: resq 1 </a:t>
+            </a:r>
+          </a:p>
+          <a:p>
+            <a:endParaRPr lang="en-US" dirty="0">
+              <a:effectLst/>
+              <a:latin typeface="Courier New" panose="02070309020205020404" pitchFamily="49" charset="0"/>
+              <a:cs typeface="Courier New" panose="02070309020205020404" pitchFamily="49" charset="0"/>
+            </a:endParaRPr>
+          </a:p>
+          <a:p>
+            <a:r>
+              <a:rPr lang="en-US" b="1" dirty="0">
+                <a:effectLst/>
+                <a:latin typeface="Courier New" panose="02070309020205020404" pitchFamily="49" charset="0"/>
+                <a:cs typeface="Courier New" panose="02070309020205020404" pitchFamily="49" charset="0"/>
+              </a:rPr>
+              <a:t>section .text</a:t>
+            </a:r>
+          </a:p>
+          <a:p>
+            <a:r>
+              <a:rPr lang="en-US" dirty="0">
+                <a:effectLst/>
+                <a:latin typeface="Courier New" panose="02070309020205020404" pitchFamily="49" charset="0"/>
+                <a:cs typeface="Courier New" panose="02070309020205020404" pitchFamily="49" charset="0"/>
+              </a:rPr>
+              <a:t>  global main</a:t>
+            </a:r>
+          </a:p>
+          <a:p>
+            <a:endParaRPr lang="en-US" dirty="0">
+              <a:effectLst/>
+              <a:latin typeface="Courier New" panose="02070309020205020404" pitchFamily="49" charset="0"/>
+              <a:cs typeface="Courier New" panose="02070309020205020404" pitchFamily="49" charset="0"/>
+            </a:endParaRPr>
+          </a:p>
+          <a:p>
+            <a:r>
+              <a:rPr lang="en-US" dirty="0">
+                <a:effectLst/>
+                <a:latin typeface="Courier New" panose="02070309020205020404" pitchFamily="49" charset="0"/>
+                <a:cs typeface="Courier New" panose="02070309020205020404" pitchFamily="49" charset="0"/>
+              </a:rPr>
+              <a:t>main:</a:t>
+            </a:r>
+          </a:p>
+          <a:p>
+            <a:r>
+              <a:rPr lang="en-US" dirty="0">
+                <a:effectLst/>
+                <a:latin typeface="Courier New" panose="02070309020205020404" pitchFamily="49" charset="0"/>
+                <a:cs typeface="Courier New" panose="02070309020205020404" pitchFamily="49" charset="0"/>
+              </a:rPr>
+              <a:t>  </a:t>
+            </a:r>
+            <a:r>
+              <a:rPr lang="en-US" dirty="0" err="1">
+                <a:effectLst/>
+                <a:latin typeface="Courier New" panose="02070309020205020404" pitchFamily="49" charset="0"/>
+                <a:cs typeface="Courier New" panose="02070309020205020404" pitchFamily="49" charset="0"/>
+              </a:rPr>
+              <a:t>xor</a:t>
+            </a:r>
+            <a:r>
+              <a:rPr lang="en-US" dirty="0">
+                <a:effectLst/>
+                <a:latin typeface="Courier New" panose="02070309020205020404" pitchFamily="49" charset="0"/>
+                <a:cs typeface="Courier New" panose="02070309020205020404" pitchFamily="49" charset="0"/>
+              </a:rPr>
+              <a:t> </a:t>
+            </a:r>
+            <a:r>
+              <a:rPr lang="en-US" dirty="0" err="1">
+                <a:effectLst/>
+                <a:latin typeface="Courier New" panose="02070309020205020404" pitchFamily="49" charset="0"/>
+                <a:cs typeface="Courier New" panose="02070309020205020404" pitchFamily="49" charset="0"/>
+              </a:rPr>
+              <a:t>rax</a:t>
+            </a:r>
+            <a:r>
+              <a:rPr lang="en-US" dirty="0">
+                <a:effectLst/>
+                <a:latin typeface="Courier New" panose="02070309020205020404" pitchFamily="49" charset="0"/>
+                <a:cs typeface="Courier New" panose="02070309020205020404" pitchFamily="49" charset="0"/>
+              </a:rPr>
+              <a:t>, </a:t>
+            </a:r>
+            <a:r>
+              <a:rPr lang="en-US" dirty="0" err="1">
+                <a:effectLst/>
+                <a:latin typeface="Courier New" panose="02070309020205020404" pitchFamily="49" charset="0"/>
+                <a:cs typeface="Courier New" panose="02070309020205020404" pitchFamily="49" charset="0"/>
+              </a:rPr>
+              <a:t>rax</a:t>
+            </a:r>
+            <a:endParaRPr lang="en-US" dirty="0">
+              <a:effectLst/>
+              <a:latin typeface="Courier New" panose="02070309020205020404" pitchFamily="49" charset="0"/>
+              <a:cs typeface="Courier New" panose="02070309020205020404" pitchFamily="49" charset="0"/>
+            </a:endParaRPr>
+          </a:p>
+          <a:p>
+            <a:r>
+              <a:rPr lang="en-US" dirty="0">
+                <a:effectLst/>
+                <a:latin typeface="Courier New" panose="02070309020205020404" pitchFamily="49" charset="0"/>
+                <a:cs typeface="Courier New" panose="02070309020205020404" pitchFamily="49" charset="0"/>
+              </a:rPr>
+              <a:t>  ret</a:t>
+            </a:r>
+            <a:endParaRPr lang="en-US" dirty="0">
+              <a:latin typeface="Courier New" panose="02070309020205020404" pitchFamily="49" charset="0"/>
+              <a:cs typeface="Courier New" panose="02070309020205020404" pitchFamily="49" charset="0"/>
+            </a:endParaRPr>
+          </a:p>
+        </p:txBody>
+      </p:sp>
+    </p:spTree>
+    <p:extLst>
+      <p:ext uri="{BB962C8B-B14F-4D97-AF65-F5344CB8AC3E}">
+        <p14:creationId xmlns:p14="http://schemas.microsoft.com/office/powerpoint/2010/main" val="3101290777"/>
+      </p:ext>
+    </p:extLst>
+  </p:cSld>
+  <p:clrMapOvr>
+    <a:masterClrMapping/>
+  </p:clrMapOvr>
+</p:sld>
+</file>
+
+<file path=ppt/slides/slide16.xml><?xml version="1.0" encoding="utf-8"?>
+<p:sld xmlns:a="http://schemas.openxmlformats.org/drawingml/2006/main" xmlns:r="http://schemas.openxmlformats.org/officeDocument/2006/relationships" xmlns:p="http://schemas.openxmlformats.org/presentationml/2006/main">
+  <p:cSld>
+    <p:spTree>
+      <p:nvGrpSpPr>
+        <p:cNvPr id="1" name=""/>
+        <p:cNvGrpSpPr/>
+        <p:nvPr/>
+      </p:nvGrpSpPr>
+      <p:grpSpPr>
+        <a:xfrm>
+          <a:off x="0" y="0"/>
+          <a:ext cx="0" cy="0"/>
+          <a:chOff x="0" y="0"/>
+          <a:chExt cx="0" cy="0"/>
+        </a:xfrm>
+      </p:grpSpPr>
+      <p:sp>
+        <p:nvSpPr>
+          <p:cNvPr id="2" name="Заголовок 1">
+            <a:extLst>
+              <a:ext uri="{FF2B5EF4-FFF2-40B4-BE49-F238E27FC236}">
+                <a16:creationId xmlns:a16="http://schemas.microsoft.com/office/drawing/2014/main" id="{92DC634E-EDC1-4875-9A06-3D126D1A2E49}"/>
+              </a:ext>
+            </a:extLst>
+          </p:cNvPr>
+          <p:cNvSpPr>
+            <a:spLocks noGrp="1"/>
+          </p:cNvSpPr>
+          <p:nvPr>
+            <p:ph type="title"/>
+          </p:nvPr>
+        </p:nvSpPr>
+        <p:spPr/>
+        <p:txBody>
+          <a:bodyPr/>
+          <a:lstStyle/>
+          <a:p>
+            <a:r>
+              <a:rPr lang="ru-RU" dirty="0"/>
+              <a:t>Метки</a:t>
+            </a:r>
+            <a:endParaRPr lang="en-US" dirty="0"/>
+          </a:p>
+        </p:txBody>
+      </p:sp>
+      <p:sp>
+        <p:nvSpPr>
+          <p:cNvPr id="3" name="Объект 2">
+            <a:extLst>
+              <a:ext uri="{FF2B5EF4-FFF2-40B4-BE49-F238E27FC236}">
+                <a16:creationId xmlns:a16="http://schemas.microsoft.com/office/drawing/2014/main" id="{D4A55D7F-95B1-4B4F-BCE0-8CE97F5FD713}"/>
+              </a:ext>
+            </a:extLst>
+          </p:cNvPr>
+          <p:cNvSpPr>
+            <a:spLocks noGrp="1"/>
+          </p:cNvSpPr>
+          <p:nvPr>
+            <p:ph idx="1"/>
+          </p:nvPr>
+        </p:nvSpPr>
+        <p:spPr>
+          <a:xfrm>
+            <a:off x="314325" y="1477881"/>
+            <a:ext cx="7956096" cy="5078313"/>
+          </a:xfrm>
+        </p:spPr>
+        <p:txBody>
+          <a:bodyPr>
+            <a:normAutofit lnSpcReduction="10000"/>
+          </a:bodyPr>
+          <a:lstStyle/>
+          <a:p>
+            <a:pPr marL="0" indent="0">
+              <a:buNone/>
+            </a:pPr>
+            <a:r>
+              <a:rPr lang="ru-RU" sz="2000" b="1" dirty="0"/>
+              <a:t>Метка</a:t>
+            </a:r>
+            <a:r>
+              <a:rPr lang="ru-RU" sz="2000" dirty="0"/>
+              <a:t> – символьная строка, представляющая некоторый адрес в памяти</a:t>
+            </a:r>
+            <a:r>
+              <a:rPr lang="ru-RU" sz="2000" b="1" dirty="0"/>
+              <a:t>.</a:t>
+            </a:r>
+          </a:p>
+          <a:p>
+            <a:pPr marL="0" indent="0">
+              <a:buNone/>
+            </a:pPr>
+            <a:r>
+              <a:rPr lang="ru-RU" sz="2000" dirty="0"/>
+              <a:t>Метки обычно используются для обозначения переменных, функций или мест внутри функций, соответствующих точкам перехода. </a:t>
+            </a:r>
+          </a:p>
+          <a:p>
+            <a:pPr marL="0" indent="0">
+              <a:buNone/>
+            </a:pPr>
+            <a:r>
+              <a:rPr lang="ru-RU" sz="2000" dirty="0"/>
+              <a:t>Синтаксис объявления метки:</a:t>
+            </a:r>
+          </a:p>
+          <a:p>
+            <a:pPr marL="0" indent="0">
+              <a:buNone/>
+            </a:pPr>
+            <a:r>
+              <a:rPr lang="ru-RU" sz="2000" dirty="0">
+                <a:latin typeface="Courier New" panose="02070309020205020404" pitchFamily="49" charset="0"/>
+                <a:cs typeface="Courier New" panose="02070309020205020404" pitchFamily="49" charset="0"/>
+              </a:rPr>
+              <a:t>	</a:t>
+            </a:r>
+            <a:r>
+              <a:rPr lang="en-US" sz="2000" dirty="0">
+                <a:latin typeface="Courier New" panose="02070309020205020404" pitchFamily="49" charset="0"/>
+                <a:cs typeface="Courier New" panose="02070309020205020404" pitchFamily="49" charset="0"/>
+              </a:rPr>
+              <a:t>&lt;</a:t>
+            </a:r>
+            <a:r>
+              <a:rPr lang="ru-RU" sz="2000" dirty="0">
+                <a:latin typeface="Courier New" panose="02070309020205020404" pitchFamily="49" charset="0"/>
+                <a:cs typeface="Courier New" panose="02070309020205020404" pitchFamily="49" charset="0"/>
+              </a:rPr>
+              <a:t>имя метки</a:t>
+            </a:r>
+            <a:r>
+              <a:rPr lang="en-US" sz="2000" dirty="0">
+                <a:latin typeface="Courier New" panose="02070309020205020404" pitchFamily="49" charset="0"/>
+                <a:cs typeface="Courier New" panose="02070309020205020404" pitchFamily="49" charset="0"/>
+              </a:rPr>
+              <a:t>&gt;</a:t>
+            </a:r>
+            <a:r>
+              <a:rPr lang="ru-RU" sz="2000" dirty="0">
+                <a:latin typeface="Courier New" panose="02070309020205020404" pitchFamily="49" charset="0"/>
+                <a:cs typeface="Courier New" panose="02070309020205020404" pitchFamily="49" charset="0"/>
+              </a:rPr>
+              <a:t>: </a:t>
+            </a:r>
+            <a:endParaRPr lang="ru-RU" sz="2000" b="1" dirty="0"/>
+          </a:p>
+          <a:p>
+            <a:pPr marL="0" indent="0">
+              <a:buNone/>
+            </a:pPr>
+            <a:r>
+              <a:rPr lang="ru-RU" sz="2000" dirty="0"/>
+              <a:t>При ассемблировании метка заменяется на соответствующий адрес</a:t>
+            </a:r>
+            <a:r>
+              <a:rPr lang="ru-RU" sz="2000" kern="1200" baseline="30000" dirty="0">
+                <a:solidFill>
+                  <a:srgbClr val="000000"/>
+                </a:solidFill>
+                <a:effectLst/>
+                <a:latin typeface="Calibri" panose="020F0502020204030204" pitchFamily="34" charset="0"/>
+                <a:ea typeface="+mn-ea"/>
+                <a:cs typeface="+mn-cs"/>
+              </a:rPr>
+              <a:t>1</a:t>
+            </a:r>
+            <a:r>
+              <a:rPr lang="ru-RU" sz="2000" dirty="0"/>
+              <a:t>.</a:t>
+            </a:r>
+          </a:p>
+          <a:p>
+            <a:pPr marL="0" indent="0">
+              <a:buNone/>
+            </a:pPr>
+            <a:endParaRPr lang="ru-RU" sz="2000" dirty="0"/>
+          </a:p>
+          <a:p>
+            <a:pPr marL="0" indent="0">
+              <a:buNone/>
+            </a:pPr>
+            <a:r>
+              <a:rPr lang="ru-RU" sz="2000" dirty="0"/>
+              <a:t>Если имя метки начинается с точки, метка является </a:t>
+            </a:r>
+            <a:r>
+              <a:rPr lang="ru-RU" sz="2000" b="1" dirty="0"/>
+              <a:t>локальной</a:t>
+            </a:r>
+            <a:r>
+              <a:rPr lang="ru-RU" sz="2000" dirty="0"/>
+              <a:t>.</a:t>
+            </a:r>
+            <a:endParaRPr lang="en-US" sz="2000" dirty="0"/>
+          </a:p>
+          <a:p>
+            <a:pPr marL="0" indent="0">
+              <a:buNone/>
+            </a:pPr>
+            <a:r>
+              <a:rPr lang="ru-RU" sz="2000" dirty="0"/>
+              <a:t>Локальные метки обычно используются в функциях для организации циклов и условных переходов.</a:t>
+            </a:r>
+            <a:endParaRPr lang="en-US" sz="2000" dirty="0"/>
+          </a:p>
+          <a:p>
+            <a:pPr marL="0" indent="0">
+              <a:buNone/>
+            </a:pPr>
+            <a:r>
+              <a:rPr lang="ru-RU" sz="2000" dirty="0"/>
+              <a:t>Полное имя локальной метки: </a:t>
+            </a:r>
+            <a:br>
+              <a:rPr lang="ru-RU" sz="2000" dirty="0"/>
+            </a:br>
+            <a:r>
+              <a:rPr lang="en-US" sz="2000" dirty="0">
+                <a:latin typeface="Courier New" panose="02070309020205020404" pitchFamily="49" charset="0"/>
+                <a:cs typeface="Courier New" panose="02070309020205020404" pitchFamily="49" charset="0"/>
+              </a:rPr>
+              <a:t>&lt;</a:t>
+            </a:r>
+            <a:r>
+              <a:rPr lang="ru-RU" sz="2000" dirty="0">
+                <a:latin typeface="Courier New" panose="02070309020205020404" pitchFamily="49" charset="0"/>
+                <a:cs typeface="Courier New" panose="02070309020205020404" pitchFamily="49" charset="0"/>
+              </a:rPr>
+              <a:t>имя предыдущей обычной метки</a:t>
+            </a:r>
+            <a:r>
+              <a:rPr lang="en-US" sz="2000" dirty="0">
+                <a:latin typeface="Courier New" panose="02070309020205020404" pitchFamily="49" charset="0"/>
+                <a:cs typeface="Courier New" panose="02070309020205020404" pitchFamily="49" charset="0"/>
+              </a:rPr>
+              <a:t>&gt;</a:t>
+            </a:r>
+            <a:r>
+              <a:rPr lang="ru-RU" sz="2000" dirty="0">
+                <a:latin typeface="Courier New" panose="02070309020205020404" pitchFamily="49" charset="0"/>
+                <a:cs typeface="Courier New" panose="02070309020205020404" pitchFamily="49" charset="0"/>
+              </a:rPr>
+              <a:t>.</a:t>
+            </a:r>
+            <a:r>
+              <a:rPr lang="en-US" sz="2000" dirty="0">
+                <a:latin typeface="Courier New" panose="02070309020205020404" pitchFamily="49" charset="0"/>
+                <a:cs typeface="Courier New" panose="02070309020205020404" pitchFamily="49" charset="0"/>
+              </a:rPr>
+              <a:t>&lt;</a:t>
+            </a:r>
+            <a:r>
+              <a:rPr lang="ru-RU" sz="2000" dirty="0">
+                <a:latin typeface="Courier New" panose="02070309020205020404" pitchFamily="49" charset="0"/>
+                <a:cs typeface="Courier New" panose="02070309020205020404" pitchFamily="49" charset="0"/>
+              </a:rPr>
+              <a:t>имя метки</a:t>
+            </a:r>
+            <a:r>
+              <a:rPr lang="en-US" sz="2000" dirty="0">
+                <a:latin typeface="Courier New" panose="02070309020205020404" pitchFamily="49" charset="0"/>
+                <a:cs typeface="Courier New" panose="02070309020205020404" pitchFamily="49" charset="0"/>
+              </a:rPr>
+              <a:t>&gt;</a:t>
+            </a:r>
+            <a:endParaRPr lang="ru-RU" sz="2000" dirty="0">
+              <a:latin typeface="Courier New" panose="02070309020205020404" pitchFamily="49" charset="0"/>
+              <a:cs typeface="Courier New" panose="02070309020205020404" pitchFamily="49" charset="0"/>
+            </a:endParaRPr>
+          </a:p>
+          <a:p>
+            <a:pPr marL="0" indent="0">
+              <a:buNone/>
+            </a:pPr>
+            <a:endParaRPr lang="ru-RU" sz="1400" dirty="0"/>
+          </a:p>
+          <a:p>
+            <a:pPr marL="0" indent="0">
+              <a:buNone/>
+            </a:pPr>
+            <a:r>
+              <a:rPr lang="ru-RU" sz="1400" kern="1200" baseline="30000" dirty="0">
+                <a:solidFill>
+                  <a:srgbClr val="000000"/>
+                </a:solidFill>
+                <a:effectLst/>
+                <a:latin typeface="Calibri" panose="020F0502020204030204" pitchFamily="34" charset="0"/>
+                <a:ea typeface="+mn-ea"/>
+                <a:cs typeface="+mn-cs"/>
+              </a:rPr>
+              <a:t>1</a:t>
+            </a:r>
+            <a:r>
+              <a:rPr lang="ru-RU" sz="1400" dirty="0"/>
+              <a:t>или эквивалентное ему смещение (дистанцию от инструкции до цели, на которую указывает метка).</a:t>
+            </a:r>
+            <a:endParaRPr lang="en-US" sz="1400" dirty="0">
+              <a:latin typeface="Courier New" panose="02070309020205020404" pitchFamily="49" charset="0"/>
+              <a:cs typeface="Courier New" panose="02070309020205020404" pitchFamily="49" charset="0"/>
+            </a:endParaRPr>
+          </a:p>
+        </p:txBody>
+      </p:sp>
+      <p:sp>
+        <p:nvSpPr>
+          <p:cNvPr id="5" name="Номер слайда 4">
+            <a:extLst>
+              <a:ext uri="{FF2B5EF4-FFF2-40B4-BE49-F238E27FC236}">
+                <a16:creationId xmlns:a16="http://schemas.microsoft.com/office/drawing/2014/main" id="{9DB92496-D89E-46CC-BD94-449C7A865604}"/>
+              </a:ext>
+            </a:extLst>
+          </p:cNvPr>
+          <p:cNvSpPr>
+            <a:spLocks noGrp="1"/>
+          </p:cNvSpPr>
+          <p:nvPr>
+            <p:ph type="sldNum" sz="quarter" idx="12"/>
+          </p:nvPr>
+        </p:nvSpPr>
+        <p:spPr/>
+        <p:txBody>
+          <a:bodyPr/>
+          <a:lstStyle/>
+          <a:p>
+            <a:fld id="{B67FBA2B-964F-4C4D-AAF7-5A8399264638}" type="slidenum">
+              <a:rPr lang="en-US" smtClean="0"/>
+              <a:t>16</a:t>
+            </a:fld>
+            <a:endParaRPr lang="en-US" dirty="0"/>
+          </a:p>
+        </p:txBody>
+      </p:sp>
+      <p:sp>
+        <p:nvSpPr>
+          <p:cNvPr id="6" name="TextBox 5">
+            <a:extLst>
+              <a:ext uri="{FF2B5EF4-FFF2-40B4-BE49-F238E27FC236}">
+                <a16:creationId xmlns:a16="http://schemas.microsoft.com/office/drawing/2014/main" id="{8E55AC4F-7E2E-4DB7-8477-91FC371F34A5}"/>
+              </a:ext>
+            </a:extLst>
+          </p:cNvPr>
+          <p:cNvSpPr txBox="1"/>
+          <p:nvPr/>
+        </p:nvSpPr>
+        <p:spPr>
+          <a:xfrm>
+            <a:off x="8505825" y="1028343"/>
+            <a:ext cx="3551296" cy="5078313"/>
+          </a:xfrm>
+          <a:prstGeom prst="rect">
+            <a:avLst/>
+          </a:prstGeom>
+          <a:noFill/>
+        </p:spPr>
+        <p:txBody>
+          <a:bodyPr wrap="square" rtlCol="0">
+            <a:spAutoFit/>
+          </a:bodyPr>
+          <a:lstStyle/>
+          <a:p>
+            <a:r>
+              <a:rPr lang="en-US" dirty="0">
+                <a:effectLst/>
+                <a:latin typeface="Courier New" panose="02070309020205020404" pitchFamily="49" charset="0"/>
+                <a:cs typeface="Courier New" panose="02070309020205020404" pitchFamily="49" charset="0"/>
+              </a:rPr>
+              <a:t>section .data</a:t>
+            </a:r>
+          </a:p>
+          <a:p>
+            <a:r>
+              <a:rPr lang="en-US" dirty="0">
+                <a:effectLst/>
+                <a:latin typeface="Courier New" panose="02070309020205020404" pitchFamily="49" charset="0"/>
+                <a:cs typeface="Courier New" panose="02070309020205020404" pitchFamily="49" charset="0"/>
+              </a:rPr>
+              <a:t>  </a:t>
+            </a:r>
+            <a:r>
+              <a:rPr lang="en-US" b="1" dirty="0">
+                <a:effectLst/>
+                <a:latin typeface="Courier New" panose="02070309020205020404" pitchFamily="49" charset="0"/>
+                <a:cs typeface="Courier New" panose="02070309020205020404" pitchFamily="49" charset="0"/>
+              </a:rPr>
+              <a:t>a: </a:t>
+            </a:r>
+            <a:r>
+              <a:rPr lang="en-US" dirty="0" err="1">
+                <a:effectLst/>
+                <a:latin typeface="Courier New" panose="02070309020205020404" pitchFamily="49" charset="0"/>
+                <a:cs typeface="Courier New" panose="02070309020205020404" pitchFamily="49" charset="0"/>
+              </a:rPr>
+              <a:t>db</a:t>
+            </a:r>
+            <a:r>
+              <a:rPr lang="en-US" dirty="0">
+                <a:effectLst/>
+                <a:latin typeface="Courier New" panose="02070309020205020404" pitchFamily="49" charset="0"/>
+                <a:cs typeface="Courier New" panose="02070309020205020404" pitchFamily="49" charset="0"/>
+              </a:rPr>
+              <a:t> 5</a:t>
+            </a:r>
+          </a:p>
+          <a:p>
+            <a:r>
+              <a:rPr lang="en-US" dirty="0">
+                <a:effectLst/>
+                <a:latin typeface="Courier New" panose="02070309020205020404" pitchFamily="49" charset="0"/>
+                <a:cs typeface="Courier New" panose="02070309020205020404" pitchFamily="49" charset="0"/>
+              </a:rPr>
+              <a:t>  </a:t>
+            </a:r>
+            <a:r>
+              <a:rPr lang="en-US" b="1" dirty="0">
+                <a:effectLst/>
+                <a:latin typeface="Courier New" panose="02070309020205020404" pitchFamily="49" charset="0"/>
+                <a:cs typeface="Courier New" panose="02070309020205020404" pitchFamily="49" charset="0"/>
+              </a:rPr>
+              <a:t>b: </a:t>
+            </a:r>
+            <a:r>
+              <a:rPr lang="en-US" dirty="0" err="1">
+                <a:effectLst/>
+                <a:latin typeface="Courier New" panose="02070309020205020404" pitchFamily="49" charset="0"/>
+                <a:cs typeface="Courier New" panose="02070309020205020404" pitchFamily="49" charset="0"/>
+              </a:rPr>
+              <a:t>dq</a:t>
+            </a:r>
+            <a:r>
+              <a:rPr lang="en-US" dirty="0">
+                <a:effectLst/>
+                <a:latin typeface="Courier New" panose="02070309020205020404" pitchFamily="49" charset="0"/>
+                <a:cs typeface="Courier New" panose="02070309020205020404" pitchFamily="49" charset="0"/>
+              </a:rPr>
+              <a:t> 0xFF</a:t>
+            </a:r>
+          </a:p>
+          <a:p>
+            <a:r>
+              <a:rPr lang="en-US" dirty="0">
+                <a:effectLst/>
+                <a:latin typeface="Courier New" panose="02070309020205020404" pitchFamily="49" charset="0"/>
+                <a:cs typeface="Courier New" panose="02070309020205020404" pitchFamily="49" charset="0"/>
+              </a:rPr>
+              <a:t>  </a:t>
+            </a:r>
+            <a:r>
+              <a:rPr lang="en-US" b="1" dirty="0">
+                <a:effectLst/>
+                <a:latin typeface="Courier New" panose="02070309020205020404" pitchFamily="49" charset="0"/>
+                <a:cs typeface="Courier New" panose="02070309020205020404" pitchFamily="49" charset="0"/>
+              </a:rPr>
+              <a:t>array: </a:t>
+            </a:r>
+            <a:r>
+              <a:rPr lang="en-US" dirty="0">
+                <a:effectLst/>
+                <a:latin typeface="Courier New" panose="02070309020205020404" pitchFamily="49" charset="0"/>
+                <a:cs typeface="Courier New" panose="02070309020205020404" pitchFamily="49" charset="0"/>
+              </a:rPr>
+              <a:t>times 16 </a:t>
+            </a:r>
+            <a:r>
+              <a:rPr lang="en-US" dirty="0" err="1">
+                <a:effectLst/>
+                <a:latin typeface="Courier New" panose="02070309020205020404" pitchFamily="49" charset="0"/>
+                <a:cs typeface="Courier New" panose="02070309020205020404" pitchFamily="49" charset="0"/>
+              </a:rPr>
+              <a:t>db</a:t>
+            </a:r>
+            <a:r>
+              <a:rPr lang="en-US" dirty="0">
+                <a:effectLst/>
+                <a:latin typeface="Courier New" panose="02070309020205020404" pitchFamily="49" charset="0"/>
+                <a:cs typeface="Courier New" panose="02070309020205020404" pitchFamily="49" charset="0"/>
+              </a:rPr>
+              <a:t> 0</a:t>
+            </a:r>
+          </a:p>
+          <a:p>
+            <a:endParaRPr lang="en-US" dirty="0">
+              <a:effectLst/>
+              <a:latin typeface="Courier New" panose="02070309020205020404" pitchFamily="49" charset="0"/>
+              <a:cs typeface="Courier New" panose="02070309020205020404" pitchFamily="49" charset="0"/>
+            </a:endParaRPr>
+          </a:p>
+          <a:p>
+            <a:r>
+              <a:rPr lang="en-US" dirty="0">
+                <a:effectLst/>
+                <a:latin typeface="Courier New" panose="02070309020205020404" pitchFamily="49" charset="0"/>
+                <a:cs typeface="Courier New" panose="02070309020205020404" pitchFamily="49" charset="0"/>
+              </a:rPr>
+              <a:t>section .</a:t>
+            </a:r>
+            <a:r>
+              <a:rPr lang="en-US" dirty="0" err="1">
+                <a:effectLst/>
+                <a:latin typeface="Courier New" panose="02070309020205020404" pitchFamily="49" charset="0"/>
+                <a:cs typeface="Courier New" panose="02070309020205020404" pitchFamily="49" charset="0"/>
+              </a:rPr>
+              <a:t>rodata</a:t>
+            </a:r>
+            <a:endParaRPr lang="en-US" dirty="0">
+              <a:effectLst/>
+              <a:latin typeface="Courier New" panose="02070309020205020404" pitchFamily="49" charset="0"/>
+              <a:cs typeface="Courier New" panose="02070309020205020404" pitchFamily="49" charset="0"/>
+            </a:endParaRPr>
+          </a:p>
+          <a:p>
+            <a:r>
+              <a:rPr lang="en-US" dirty="0">
+                <a:effectLst/>
+                <a:latin typeface="Courier New" panose="02070309020205020404" pitchFamily="49" charset="0"/>
+                <a:cs typeface="Courier New" panose="02070309020205020404" pitchFamily="49" charset="0"/>
+              </a:rPr>
+              <a:t>  </a:t>
+            </a:r>
+            <a:r>
+              <a:rPr lang="en-US" b="1" dirty="0">
+                <a:effectLst/>
+                <a:latin typeface="Courier New" panose="02070309020205020404" pitchFamily="49" charset="0"/>
+                <a:cs typeface="Courier New" panose="02070309020205020404" pitchFamily="49" charset="0"/>
+              </a:rPr>
+              <a:t>const: </a:t>
+            </a:r>
+            <a:r>
+              <a:rPr lang="en-US" dirty="0" err="1">
+                <a:effectLst/>
+                <a:latin typeface="Courier New" panose="02070309020205020404" pitchFamily="49" charset="0"/>
+                <a:cs typeface="Courier New" panose="02070309020205020404" pitchFamily="49" charset="0"/>
+              </a:rPr>
+              <a:t>db</a:t>
+            </a:r>
+            <a:r>
+              <a:rPr lang="en-US" dirty="0">
+                <a:effectLst/>
+                <a:latin typeface="Courier New" panose="02070309020205020404" pitchFamily="49" charset="0"/>
+                <a:cs typeface="Courier New" panose="02070309020205020404" pitchFamily="49" charset="0"/>
+              </a:rPr>
+              <a:t> 7</a:t>
+            </a:r>
+            <a:br>
+              <a:rPr lang="en-US" dirty="0">
+                <a:effectLst/>
+                <a:latin typeface="Courier New" panose="02070309020205020404" pitchFamily="49" charset="0"/>
+                <a:cs typeface="Courier New" panose="02070309020205020404" pitchFamily="49" charset="0"/>
+              </a:rPr>
+            </a:br>
+            <a:endParaRPr lang="en-US" dirty="0">
+              <a:effectLst/>
+              <a:latin typeface="Courier New" panose="02070309020205020404" pitchFamily="49" charset="0"/>
+              <a:cs typeface="Courier New" panose="02070309020205020404" pitchFamily="49" charset="0"/>
+            </a:endParaRPr>
+          </a:p>
+          <a:p>
+            <a:r>
+              <a:rPr lang="en-US" dirty="0">
+                <a:effectLst/>
+                <a:latin typeface="Courier New" panose="02070309020205020404" pitchFamily="49" charset="0"/>
+                <a:cs typeface="Courier New" panose="02070309020205020404" pitchFamily="49" charset="0"/>
+              </a:rPr>
+              <a:t>section .</a:t>
+            </a:r>
+            <a:r>
+              <a:rPr lang="en-US" dirty="0" err="1">
+                <a:effectLst/>
+                <a:latin typeface="Courier New" panose="02070309020205020404" pitchFamily="49" charset="0"/>
+                <a:cs typeface="Courier New" panose="02070309020205020404" pitchFamily="49" charset="0"/>
+              </a:rPr>
+              <a:t>bss</a:t>
+            </a:r>
+            <a:endParaRPr lang="en-US" dirty="0">
+              <a:effectLst/>
+              <a:latin typeface="Courier New" panose="02070309020205020404" pitchFamily="49" charset="0"/>
+              <a:cs typeface="Courier New" panose="02070309020205020404" pitchFamily="49" charset="0"/>
+            </a:endParaRPr>
+          </a:p>
+          <a:p>
+            <a:r>
+              <a:rPr lang="en-US" dirty="0">
+                <a:effectLst/>
+                <a:latin typeface="Courier New" panose="02070309020205020404" pitchFamily="49" charset="0"/>
+                <a:cs typeface="Courier New" panose="02070309020205020404" pitchFamily="49" charset="0"/>
+              </a:rPr>
+              <a:t>  </a:t>
+            </a:r>
+            <a:r>
+              <a:rPr lang="en-US" b="1" dirty="0">
+                <a:effectLst/>
+                <a:latin typeface="Courier New" panose="02070309020205020404" pitchFamily="49" charset="0"/>
+                <a:cs typeface="Courier New" panose="02070309020205020404" pitchFamily="49" charset="0"/>
+              </a:rPr>
+              <a:t>c: </a:t>
+            </a:r>
+            <a:r>
+              <a:rPr lang="en-US" dirty="0">
+                <a:effectLst/>
+                <a:latin typeface="Courier New" panose="02070309020205020404" pitchFamily="49" charset="0"/>
+                <a:cs typeface="Courier New" panose="02070309020205020404" pitchFamily="49" charset="0"/>
+              </a:rPr>
+              <a:t>resq 1 </a:t>
+            </a:r>
+          </a:p>
+          <a:p>
+            <a:endParaRPr lang="en-US" dirty="0">
+              <a:effectLst/>
+              <a:latin typeface="Courier New" panose="02070309020205020404" pitchFamily="49" charset="0"/>
+              <a:cs typeface="Courier New" panose="02070309020205020404" pitchFamily="49" charset="0"/>
+            </a:endParaRPr>
+          </a:p>
+          <a:p>
+            <a:r>
+              <a:rPr lang="en-US" dirty="0">
+                <a:effectLst/>
+                <a:latin typeface="Courier New" panose="02070309020205020404" pitchFamily="49" charset="0"/>
+                <a:cs typeface="Courier New" panose="02070309020205020404" pitchFamily="49" charset="0"/>
+              </a:rPr>
+              <a:t>section .text</a:t>
+            </a:r>
+          </a:p>
+          <a:p>
+            <a:r>
+              <a:rPr lang="en-US" dirty="0">
+                <a:effectLst/>
+                <a:latin typeface="Courier New" panose="02070309020205020404" pitchFamily="49" charset="0"/>
+                <a:cs typeface="Courier New" panose="02070309020205020404" pitchFamily="49" charset="0"/>
+              </a:rPr>
+              <a:t>  global main</a:t>
+            </a:r>
+          </a:p>
+          <a:p>
+            <a:endParaRPr lang="en-US" dirty="0">
+              <a:effectLst/>
+              <a:latin typeface="Courier New" panose="02070309020205020404" pitchFamily="49" charset="0"/>
+              <a:cs typeface="Courier New" panose="02070309020205020404" pitchFamily="49" charset="0"/>
+            </a:endParaRPr>
+          </a:p>
+          <a:p>
+            <a:r>
+              <a:rPr lang="en-US" b="1" dirty="0">
+                <a:effectLst/>
+                <a:latin typeface="Courier New" panose="02070309020205020404" pitchFamily="49" charset="0"/>
+                <a:cs typeface="Courier New" panose="02070309020205020404" pitchFamily="49" charset="0"/>
+              </a:rPr>
+              <a:t>main:</a:t>
+            </a:r>
+          </a:p>
+          <a:p>
+            <a:r>
+              <a:rPr lang="en-US" dirty="0">
+                <a:effectLst/>
+                <a:latin typeface="Courier New" panose="02070309020205020404" pitchFamily="49" charset="0"/>
+                <a:cs typeface="Courier New" panose="02070309020205020404" pitchFamily="49" charset="0"/>
+              </a:rPr>
+              <a:t>  </a:t>
+            </a:r>
+            <a:r>
+              <a:rPr lang="en-US" dirty="0" err="1">
+                <a:effectLst/>
+                <a:latin typeface="Courier New" panose="02070309020205020404" pitchFamily="49" charset="0"/>
+                <a:cs typeface="Courier New" panose="02070309020205020404" pitchFamily="49" charset="0"/>
+              </a:rPr>
+              <a:t>xor</a:t>
+            </a:r>
+            <a:r>
+              <a:rPr lang="en-US" dirty="0">
+                <a:effectLst/>
+                <a:latin typeface="Courier New" panose="02070309020205020404" pitchFamily="49" charset="0"/>
+                <a:cs typeface="Courier New" panose="02070309020205020404" pitchFamily="49" charset="0"/>
+              </a:rPr>
+              <a:t> </a:t>
+            </a:r>
+            <a:r>
+              <a:rPr lang="en-US" dirty="0" err="1">
+                <a:effectLst/>
+                <a:latin typeface="Courier New" panose="02070309020205020404" pitchFamily="49" charset="0"/>
+                <a:cs typeface="Courier New" panose="02070309020205020404" pitchFamily="49" charset="0"/>
+              </a:rPr>
+              <a:t>rax</a:t>
+            </a:r>
+            <a:r>
+              <a:rPr lang="en-US" dirty="0">
+                <a:effectLst/>
+                <a:latin typeface="Courier New" panose="02070309020205020404" pitchFamily="49" charset="0"/>
+                <a:cs typeface="Courier New" panose="02070309020205020404" pitchFamily="49" charset="0"/>
+              </a:rPr>
+              <a:t>, </a:t>
+            </a:r>
+            <a:r>
+              <a:rPr lang="en-US" dirty="0" err="1">
+                <a:effectLst/>
+                <a:latin typeface="Courier New" panose="02070309020205020404" pitchFamily="49" charset="0"/>
+                <a:cs typeface="Courier New" panose="02070309020205020404" pitchFamily="49" charset="0"/>
+              </a:rPr>
+              <a:t>rax</a:t>
+            </a:r>
+            <a:endParaRPr lang="ru-RU" dirty="0">
+              <a:effectLst/>
+              <a:latin typeface="Courier New" panose="02070309020205020404" pitchFamily="49" charset="0"/>
+              <a:cs typeface="Courier New" panose="02070309020205020404" pitchFamily="49" charset="0"/>
+            </a:endParaRPr>
+          </a:p>
+          <a:p>
+            <a:r>
+              <a:rPr lang="en-US" b="1" dirty="0">
+                <a:effectLst/>
+                <a:latin typeface="Courier New" panose="02070309020205020404" pitchFamily="49" charset="0"/>
+                <a:cs typeface="Courier New" panose="02070309020205020404" pitchFamily="49" charset="0"/>
+              </a:rPr>
+              <a:t>.ret:</a:t>
+            </a:r>
+          </a:p>
+          <a:p>
+            <a:r>
+              <a:rPr lang="en-US" dirty="0">
+                <a:effectLst/>
+                <a:latin typeface="Courier New" panose="02070309020205020404" pitchFamily="49" charset="0"/>
+                <a:cs typeface="Courier New" panose="02070309020205020404" pitchFamily="49" charset="0"/>
+              </a:rPr>
+              <a:t>  ret</a:t>
+            </a:r>
+            <a:endParaRPr lang="en-US" dirty="0">
+              <a:latin typeface="Courier New" panose="02070309020205020404" pitchFamily="49" charset="0"/>
+              <a:cs typeface="Courier New" panose="02070309020205020404" pitchFamily="49" charset="0"/>
+            </a:endParaRPr>
+          </a:p>
+        </p:txBody>
+      </p:sp>
+    </p:spTree>
+    <p:extLst>
+      <p:ext uri="{BB962C8B-B14F-4D97-AF65-F5344CB8AC3E}">
+        <p14:creationId xmlns:p14="http://schemas.microsoft.com/office/powerpoint/2010/main" val="1291004724"/>
+      </p:ext>
+    </p:extLst>
+  </p:cSld>
+  <p:clrMapOvr>
+    <a:masterClrMapping/>
+  </p:clrMapOvr>
+</p:sld>
+</file>
+
+<file path=ppt/slides/slide17.xml><?xml version="1.0" encoding="utf-8"?>
+<p:sld xmlns:a="http://schemas.openxmlformats.org/drawingml/2006/main" xmlns:r="http://schemas.openxmlformats.org/officeDocument/2006/relationships" xmlns:p="http://schemas.openxmlformats.org/presentationml/2006/main">
+  <p:cSld>
+    <p:spTree>
+      <p:nvGrpSpPr>
+        <p:cNvPr id="1" name=""/>
+        <p:cNvGrpSpPr/>
+        <p:nvPr/>
+      </p:nvGrpSpPr>
+      <p:grpSpPr>
+        <a:xfrm>
+          <a:off x="0" y="0"/>
+          <a:ext cx="0" cy="0"/>
+          <a:chOff x="0" y="0"/>
+          <a:chExt cx="0" cy="0"/>
+        </a:xfrm>
+      </p:grpSpPr>
+      <p:sp>
+        <p:nvSpPr>
+          <p:cNvPr id="2" name="Заголовок 1">
+            <a:extLst>
+              <a:ext uri="{FF2B5EF4-FFF2-40B4-BE49-F238E27FC236}">
+                <a16:creationId xmlns:a16="http://schemas.microsoft.com/office/drawing/2014/main" id="{92DC634E-EDC1-4875-9A06-3D126D1A2E49}"/>
+              </a:ext>
+            </a:extLst>
+          </p:cNvPr>
+          <p:cNvSpPr>
+            <a:spLocks noGrp="1"/>
+          </p:cNvSpPr>
+          <p:nvPr>
+            <p:ph type="title"/>
+          </p:nvPr>
+        </p:nvSpPr>
         <p:spPr>
           <a:xfrm>
             <a:off x="900344" y="344805"/>
@@ -11814,7 +13807,7 @@
           <a:p>
             <a:fld id="{B67FBA2B-964F-4C4D-AAF7-5A8399264638}" type="slidenum">
               <a:rPr lang="en-US" smtClean="0"/>
-              <a:t>15</a:t>
+              <a:t>17</a:t>
             </a:fld>
             <a:endParaRPr lang="en-US" dirty="0"/>
           </a:p>
@@ -12458,1321 +14451,6 @@
     <p:extLst>
       <p:ext uri="{BB962C8B-B14F-4D97-AF65-F5344CB8AC3E}">
         <p14:creationId xmlns:p14="http://schemas.microsoft.com/office/powerpoint/2010/main" val="4024463026"/>
-      </p:ext>
-    </p:extLst>
-  </p:cSld>
-  <p:clrMapOvr>
-    <a:masterClrMapping/>
-  </p:clrMapOvr>
-</p:sld>
-</file>
-
-<file path=ppt/slides/slide16.xml><?xml version="1.0" encoding="utf-8"?>
-<p:sld xmlns:a="http://schemas.openxmlformats.org/drawingml/2006/main" xmlns:r="http://schemas.openxmlformats.org/officeDocument/2006/relationships" xmlns:p="http://schemas.openxmlformats.org/presentationml/2006/main">
-  <p:cSld>
-    <p:spTree>
-      <p:nvGrpSpPr>
-        <p:cNvPr id="1" name=""/>
-        <p:cNvGrpSpPr/>
-        <p:nvPr/>
-      </p:nvGrpSpPr>
-      <p:grpSpPr>
-        <a:xfrm>
-          <a:off x="0" y="0"/>
-          <a:ext cx="0" cy="0"/>
-          <a:chOff x="0" y="0"/>
-          <a:chExt cx="0" cy="0"/>
-        </a:xfrm>
-      </p:grpSpPr>
-      <p:sp>
-        <p:nvSpPr>
-          <p:cNvPr id="2" name="Заголовок 1">
-            <a:extLst>
-              <a:ext uri="{FF2B5EF4-FFF2-40B4-BE49-F238E27FC236}">
-                <a16:creationId xmlns:a16="http://schemas.microsoft.com/office/drawing/2014/main" id="{92DC634E-EDC1-4875-9A06-3D126D1A2E49}"/>
-              </a:ext>
-            </a:extLst>
-          </p:cNvPr>
-          <p:cNvSpPr>
-            <a:spLocks noGrp="1"/>
-          </p:cNvSpPr>
-          <p:nvPr>
-            <p:ph type="title"/>
-          </p:nvPr>
-        </p:nvSpPr>
-        <p:spPr/>
-        <p:txBody>
-          <a:bodyPr/>
-          <a:lstStyle/>
-          <a:p>
-            <a:r>
-              <a:rPr lang="ru-RU" dirty="0"/>
-              <a:t>Структура программы</a:t>
-            </a:r>
-            <a:endParaRPr lang="en-US" dirty="0"/>
-          </a:p>
-        </p:txBody>
-      </p:sp>
-      <p:sp>
-        <p:nvSpPr>
-          <p:cNvPr id="3" name="Объект 2">
-            <a:extLst>
-              <a:ext uri="{FF2B5EF4-FFF2-40B4-BE49-F238E27FC236}">
-                <a16:creationId xmlns:a16="http://schemas.microsoft.com/office/drawing/2014/main" id="{D4A55D7F-95B1-4B4F-BCE0-8CE97F5FD713}"/>
-              </a:ext>
-            </a:extLst>
-          </p:cNvPr>
-          <p:cNvSpPr>
-            <a:spLocks noGrp="1"/>
-          </p:cNvSpPr>
-          <p:nvPr>
-            <p:ph idx="1"/>
-          </p:nvPr>
-        </p:nvSpPr>
-        <p:spPr>
-          <a:xfrm>
-            <a:off x="838199" y="1477882"/>
-            <a:ext cx="6677891" cy="5151518"/>
-          </a:xfrm>
-        </p:spPr>
-        <p:txBody>
-          <a:bodyPr>
-            <a:normAutofit lnSpcReduction="10000"/>
-          </a:bodyPr>
-          <a:lstStyle/>
-          <a:p>
-            <a:pPr marL="0" indent="0">
-              <a:buNone/>
-            </a:pPr>
-            <a:r>
-              <a:rPr lang="ru-RU" sz="2000" dirty="0"/>
-              <a:t>В языке ассемблера необходимо определить не только программу, но и структуру исполняемого файла в целом.</a:t>
-            </a:r>
-          </a:p>
-          <a:p>
-            <a:pPr marL="0" indent="0">
-              <a:buNone/>
-            </a:pPr>
-            <a:r>
-              <a:rPr lang="ru-RU" sz="2000" dirty="0"/>
-              <a:t>Всякий исполняемый файл содержит в себе несколько областей (сегментов/секций), хранящих код и данные программы и, в некоторых случаях, служебную информацию. Каждый сегмент имеет свое место загрузки и свои разрешения на доступ к нему.</a:t>
-            </a:r>
-          </a:p>
-          <a:p>
-            <a:pPr marL="0" indent="0">
-              <a:buNone/>
-            </a:pPr>
-            <a:r>
-              <a:rPr lang="ru-RU" sz="2000" dirty="0"/>
-              <a:t>При написании программы на языке ассемблера основные сегменты программы приходится определять самостоятельно.</a:t>
-            </a:r>
-          </a:p>
-          <a:p>
-            <a:pPr marL="0" indent="0">
-              <a:buNone/>
-            </a:pPr>
-            <a:r>
-              <a:rPr lang="ru-RU" sz="2000" dirty="0"/>
-              <a:t>Основные сегменты:</a:t>
-            </a:r>
-          </a:p>
-          <a:p>
-            <a:pPr marL="179388" indent="0">
-              <a:buNone/>
-            </a:pPr>
-            <a:r>
-              <a:rPr lang="en-US" sz="2000" b="1" dirty="0"/>
-              <a:t>.data </a:t>
-            </a:r>
-            <a:r>
-              <a:rPr lang="en-US" sz="2000" dirty="0"/>
-              <a:t>– </a:t>
-            </a:r>
-            <a:r>
-              <a:rPr lang="ru-RU" sz="2000" dirty="0"/>
-              <a:t>сегмент глобальных/статических переменных с заданным значением</a:t>
-            </a:r>
-          </a:p>
-          <a:p>
-            <a:pPr marL="179388" indent="0">
-              <a:buNone/>
-            </a:pPr>
-            <a:r>
-              <a:rPr lang="en-US" sz="2000" b="1" dirty="0"/>
-              <a:t>.</a:t>
-            </a:r>
-            <a:r>
-              <a:rPr lang="en-US" sz="2000" b="1" dirty="0" err="1"/>
-              <a:t>rodata</a:t>
-            </a:r>
-            <a:r>
-              <a:rPr lang="en-US" sz="2000" b="1" dirty="0"/>
-              <a:t> </a:t>
-            </a:r>
-            <a:r>
-              <a:rPr lang="en-US" sz="2000" dirty="0"/>
-              <a:t>– </a:t>
-            </a:r>
-            <a:r>
-              <a:rPr lang="ru-RU" sz="2000" dirty="0"/>
-              <a:t>сегмент констант</a:t>
-            </a:r>
-          </a:p>
-          <a:p>
-            <a:pPr marL="179388" indent="0">
-              <a:buNone/>
-            </a:pPr>
-            <a:r>
-              <a:rPr lang="en-US" sz="2000" b="1" dirty="0"/>
-              <a:t>.</a:t>
-            </a:r>
-            <a:r>
-              <a:rPr lang="en-US" sz="2000" b="1" dirty="0" err="1"/>
-              <a:t>bss</a:t>
-            </a:r>
-            <a:r>
-              <a:rPr lang="en-US" sz="2000" dirty="0"/>
-              <a:t> - </a:t>
-            </a:r>
-            <a:r>
-              <a:rPr lang="ru-RU" sz="2000" dirty="0"/>
-              <a:t>сегмент глобальных/статических переменных без заданного значения (инициализируются нулем).</a:t>
-            </a:r>
-          </a:p>
-          <a:p>
-            <a:pPr marL="179388" indent="0">
-              <a:buNone/>
-            </a:pPr>
-            <a:r>
-              <a:rPr lang="en-US" sz="2000" b="1" dirty="0"/>
-              <a:t>.text</a:t>
-            </a:r>
-            <a:r>
-              <a:rPr lang="en-US" sz="2000" dirty="0"/>
-              <a:t> – </a:t>
-            </a:r>
-            <a:r>
-              <a:rPr lang="ru-RU" sz="2000" dirty="0"/>
-              <a:t>сегмент кода.</a:t>
-            </a:r>
-          </a:p>
-          <a:p>
-            <a:pPr marL="0" indent="0">
-              <a:buNone/>
-            </a:pPr>
-            <a:endParaRPr lang="en-US" sz="2000" b="1" dirty="0"/>
-          </a:p>
-        </p:txBody>
-      </p:sp>
-      <p:sp>
-        <p:nvSpPr>
-          <p:cNvPr id="5" name="Номер слайда 4">
-            <a:extLst>
-              <a:ext uri="{FF2B5EF4-FFF2-40B4-BE49-F238E27FC236}">
-                <a16:creationId xmlns:a16="http://schemas.microsoft.com/office/drawing/2014/main" id="{9DB92496-D89E-46CC-BD94-449C7A865604}"/>
-              </a:ext>
-            </a:extLst>
-          </p:cNvPr>
-          <p:cNvSpPr>
-            <a:spLocks noGrp="1"/>
-          </p:cNvSpPr>
-          <p:nvPr>
-            <p:ph type="sldNum" sz="quarter" idx="12"/>
-          </p:nvPr>
-        </p:nvSpPr>
-        <p:spPr/>
-        <p:txBody>
-          <a:bodyPr/>
-          <a:lstStyle/>
-          <a:p>
-            <a:fld id="{B67FBA2B-964F-4C4D-AAF7-5A8399264638}" type="slidenum">
-              <a:rPr lang="en-US" smtClean="0"/>
-              <a:t>16</a:t>
-            </a:fld>
-            <a:endParaRPr lang="en-US" dirty="0"/>
-          </a:p>
-        </p:txBody>
-      </p:sp>
-      <p:sp>
-        <p:nvSpPr>
-          <p:cNvPr id="6" name="TextBox 5">
-            <a:extLst>
-              <a:ext uri="{FF2B5EF4-FFF2-40B4-BE49-F238E27FC236}">
-                <a16:creationId xmlns:a16="http://schemas.microsoft.com/office/drawing/2014/main" id="{8E55AC4F-7E2E-4DB7-8477-91FC371F34A5}"/>
-              </a:ext>
-            </a:extLst>
-          </p:cNvPr>
-          <p:cNvSpPr txBox="1"/>
-          <p:nvPr/>
-        </p:nvSpPr>
-        <p:spPr>
-          <a:xfrm>
-            <a:off x="7907278" y="1028343"/>
-            <a:ext cx="4149843" cy="4801314"/>
-          </a:xfrm>
-          <a:prstGeom prst="rect">
-            <a:avLst/>
-          </a:prstGeom>
-          <a:noFill/>
-        </p:spPr>
-        <p:txBody>
-          <a:bodyPr wrap="square" rtlCol="0">
-            <a:spAutoFit/>
-          </a:bodyPr>
-          <a:lstStyle/>
-          <a:p>
-            <a:r>
-              <a:rPr lang="en-US" b="1" dirty="0">
-                <a:effectLst/>
-                <a:latin typeface="Courier New" panose="02070309020205020404" pitchFamily="49" charset="0"/>
-                <a:cs typeface="Courier New" panose="02070309020205020404" pitchFamily="49" charset="0"/>
-              </a:rPr>
-              <a:t>section .data</a:t>
-            </a:r>
-          </a:p>
-          <a:p>
-            <a:r>
-              <a:rPr lang="en-US" dirty="0">
-                <a:effectLst/>
-                <a:latin typeface="Courier New" panose="02070309020205020404" pitchFamily="49" charset="0"/>
-                <a:cs typeface="Courier New" panose="02070309020205020404" pitchFamily="49" charset="0"/>
-              </a:rPr>
-              <a:t>  a: </a:t>
-            </a:r>
-            <a:r>
-              <a:rPr lang="en-US" dirty="0" err="1">
-                <a:effectLst/>
-                <a:latin typeface="Courier New" panose="02070309020205020404" pitchFamily="49" charset="0"/>
-                <a:cs typeface="Courier New" panose="02070309020205020404" pitchFamily="49" charset="0"/>
-              </a:rPr>
-              <a:t>db</a:t>
-            </a:r>
-            <a:r>
-              <a:rPr lang="en-US" dirty="0">
-                <a:effectLst/>
-                <a:latin typeface="Courier New" panose="02070309020205020404" pitchFamily="49" charset="0"/>
-                <a:cs typeface="Courier New" panose="02070309020205020404" pitchFamily="49" charset="0"/>
-              </a:rPr>
-              <a:t> 5</a:t>
-            </a:r>
-          </a:p>
-          <a:p>
-            <a:r>
-              <a:rPr lang="en-US" dirty="0">
-                <a:effectLst/>
-                <a:latin typeface="Courier New" panose="02070309020205020404" pitchFamily="49" charset="0"/>
-                <a:cs typeface="Courier New" panose="02070309020205020404" pitchFamily="49" charset="0"/>
-              </a:rPr>
-              <a:t>  b: </a:t>
-            </a:r>
-            <a:r>
-              <a:rPr lang="en-US" dirty="0" err="1">
-                <a:effectLst/>
-                <a:latin typeface="Courier New" panose="02070309020205020404" pitchFamily="49" charset="0"/>
-                <a:cs typeface="Courier New" panose="02070309020205020404" pitchFamily="49" charset="0"/>
-              </a:rPr>
-              <a:t>dq</a:t>
-            </a:r>
-            <a:r>
-              <a:rPr lang="en-US" dirty="0">
-                <a:effectLst/>
-                <a:latin typeface="Courier New" panose="02070309020205020404" pitchFamily="49" charset="0"/>
-                <a:cs typeface="Courier New" panose="02070309020205020404" pitchFamily="49" charset="0"/>
-              </a:rPr>
-              <a:t> 0xFF</a:t>
-            </a:r>
-          </a:p>
-          <a:p>
-            <a:r>
-              <a:rPr lang="en-US" dirty="0">
-                <a:effectLst/>
-                <a:latin typeface="Courier New" panose="02070309020205020404" pitchFamily="49" charset="0"/>
-                <a:cs typeface="Courier New" panose="02070309020205020404" pitchFamily="49" charset="0"/>
-              </a:rPr>
-              <a:t>  array: times 16 </a:t>
-            </a:r>
-            <a:r>
-              <a:rPr lang="en-US" dirty="0" err="1">
-                <a:effectLst/>
-                <a:latin typeface="Courier New" panose="02070309020205020404" pitchFamily="49" charset="0"/>
-                <a:cs typeface="Courier New" panose="02070309020205020404" pitchFamily="49" charset="0"/>
-              </a:rPr>
-              <a:t>db</a:t>
-            </a:r>
-            <a:r>
-              <a:rPr lang="en-US" dirty="0">
-                <a:effectLst/>
-                <a:latin typeface="Courier New" panose="02070309020205020404" pitchFamily="49" charset="0"/>
-                <a:cs typeface="Courier New" panose="02070309020205020404" pitchFamily="49" charset="0"/>
-              </a:rPr>
-              <a:t> 0</a:t>
-            </a:r>
-          </a:p>
-          <a:p>
-            <a:endParaRPr lang="en-US" dirty="0">
-              <a:effectLst/>
-              <a:latin typeface="Courier New" panose="02070309020205020404" pitchFamily="49" charset="0"/>
-              <a:cs typeface="Courier New" panose="02070309020205020404" pitchFamily="49" charset="0"/>
-            </a:endParaRPr>
-          </a:p>
-          <a:p>
-            <a:r>
-              <a:rPr lang="en-US" b="1" dirty="0">
-                <a:effectLst/>
-                <a:latin typeface="Courier New" panose="02070309020205020404" pitchFamily="49" charset="0"/>
-                <a:cs typeface="Courier New" panose="02070309020205020404" pitchFamily="49" charset="0"/>
-              </a:rPr>
-              <a:t>section .</a:t>
-            </a:r>
-            <a:r>
-              <a:rPr lang="en-US" b="1" dirty="0" err="1">
-                <a:effectLst/>
-                <a:latin typeface="Courier New" panose="02070309020205020404" pitchFamily="49" charset="0"/>
-                <a:cs typeface="Courier New" panose="02070309020205020404" pitchFamily="49" charset="0"/>
-              </a:rPr>
-              <a:t>rodata</a:t>
-            </a:r>
-            <a:endParaRPr lang="en-US" b="1" dirty="0">
-              <a:effectLst/>
-              <a:latin typeface="Courier New" panose="02070309020205020404" pitchFamily="49" charset="0"/>
-              <a:cs typeface="Courier New" panose="02070309020205020404" pitchFamily="49" charset="0"/>
-            </a:endParaRPr>
-          </a:p>
-          <a:p>
-            <a:r>
-              <a:rPr lang="en-US" dirty="0">
-                <a:effectLst/>
-                <a:latin typeface="Courier New" panose="02070309020205020404" pitchFamily="49" charset="0"/>
-                <a:cs typeface="Courier New" panose="02070309020205020404" pitchFamily="49" charset="0"/>
-              </a:rPr>
-              <a:t>  const: </a:t>
-            </a:r>
-            <a:r>
-              <a:rPr lang="en-US" dirty="0" err="1">
-                <a:effectLst/>
-                <a:latin typeface="Courier New" panose="02070309020205020404" pitchFamily="49" charset="0"/>
-                <a:cs typeface="Courier New" panose="02070309020205020404" pitchFamily="49" charset="0"/>
-              </a:rPr>
-              <a:t>db</a:t>
-            </a:r>
-            <a:r>
-              <a:rPr lang="en-US" dirty="0">
-                <a:effectLst/>
-                <a:latin typeface="Courier New" panose="02070309020205020404" pitchFamily="49" charset="0"/>
-                <a:cs typeface="Courier New" panose="02070309020205020404" pitchFamily="49" charset="0"/>
-              </a:rPr>
-              <a:t> 7</a:t>
-            </a:r>
-            <a:br>
-              <a:rPr lang="en-US" dirty="0">
-                <a:effectLst/>
-                <a:latin typeface="Courier New" panose="02070309020205020404" pitchFamily="49" charset="0"/>
-                <a:cs typeface="Courier New" panose="02070309020205020404" pitchFamily="49" charset="0"/>
-              </a:rPr>
-            </a:br>
-            <a:endParaRPr lang="en-US" dirty="0">
-              <a:effectLst/>
-              <a:latin typeface="Courier New" panose="02070309020205020404" pitchFamily="49" charset="0"/>
-              <a:cs typeface="Courier New" panose="02070309020205020404" pitchFamily="49" charset="0"/>
-            </a:endParaRPr>
-          </a:p>
-          <a:p>
-            <a:r>
-              <a:rPr lang="en-US" b="1" dirty="0">
-                <a:effectLst/>
-                <a:latin typeface="Courier New" panose="02070309020205020404" pitchFamily="49" charset="0"/>
-                <a:cs typeface="Courier New" panose="02070309020205020404" pitchFamily="49" charset="0"/>
-              </a:rPr>
-              <a:t>section .</a:t>
-            </a:r>
-            <a:r>
-              <a:rPr lang="en-US" b="1" dirty="0" err="1">
-                <a:effectLst/>
-                <a:latin typeface="Courier New" panose="02070309020205020404" pitchFamily="49" charset="0"/>
-                <a:cs typeface="Courier New" panose="02070309020205020404" pitchFamily="49" charset="0"/>
-              </a:rPr>
-              <a:t>bss</a:t>
-            </a:r>
-            <a:endParaRPr lang="en-US" b="1" dirty="0">
-              <a:effectLst/>
-              <a:latin typeface="Courier New" panose="02070309020205020404" pitchFamily="49" charset="0"/>
-              <a:cs typeface="Courier New" panose="02070309020205020404" pitchFamily="49" charset="0"/>
-            </a:endParaRPr>
-          </a:p>
-          <a:p>
-            <a:r>
-              <a:rPr lang="en-US" dirty="0">
-                <a:effectLst/>
-                <a:latin typeface="Courier New" panose="02070309020205020404" pitchFamily="49" charset="0"/>
-                <a:cs typeface="Courier New" panose="02070309020205020404" pitchFamily="49" charset="0"/>
-              </a:rPr>
-              <a:t>  c: resq 1 </a:t>
-            </a:r>
-          </a:p>
-          <a:p>
-            <a:endParaRPr lang="en-US" dirty="0">
-              <a:effectLst/>
-              <a:latin typeface="Courier New" panose="02070309020205020404" pitchFamily="49" charset="0"/>
-              <a:cs typeface="Courier New" panose="02070309020205020404" pitchFamily="49" charset="0"/>
-            </a:endParaRPr>
-          </a:p>
-          <a:p>
-            <a:r>
-              <a:rPr lang="en-US" b="1" dirty="0">
-                <a:effectLst/>
-                <a:latin typeface="Courier New" panose="02070309020205020404" pitchFamily="49" charset="0"/>
-                <a:cs typeface="Courier New" panose="02070309020205020404" pitchFamily="49" charset="0"/>
-              </a:rPr>
-              <a:t>section .text</a:t>
-            </a:r>
-          </a:p>
-          <a:p>
-            <a:r>
-              <a:rPr lang="en-US" dirty="0">
-                <a:effectLst/>
-                <a:latin typeface="Courier New" panose="02070309020205020404" pitchFamily="49" charset="0"/>
-                <a:cs typeface="Courier New" panose="02070309020205020404" pitchFamily="49" charset="0"/>
-              </a:rPr>
-              <a:t>  global main</a:t>
-            </a:r>
-          </a:p>
-          <a:p>
-            <a:endParaRPr lang="en-US" dirty="0">
-              <a:effectLst/>
-              <a:latin typeface="Courier New" panose="02070309020205020404" pitchFamily="49" charset="0"/>
-              <a:cs typeface="Courier New" panose="02070309020205020404" pitchFamily="49" charset="0"/>
-            </a:endParaRPr>
-          </a:p>
-          <a:p>
-            <a:r>
-              <a:rPr lang="en-US" dirty="0">
-                <a:effectLst/>
-                <a:latin typeface="Courier New" panose="02070309020205020404" pitchFamily="49" charset="0"/>
-                <a:cs typeface="Courier New" panose="02070309020205020404" pitchFamily="49" charset="0"/>
-              </a:rPr>
-              <a:t>main:</a:t>
-            </a:r>
-          </a:p>
-          <a:p>
-            <a:r>
-              <a:rPr lang="en-US" dirty="0">
-                <a:effectLst/>
-                <a:latin typeface="Courier New" panose="02070309020205020404" pitchFamily="49" charset="0"/>
-                <a:cs typeface="Courier New" panose="02070309020205020404" pitchFamily="49" charset="0"/>
-              </a:rPr>
-              <a:t>  </a:t>
-            </a:r>
-            <a:r>
-              <a:rPr lang="en-US" dirty="0" err="1">
-                <a:effectLst/>
-                <a:latin typeface="Courier New" panose="02070309020205020404" pitchFamily="49" charset="0"/>
-                <a:cs typeface="Courier New" panose="02070309020205020404" pitchFamily="49" charset="0"/>
-              </a:rPr>
-              <a:t>xor</a:t>
-            </a:r>
-            <a:r>
-              <a:rPr lang="en-US" dirty="0">
-                <a:effectLst/>
-                <a:latin typeface="Courier New" panose="02070309020205020404" pitchFamily="49" charset="0"/>
-                <a:cs typeface="Courier New" panose="02070309020205020404" pitchFamily="49" charset="0"/>
-              </a:rPr>
-              <a:t> </a:t>
-            </a:r>
-            <a:r>
-              <a:rPr lang="en-US" dirty="0" err="1">
-                <a:effectLst/>
-                <a:latin typeface="Courier New" panose="02070309020205020404" pitchFamily="49" charset="0"/>
-                <a:cs typeface="Courier New" panose="02070309020205020404" pitchFamily="49" charset="0"/>
-              </a:rPr>
-              <a:t>rax</a:t>
-            </a:r>
-            <a:r>
-              <a:rPr lang="en-US" dirty="0">
-                <a:effectLst/>
-                <a:latin typeface="Courier New" panose="02070309020205020404" pitchFamily="49" charset="0"/>
-                <a:cs typeface="Courier New" panose="02070309020205020404" pitchFamily="49" charset="0"/>
-              </a:rPr>
-              <a:t>, </a:t>
-            </a:r>
-            <a:r>
-              <a:rPr lang="en-US" dirty="0" err="1">
-                <a:effectLst/>
-                <a:latin typeface="Courier New" panose="02070309020205020404" pitchFamily="49" charset="0"/>
-                <a:cs typeface="Courier New" panose="02070309020205020404" pitchFamily="49" charset="0"/>
-              </a:rPr>
-              <a:t>rax</a:t>
-            </a:r>
-            <a:endParaRPr lang="en-US" dirty="0">
-              <a:effectLst/>
-              <a:latin typeface="Courier New" panose="02070309020205020404" pitchFamily="49" charset="0"/>
-              <a:cs typeface="Courier New" panose="02070309020205020404" pitchFamily="49" charset="0"/>
-            </a:endParaRPr>
-          </a:p>
-          <a:p>
-            <a:r>
-              <a:rPr lang="en-US" dirty="0">
-                <a:effectLst/>
-                <a:latin typeface="Courier New" panose="02070309020205020404" pitchFamily="49" charset="0"/>
-                <a:cs typeface="Courier New" panose="02070309020205020404" pitchFamily="49" charset="0"/>
-              </a:rPr>
-              <a:t>  ret</a:t>
-            </a:r>
-            <a:endParaRPr lang="en-US" dirty="0">
-              <a:latin typeface="Courier New" panose="02070309020205020404" pitchFamily="49" charset="0"/>
-              <a:cs typeface="Courier New" panose="02070309020205020404" pitchFamily="49" charset="0"/>
-            </a:endParaRPr>
-          </a:p>
-        </p:txBody>
-      </p:sp>
-    </p:spTree>
-    <p:extLst>
-      <p:ext uri="{BB962C8B-B14F-4D97-AF65-F5344CB8AC3E}">
-        <p14:creationId xmlns:p14="http://schemas.microsoft.com/office/powerpoint/2010/main" val="3101290777"/>
-      </p:ext>
-    </p:extLst>
-  </p:cSld>
-  <p:clrMapOvr>
-    <a:masterClrMapping/>
-  </p:clrMapOvr>
-</p:sld>
-</file>
-
-<file path=ppt/slides/slide17.xml><?xml version="1.0" encoding="utf-8"?>
-<p:sld xmlns:a="http://schemas.openxmlformats.org/drawingml/2006/main" xmlns:r="http://schemas.openxmlformats.org/officeDocument/2006/relationships" xmlns:p="http://schemas.openxmlformats.org/presentationml/2006/main">
-  <p:cSld>
-    <p:spTree>
-      <p:nvGrpSpPr>
-        <p:cNvPr id="1" name=""/>
-        <p:cNvGrpSpPr/>
-        <p:nvPr/>
-      </p:nvGrpSpPr>
-      <p:grpSpPr>
-        <a:xfrm>
-          <a:off x="0" y="0"/>
-          <a:ext cx="0" cy="0"/>
-          <a:chOff x="0" y="0"/>
-          <a:chExt cx="0" cy="0"/>
-        </a:xfrm>
-      </p:grpSpPr>
-      <p:sp>
-        <p:nvSpPr>
-          <p:cNvPr id="2" name="Заголовок 1">
-            <a:extLst>
-              <a:ext uri="{FF2B5EF4-FFF2-40B4-BE49-F238E27FC236}">
-                <a16:creationId xmlns:a16="http://schemas.microsoft.com/office/drawing/2014/main" id="{92DC634E-EDC1-4875-9A06-3D126D1A2E49}"/>
-              </a:ext>
-            </a:extLst>
-          </p:cNvPr>
-          <p:cNvSpPr>
-            <a:spLocks noGrp="1"/>
-          </p:cNvSpPr>
-          <p:nvPr>
-            <p:ph type="title"/>
-          </p:nvPr>
-        </p:nvSpPr>
-        <p:spPr/>
-        <p:txBody>
-          <a:bodyPr/>
-          <a:lstStyle/>
-          <a:p>
-            <a:r>
-              <a:rPr lang="ru-RU" dirty="0"/>
-              <a:t>Метки</a:t>
-            </a:r>
-            <a:endParaRPr lang="en-US" dirty="0"/>
-          </a:p>
-        </p:txBody>
-      </p:sp>
-      <p:sp>
-        <p:nvSpPr>
-          <p:cNvPr id="3" name="Объект 2">
-            <a:extLst>
-              <a:ext uri="{FF2B5EF4-FFF2-40B4-BE49-F238E27FC236}">
-                <a16:creationId xmlns:a16="http://schemas.microsoft.com/office/drawing/2014/main" id="{D4A55D7F-95B1-4B4F-BCE0-8CE97F5FD713}"/>
-              </a:ext>
-            </a:extLst>
-          </p:cNvPr>
-          <p:cNvSpPr>
-            <a:spLocks noGrp="1"/>
-          </p:cNvSpPr>
-          <p:nvPr>
-            <p:ph idx="1"/>
-          </p:nvPr>
-        </p:nvSpPr>
-        <p:spPr>
-          <a:xfrm>
-            <a:off x="314325" y="1477881"/>
-            <a:ext cx="7956096" cy="5078313"/>
-          </a:xfrm>
-        </p:spPr>
-        <p:txBody>
-          <a:bodyPr>
-            <a:normAutofit lnSpcReduction="10000"/>
-          </a:bodyPr>
-          <a:lstStyle/>
-          <a:p>
-            <a:pPr marL="0" indent="0">
-              <a:buNone/>
-            </a:pPr>
-            <a:r>
-              <a:rPr lang="ru-RU" sz="2000" b="1" dirty="0"/>
-              <a:t>Метка</a:t>
-            </a:r>
-            <a:r>
-              <a:rPr lang="ru-RU" sz="2000" dirty="0"/>
-              <a:t> – символьная строка, представляющая некоторый адрес в памяти</a:t>
-            </a:r>
-            <a:r>
-              <a:rPr lang="ru-RU" sz="2000" b="1" dirty="0"/>
-              <a:t>.</a:t>
-            </a:r>
-          </a:p>
-          <a:p>
-            <a:pPr marL="0" indent="0">
-              <a:buNone/>
-            </a:pPr>
-            <a:r>
-              <a:rPr lang="ru-RU" sz="2000" dirty="0"/>
-              <a:t>Метки обычно используются для обозначения переменных, функций или мест внутри функций, соответствующих точкам перехода. </a:t>
-            </a:r>
-          </a:p>
-          <a:p>
-            <a:pPr marL="0" indent="0">
-              <a:buNone/>
-            </a:pPr>
-            <a:r>
-              <a:rPr lang="ru-RU" sz="2000" dirty="0"/>
-              <a:t>Синтаксис объявления метки:</a:t>
-            </a:r>
-          </a:p>
-          <a:p>
-            <a:pPr marL="0" indent="0">
-              <a:buNone/>
-            </a:pPr>
-            <a:r>
-              <a:rPr lang="ru-RU" sz="2000" dirty="0">
-                <a:latin typeface="Courier New" panose="02070309020205020404" pitchFamily="49" charset="0"/>
-                <a:cs typeface="Courier New" panose="02070309020205020404" pitchFamily="49" charset="0"/>
-              </a:rPr>
-              <a:t>	</a:t>
-            </a:r>
-            <a:r>
-              <a:rPr lang="en-US" sz="2000" dirty="0">
-                <a:latin typeface="Courier New" panose="02070309020205020404" pitchFamily="49" charset="0"/>
-                <a:cs typeface="Courier New" panose="02070309020205020404" pitchFamily="49" charset="0"/>
-              </a:rPr>
-              <a:t>&lt;</a:t>
-            </a:r>
-            <a:r>
-              <a:rPr lang="ru-RU" sz="2000" dirty="0">
-                <a:latin typeface="Courier New" panose="02070309020205020404" pitchFamily="49" charset="0"/>
-                <a:cs typeface="Courier New" panose="02070309020205020404" pitchFamily="49" charset="0"/>
-              </a:rPr>
-              <a:t>имя метки</a:t>
-            </a:r>
-            <a:r>
-              <a:rPr lang="en-US" sz="2000" dirty="0">
-                <a:latin typeface="Courier New" panose="02070309020205020404" pitchFamily="49" charset="0"/>
-                <a:cs typeface="Courier New" panose="02070309020205020404" pitchFamily="49" charset="0"/>
-              </a:rPr>
-              <a:t>&gt;</a:t>
-            </a:r>
-            <a:r>
-              <a:rPr lang="ru-RU" sz="2000" dirty="0">
-                <a:latin typeface="Courier New" panose="02070309020205020404" pitchFamily="49" charset="0"/>
-                <a:cs typeface="Courier New" panose="02070309020205020404" pitchFamily="49" charset="0"/>
-              </a:rPr>
-              <a:t>: </a:t>
-            </a:r>
-            <a:endParaRPr lang="ru-RU" sz="2000" b="1" dirty="0"/>
-          </a:p>
-          <a:p>
-            <a:pPr marL="0" indent="0">
-              <a:buNone/>
-            </a:pPr>
-            <a:r>
-              <a:rPr lang="ru-RU" sz="2000" dirty="0"/>
-              <a:t>При ассемблировании метка заменяется на соответствующий адрес</a:t>
-            </a:r>
-            <a:r>
-              <a:rPr lang="ru-RU" sz="2000" kern="1200" baseline="30000" dirty="0">
-                <a:solidFill>
-                  <a:srgbClr val="000000"/>
-                </a:solidFill>
-                <a:effectLst/>
-                <a:latin typeface="Calibri" panose="020F0502020204030204" pitchFamily="34" charset="0"/>
-                <a:ea typeface="+mn-ea"/>
-                <a:cs typeface="+mn-cs"/>
-              </a:rPr>
-              <a:t>1</a:t>
-            </a:r>
-            <a:r>
-              <a:rPr lang="ru-RU" sz="2000" dirty="0"/>
-              <a:t>.</a:t>
-            </a:r>
-          </a:p>
-          <a:p>
-            <a:pPr marL="0" indent="0">
-              <a:buNone/>
-            </a:pPr>
-            <a:endParaRPr lang="ru-RU" sz="2000" dirty="0"/>
-          </a:p>
-          <a:p>
-            <a:pPr marL="0" indent="0">
-              <a:buNone/>
-            </a:pPr>
-            <a:r>
-              <a:rPr lang="ru-RU" sz="2000" dirty="0"/>
-              <a:t>Если имя метки начинается с точки, метка является </a:t>
-            </a:r>
-            <a:r>
-              <a:rPr lang="ru-RU" sz="2000" b="1" dirty="0"/>
-              <a:t>локальной</a:t>
-            </a:r>
-            <a:r>
-              <a:rPr lang="ru-RU" sz="2000" dirty="0"/>
-              <a:t>.</a:t>
-            </a:r>
-            <a:endParaRPr lang="en-US" sz="2000" dirty="0"/>
-          </a:p>
-          <a:p>
-            <a:pPr marL="0" indent="0">
-              <a:buNone/>
-            </a:pPr>
-            <a:r>
-              <a:rPr lang="ru-RU" sz="2000" dirty="0"/>
-              <a:t>Локальные метки обычно используются в функциях для организации циклов и условных переходов.</a:t>
-            </a:r>
-            <a:endParaRPr lang="en-US" sz="2000" dirty="0"/>
-          </a:p>
-          <a:p>
-            <a:pPr marL="0" indent="0">
-              <a:buNone/>
-            </a:pPr>
-            <a:r>
-              <a:rPr lang="ru-RU" sz="2000" dirty="0"/>
-              <a:t>Полное имя локальной метки: </a:t>
-            </a:r>
-            <a:br>
-              <a:rPr lang="ru-RU" sz="2000" dirty="0"/>
-            </a:br>
-            <a:r>
-              <a:rPr lang="en-US" sz="2000" dirty="0">
-                <a:latin typeface="Courier New" panose="02070309020205020404" pitchFamily="49" charset="0"/>
-                <a:cs typeface="Courier New" panose="02070309020205020404" pitchFamily="49" charset="0"/>
-              </a:rPr>
-              <a:t>&lt;</a:t>
-            </a:r>
-            <a:r>
-              <a:rPr lang="ru-RU" sz="2000" dirty="0">
-                <a:latin typeface="Courier New" panose="02070309020205020404" pitchFamily="49" charset="0"/>
-                <a:cs typeface="Courier New" panose="02070309020205020404" pitchFamily="49" charset="0"/>
-              </a:rPr>
-              <a:t>имя предыдущей обычной метки</a:t>
-            </a:r>
-            <a:r>
-              <a:rPr lang="en-US" sz="2000" dirty="0">
-                <a:latin typeface="Courier New" panose="02070309020205020404" pitchFamily="49" charset="0"/>
-                <a:cs typeface="Courier New" panose="02070309020205020404" pitchFamily="49" charset="0"/>
-              </a:rPr>
-              <a:t>&gt;</a:t>
-            </a:r>
-            <a:r>
-              <a:rPr lang="ru-RU" sz="2000" dirty="0">
-                <a:latin typeface="Courier New" panose="02070309020205020404" pitchFamily="49" charset="0"/>
-                <a:cs typeface="Courier New" panose="02070309020205020404" pitchFamily="49" charset="0"/>
-              </a:rPr>
-              <a:t>.</a:t>
-            </a:r>
-            <a:r>
-              <a:rPr lang="en-US" sz="2000" dirty="0">
-                <a:latin typeface="Courier New" panose="02070309020205020404" pitchFamily="49" charset="0"/>
-                <a:cs typeface="Courier New" panose="02070309020205020404" pitchFamily="49" charset="0"/>
-              </a:rPr>
-              <a:t>&lt;</a:t>
-            </a:r>
-            <a:r>
-              <a:rPr lang="ru-RU" sz="2000" dirty="0">
-                <a:latin typeface="Courier New" panose="02070309020205020404" pitchFamily="49" charset="0"/>
-                <a:cs typeface="Courier New" panose="02070309020205020404" pitchFamily="49" charset="0"/>
-              </a:rPr>
-              <a:t>имя метки</a:t>
-            </a:r>
-            <a:r>
-              <a:rPr lang="en-US" sz="2000" dirty="0">
-                <a:latin typeface="Courier New" panose="02070309020205020404" pitchFamily="49" charset="0"/>
-                <a:cs typeface="Courier New" panose="02070309020205020404" pitchFamily="49" charset="0"/>
-              </a:rPr>
-              <a:t>&gt;</a:t>
-            </a:r>
-            <a:endParaRPr lang="ru-RU" sz="2000" dirty="0">
-              <a:latin typeface="Courier New" panose="02070309020205020404" pitchFamily="49" charset="0"/>
-              <a:cs typeface="Courier New" panose="02070309020205020404" pitchFamily="49" charset="0"/>
-            </a:endParaRPr>
-          </a:p>
-          <a:p>
-            <a:pPr marL="0" indent="0">
-              <a:buNone/>
-            </a:pPr>
-            <a:endParaRPr lang="ru-RU" sz="1400" dirty="0"/>
-          </a:p>
-          <a:p>
-            <a:pPr marL="0" indent="0">
-              <a:buNone/>
-            </a:pPr>
-            <a:r>
-              <a:rPr lang="ru-RU" sz="1400" kern="1200" baseline="30000" dirty="0">
-                <a:solidFill>
-                  <a:srgbClr val="000000"/>
-                </a:solidFill>
-                <a:effectLst/>
-                <a:latin typeface="Calibri" panose="020F0502020204030204" pitchFamily="34" charset="0"/>
-                <a:ea typeface="+mn-ea"/>
-                <a:cs typeface="+mn-cs"/>
-              </a:rPr>
-              <a:t>1</a:t>
-            </a:r>
-            <a:r>
-              <a:rPr lang="ru-RU" sz="1400" dirty="0"/>
-              <a:t>или эквивалентное ему смещение (дистанцию от инструкции до цели, на которую указывает метка).</a:t>
-            </a:r>
-            <a:endParaRPr lang="en-US" sz="1400" dirty="0">
-              <a:latin typeface="Courier New" panose="02070309020205020404" pitchFamily="49" charset="0"/>
-              <a:cs typeface="Courier New" panose="02070309020205020404" pitchFamily="49" charset="0"/>
-            </a:endParaRPr>
-          </a:p>
-        </p:txBody>
-      </p:sp>
-      <p:sp>
-        <p:nvSpPr>
-          <p:cNvPr id="5" name="Номер слайда 4">
-            <a:extLst>
-              <a:ext uri="{FF2B5EF4-FFF2-40B4-BE49-F238E27FC236}">
-                <a16:creationId xmlns:a16="http://schemas.microsoft.com/office/drawing/2014/main" id="{9DB92496-D89E-46CC-BD94-449C7A865604}"/>
-              </a:ext>
-            </a:extLst>
-          </p:cNvPr>
-          <p:cNvSpPr>
-            <a:spLocks noGrp="1"/>
-          </p:cNvSpPr>
-          <p:nvPr>
-            <p:ph type="sldNum" sz="quarter" idx="12"/>
-          </p:nvPr>
-        </p:nvSpPr>
-        <p:spPr/>
-        <p:txBody>
-          <a:bodyPr/>
-          <a:lstStyle/>
-          <a:p>
-            <a:fld id="{B67FBA2B-964F-4C4D-AAF7-5A8399264638}" type="slidenum">
-              <a:rPr lang="en-US" smtClean="0"/>
-              <a:t>17</a:t>
-            </a:fld>
-            <a:endParaRPr lang="en-US" dirty="0"/>
-          </a:p>
-        </p:txBody>
-      </p:sp>
-      <p:sp>
-        <p:nvSpPr>
-          <p:cNvPr id="6" name="TextBox 5">
-            <a:extLst>
-              <a:ext uri="{FF2B5EF4-FFF2-40B4-BE49-F238E27FC236}">
-                <a16:creationId xmlns:a16="http://schemas.microsoft.com/office/drawing/2014/main" id="{8E55AC4F-7E2E-4DB7-8477-91FC371F34A5}"/>
-              </a:ext>
-            </a:extLst>
-          </p:cNvPr>
-          <p:cNvSpPr txBox="1"/>
-          <p:nvPr/>
-        </p:nvSpPr>
-        <p:spPr>
-          <a:xfrm>
-            <a:off x="8505825" y="1028343"/>
-            <a:ext cx="3551296" cy="5078313"/>
-          </a:xfrm>
-          <a:prstGeom prst="rect">
-            <a:avLst/>
-          </a:prstGeom>
-          <a:noFill/>
-        </p:spPr>
-        <p:txBody>
-          <a:bodyPr wrap="square" rtlCol="0">
-            <a:spAutoFit/>
-          </a:bodyPr>
-          <a:lstStyle/>
-          <a:p>
-            <a:r>
-              <a:rPr lang="en-US" dirty="0">
-                <a:effectLst/>
-                <a:latin typeface="Courier New" panose="02070309020205020404" pitchFamily="49" charset="0"/>
-                <a:cs typeface="Courier New" panose="02070309020205020404" pitchFamily="49" charset="0"/>
-              </a:rPr>
-              <a:t>section .data</a:t>
-            </a:r>
-          </a:p>
-          <a:p>
-            <a:r>
-              <a:rPr lang="en-US" dirty="0">
-                <a:effectLst/>
-                <a:latin typeface="Courier New" panose="02070309020205020404" pitchFamily="49" charset="0"/>
-                <a:cs typeface="Courier New" panose="02070309020205020404" pitchFamily="49" charset="0"/>
-              </a:rPr>
-              <a:t>  </a:t>
-            </a:r>
-            <a:r>
-              <a:rPr lang="en-US" b="1" dirty="0">
-                <a:effectLst/>
-                <a:latin typeface="Courier New" panose="02070309020205020404" pitchFamily="49" charset="0"/>
-                <a:cs typeface="Courier New" panose="02070309020205020404" pitchFamily="49" charset="0"/>
-              </a:rPr>
-              <a:t>a: </a:t>
-            </a:r>
-            <a:r>
-              <a:rPr lang="en-US" dirty="0" err="1">
-                <a:effectLst/>
-                <a:latin typeface="Courier New" panose="02070309020205020404" pitchFamily="49" charset="0"/>
-                <a:cs typeface="Courier New" panose="02070309020205020404" pitchFamily="49" charset="0"/>
-              </a:rPr>
-              <a:t>db</a:t>
-            </a:r>
-            <a:r>
-              <a:rPr lang="en-US" dirty="0">
-                <a:effectLst/>
-                <a:latin typeface="Courier New" panose="02070309020205020404" pitchFamily="49" charset="0"/>
-                <a:cs typeface="Courier New" panose="02070309020205020404" pitchFamily="49" charset="0"/>
-              </a:rPr>
-              <a:t> 5</a:t>
-            </a:r>
-          </a:p>
-          <a:p>
-            <a:r>
-              <a:rPr lang="en-US" dirty="0">
-                <a:effectLst/>
-                <a:latin typeface="Courier New" panose="02070309020205020404" pitchFamily="49" charset="0"/>
-                <a:cs typeface="Courier New" panose="02070309020205020404" pitchFamily="49" charset="0"/>
-              </a:rPr>
-              <a:t>  </a:t>
-            </a:r>
-            <a:r>
-              <a:rPr lang="en-US" b="1" dirty="0">
-                <a:effectLst/>
-                <a:latin typeface="Courier New" panose="02070309020205020404" pitchFamily="49" charset="0"/>
-                <a:cs typeface="Courier New" panose="02070309020205020404" pitchFamily="49" charset="0"/>
-              </a:rPr>
-              <a:t>b: </a:t>
-            </a:r>
-            <a:r>
-              <a:rPr lang="en-US" dirty="0" err="1">
-                <a:effectLst/>
-                <a:latin typeface="Courier New" panose="02070309020205020404" pitchFamily="49" charset="0"/>
-                <a:cs typeface="Courier New" panose="02070309020205020404" pitchFamily="49" charset="0"/>
-              </a:rPr>
-              <a:t>dq</a:t>
-            </a:r>
-            <a:r>
-              <a:rPr lang="en-US" dirty="0">
-                <a:effectLst/>
-                <a:latin typeface="Courier New" panose="02070309020205020404" pitchFamily="49" charset="0"/>
-                <a:cs typeface="Courier New" panose="02070309020205020404" pitchFamily="49" charset="0"/>
-              </a:rPr>
-              <a:t> 0xFF</a:t>
-            </a:r>
-          </a:p>
-          <a:p>
-            <a:r>
-              <a:rPr lang="en-US" dirty="0">
-                <a:effectLst/>
-                <a:latin typeface="Courier New" panose="02070309020205020404" pitchFamily="49" charset="0"/>
-                <a:cs typeface="Courier New" panose="02070309020205020404" pitchFamily="49" charset="0"/>
-              </a:rPr>
-              <a:t>  </a:t>
-            </a:r>
-            <a:r>
-              <a:rPr lang="en-US" b="1" dirty="0">
-                <a:effectLst/>
-                <a:latin typeface="Courier New" panose="02070309020205020404" pitchFamily="49" charset="0"/>
-                <a:cs typeface="Courier New" panose="02070309020205020404" pitchFamily="49" charset="0"/>
-              </a:rPr>
-              <a:t>array: </a:t>
-            </a:r>
-            <a:r>
-              <a:rPr lang="en-US" dirty="0">
-                <a:effectLst/>
-                <a:latin typeface="Courier New" panose="02070309020205020404" pitchFamily="49" charset="0"/>
-                <a:cs typeface="Courier New" panose="02070309020205020404" pitchFamily="49" charset="0"/>
-              </a:rPr>
-              <a:t>times 16 </a:t>
-            </a:r>
-            <a:r>
-              <a:rPr lang="en-US" dirty="0" err="1">
-                <a:effectLst/>
-                <a:latin typeface="Courier New" panose="02070309020205020404" pitchFamily="49" charset="0"/>
-                <a:cs typeface="Courier New" panose="02070309020205020404" pitchFamily="49" charset="0"/>
-              </a:rPr>
-              <a:t>db</a:t>
-            </a:r>
-            <a:r>
-              <a:rPr lang="en-US" dirty="0">
-                <a:effectLst/>
-                <a:latin typeface="Courier New" panose="02070309020205020404" pitchFamily="49" charset="0"/>
-                <a:cs typeface="Courier New" panose="02070309020205020404" pitchFamily="49" charset="0"/>
-              </a:rPr>
-              <a:t> 0</a:t>
-            </a:r>
-          </a:p>
-          <a:p>
-            <a:endParaRPr lang="en-US" dirty="0">
-              <a:effectLst/>
-              <a:latin typeface="Courier New" panose="02070309020205020404" pitchFamily="49" charset="0"/>
-              <a:cs typeface="Courier New" panose="02070309020205020404" pitchFamily="49" charset="0"/>
-            </a:endParaRPr>
-          </a:p>
-          <a:p>
-            <a:r>
-              <a:rPr lang="en-US" dirty="0">
-                <a:effectLst/>
-                <a:latin typeface="Courier New" panose="02070309020205020404" pitchFamily="49" charset="0"/>
-                <a:cs typeface="Courier New" panose="02070309020205020404" pitchFamily="49" charset="0"/>
-              </a:rPr>
-              <a:t>section .</a:t>
-            </a:r>
-            <a:r>
-              <a:rPr lang="en-US" dirty="0" err="1">
-                <a:effectLst/>
-                <a:latin typeface="Courier New" panose="02070309020205020404" pitchFamily="49" charset="0"/>
-                <a:cs typeface="Courier New" panose="02070309020205020404" pitchFamily="49" charset="0"/>
-              </a:rPr>
-              <a:t>rodata</a:t>
-            </a:r>
-            <a:endParaRPr lang="en-US" dirty="0">
-              <a:effectLst/>
-              <a:latin typeface="Courier New" panose="02070309020205020404" pitchFamily="49" charset="0"/>
-              <a:cs typeface="Courier New" panose="02070309020205020404" pitchFamily="49" charset="0"/>
-            </a:endParaRPr>
-          </a:p>
-          <a:p>
-            <a:r>
-              <a:rPr lang="en-US" dirty="0">
-                <a:effectLst/>
-                <a:latin typeface="Courier New" panose="02070309020205020404" pitchFamily="49" charset="0"/>
-                <a:cs typeface="Courier New" panose="02070309020205020404" pitchFamily="49" charset="0"/>
-              </a:rPr>
-              <a:t>  </a:t>
-            </a:r>
-            <a:r>
-              <a:rPr lang="en-US" b="1" dirty="0">
-                <a:effectLst/>
-                <a:latin typeface="Courier New" panose="02070309020205020404" pitchFamily="49" charset="0"/>
-                <a:cs typeface="Courier New" panose="02070309020205020404" pitchFamily="49" charset="0"/>
-              </a:rPr>
-              <a:t>const: </a:t>
-            </a:r>
-            <a:r>
-              <a:rPr lang="en-US" dirty="0" err="1">
-                <a:effectLst/>
-                <a:latin typeface="Courier New" panose="02070309020205020404" pitchFamily="49" charset="0"/>
-                <a:cs typeface="Courier New" panose="02070309020205020404" pitchFamily="49" charset="0"/>
-              </a:rPr>
-              <a:t>db</a:t>
-            </a:r>
-            <a:r>
-              <a:rPr lang="en-US" dirty="0">
-                <a:effectLst/>
-                <a:latin typeface="Courier New" panose="02070309020205020404" pitchFamily="49" charset="0"/>
-                <a:cs typeface="Courier New" panose="02070309020205020404" pitchFamily="49" charset="0"/>
-              </a:rPr>
-              <a:t> 7</a:t>
-            </a:r>
-            <a:br>
-              <a:rPr lang="en-US" dirty="0">
-                <a:effectLst/>
-                <a:latin typeface="Courier New" panose="02070309020205020404" pitchFamily="49" charset="0"/>
-                <a:cs typeface="Courier New" panose="02070309020205020404" pitchFamily="49" charset="0"/>
-              </a:rPr>
-            </a:br>
-            <a:endParaRPr lang="en-US" dirty="0">
-              <a:effectLst/>
-              <a:latin typeface="Courier New" panose="02070309020205020404" pitchFamily="49" charset="0"/>
-              <a:cs typeface="Courier New" panose="02070309020205020404" pitchFamily="49" charset="0"/>
-            </a:endParaRPr>
-          </a:p>
-          <a:p>
-            <a:r>
-              <a:rPr lang="en-US" dirty="0">
-                <a:effectLst/>
-                <a:latin typeface="Courier New" panose="02070309020205020404" pitchFamily="49" charset="0"/>
-                <a:cs typeface="Courier New" panose="02070309020205020404" pitchFamily="49" charset="0"/>
-              </a:rPr>
-              <a:t>section .</a:t>
-            </a:r>
-            <a:r>
-              <a:rPr lang="en-US" dirty="0" err="1">
-                <a:effectLst/>
-                <a:latin typeface="Courier New" panose="02070309020205020404" pitchFamily="49" charset="0"/>
-                <a:cs typeface="Courier New" panose="02070309020205020404" pitchFamily="49" charset="0"/>
-              </a:rPr>
-              <a:t>bss</a:t>
-            </a:r>
-            <a:endParaRPr lang="en-US" dirty="0">
-              <a:effectLst/>
-              <a:latin typeface="Courier New" panose="02070309020205020404" pitchFamily="49" charset="0"/>
-              <a:cs typeface="Courier New" panose="02070309020205020404" pitchFamily="49" charset="0"/>
-            </a:endParaRPr>
-          </a:p>
-          <a:p>
-            <a:r>
-              <a:rPr lang="en-US" dirty="0">
-                <a:effectLst/>
-                <a:latin typeface="Courier New" panose="02070309020205020404" pitchFamily="49" charset="0"/>
-                <a:cs typeface="Courier New" panose="02070309020205020404" pitchFamily="49" charset="0"/>
-              </a:rPr>
-              <a:t>  </a:t>
-            </a:r>
-            <a:r>
-              <a:rPr lang="en-US" b="1" dirty="0">
-                <a:effectLst/>
-                <a:latin typeface="Courier New" panose="02070309020205020404" pitchFamily="49" charset="0"/>
-                <a:cs typeface="Courier New" panose="02070309020205020404" pitchFamily="49" charset="0"/>
-              </a:rPr>
-              <a:t>c: </a:t>
-            </a:r>
-            <a:r>
-              <a:rPr lang="en-US" dirty="0">
-                <a:effectLst/>
-                <a:latin typeface="Courier New" panose="02070309020205020404" pitchFamily="49" charset="0"/>
-                <a:cs typeface="Courier New" panose="02070309020205020404" pitchFamily="49" charset="0"/>
-              </a:rPr>
-              <a:t>resq 1 </a:t>
-            </a:r>
-          </a:p>
-          <a:p>
-            <a:endParaRPr lang="en-US" dirty="0">
-              <a:effectLst/>
-              <a:latin typeface="Courier New" panose="02070309020205020404" pitchFamily="49" charset="0"/>
-              <a:cs typeface="Courier New" panose="02070309020205020404" pitchFamily="49" charset="0"/>
-            </a:endParaRPr>
-          </a:p>
-          <a:p>
-            <a:r>
-              <a:rPr lang="en-US" dirty="0">
-                <a:effectLst/>
-                <a:latin typeface="Courier New" panose="02070309020205020404" pitchFamily="49" charset="0"/>
-                <a:cs typeface="Courier New" panose="02070309020205020404" pitchFamily="49" charset="0"/>
-              </a:rPr>
-              <a:t>section .text</a:t>
-            </a:r>
-          </a:p>
-          <a:p>
-            <a:r>
-              <a:rPr lang="en-US" dirty="0">
-                <a:effectLst/>
-                <a:latin typeface="Courier New" panose="02070309020205020404" pitchFamily="49" charset="0"/>
-                <a:cs typeface="Courier New" panose="02070309020205020404" pitchFamily="49" charset="0"/>
-              </a:rPr>
-              <a:t>  global main</a:t>
-            </a:r>
-          </a:p>
-          <a:p>
-            <a:endParaRPr lang="en-US" dirty="0">
-              <a:effectLst/>
-              <a:latin typeface="Courier New" panose="02070309020205020404" pitchFamily="49" charset="0"/>
-              <a:cs typeface="Courier New" panose="02070309020205020404" pitchFamily="49" charset="0"/>
-            </a:endParaRPr>
-          </a:p>
-          <a:p>
-            <a:r>
-              <a:rPr lang="en-US" b="1" dirty="0">
-                <a:effectLst/>
-                <a:latin typeface="Courier New" panose="02070309020205020404" pitchFamily="49" charset="0"/>
-                <a:cs typeface="Courier New" panose="02070309020205020404" pitchFamily="49" charset="0"/>
-              </a:rPr>
-              <a:t>main:</a:t>
-            </a:r>
-          </a:p>
-          <a:p>
-            <a:r>
-              <a:rPr lang="en-US" dirty="0">
-                <a:effectLst/>
-                <a:latin typeface="Courier New" panose="02070309020205020404" pitchFamily="49" charset="0"/>
-                <a:cs typeface="Courier New" panose="02070309020205020404" pitchFamily="49" charset="0"/>
-              </a:rPr>
-              <a:t>  </a:t>
-            </a:r>
-            <a:r>
-              <a:rPr lang="en-US" dirty="0" err="1">
-                <a:effectLst/>
-                <a:latin typeface="Courier New" panose="02070309020205020404" pitchFamily="49" charset="0"/>
-                <a:cs typeface="Courier New" panose="02070309020205020404" pitchFamily="49" charset="0"/>
-              </a:rPr>
-              <a:t>xor</a:t>
-            </a:r>
-            <a:r>
-              <a:rPr lang="en-US" dirty="0">
-                <a:effectLst/>
-                <a:latin typeface="Courier New" panose="02070309020205020404" pitchFamily="49" charset="0"/>
-                <a:cs typeface="Courier New" panose="02070309020205020404" pitchFamily="49" charset="0"/>
-              </a:rPr>
-              <a:t> </a:t>
-            </a:r>
-            <a:r>
-              <a:rPr lang="en-US" dirty="0" err="1">
-                <a:effectLst/>
-                <a:latin typeface="Courier New" panose="02070309020205020404" pitchFamily="49" charset="0"/>
-                <a:cs typeface="Courier New" panose="02070309020205020404" pitchFamily="49" charset="0"/>
-              </a:rPr>
-              <a:t>rax</a:t>
-            </a:r>
-            <a:r>
-              <a:rPr lang="en-US" dirty="0">
-                <a:effectLst/>
-                <a:latin typeface="Courier New" panose="02070309020205020404" pitchFamily="49" charset="0"/>
-                <a:cs typeface="Courier New" panose="02070309020205020404" pitchFamily="49" charset="0"/>
-              </a:rPr>
-              <a:t>, </a:t>
-            </a:r>
-            <a:r>
-              <a:rPr lang="en-US" dirty="0" err="1">
-                <a:effectLst/>
-                <a:latin typeface="Courier New" panose="02070309020205020404" pitchFamily="49" charset="0"/>
-                <a:cs typeface="Courier New" panose="02070309020205020404" pitchFamily="49" charset="0"/>
-              </a:rPr>
-              <a:t>rax</a:t>
-            </a:r>
-            <a:endParaRPr lang="ru-RU" dirty="0">
-              <a:effectLst/>
-              <a:latin typeface="Courier New" panose="02070309020205020404" pitchFamily="49" charset="0"/>
-              <a:cs typeface="Courier New" panose="02070309020205020404" pitchFamily="49" charset="0"/>
-            </a:endParaRPr>
-          </a:p>
-          <a:p>
-            <a:r>
-              <a:rPr lang="en-US" b="1" dirty="0">
-                <a:effectLst/>
-                <a:latin typeface="Courier New" panose="02070309020205020404" pitchFamily="49" charset="0"/>
-                <a:cs typeface="Courier New" panose="02070309020205020404" pitchFamily="49" charset="0"/>
-              </a:rPr>
-              <a:t>.ret:</a:t>
-            </a:r>
-          </a:p>
-          <a:p>
-            <a:r>
-              <a:rPr lang="en-US" dirty="0">
-                <a:effectLst/>
-                <a:latin typeface="Courier New" panose="02070309020205020404" pitchFamily="49" charset="0"/>
-                <a:cs typeface="Courier New" panose="02070309020205020404" pitchFamily="49" charset="0"/>
-              </a:rPr>
-              <a:t>  ret</a:t>
-            </a:r>
-            <a:endParaRPr lang="en-US" dirty="0">
-              <a:latin typeface="Courier New" panose="02070309020205020404" pitchFamily="49" charset="0"/>
-              <a:cs typeface="Courier New" panose="02070309020205020404" pitchFamily="49" charset="0"/>
-            </a:endParaRPr>
-          </a:p>
-        </p:txBody>
-      </p:sp>
-    </p:spTree>
-    <p:extLst>
-      <p:ext uri="{BB962C8B-B14F-4D97-AF65-F5344CB8AC3E}">
-        <p14:creationId xmlns:p14="http://schemas.microsoft.com/office/powerpoint/2010/main" val="1291004724"/>
       </p:ext>
     </p:extLst>
   </p:cSld>
@@ -15083,7 +15761,7 @@
           <a:p>
             <a:r>
               <a:rPr lang="ru-RU" dirty="0"/>
-              <a:t>Синтаксис </a:t>
+              <a:t>Инструкции. Синтаксис </a:t>
             </a:r>
             <a:r>
               <a:rPr lang="en-US" dirty="0"/>
@@ -15225,24 +15903,6 @@
             </a:pPr>
             <a:endParaRPr lang="ru-RU" sz="2000" b="1" dirty="0"/>
           </a:p>
-          <a:p>
-            <a:pPr marL="0" indent="0">
-              <a:buNone/>
-            </a:pPr>
-            <a:r>
-              <a:rPr lang="ru-RU" sz="2000" b="1" dirty="0"/>
-              <a:t>Д/З: </a:t>
-            </a:r>
-            <a:r>
-              <a:rPr lang="ru-RU" sz="2000" dirty="0"/>
-              <a:t>синтаксис </a:t>
-            </a:r>
-            <a:r>
-              <a:rPr lang="en-US" sz="2000" dirty="0"/>
-              <a:t>AT&amp;T</a:t>
-            </a:r>
-            <a:endParaRPr lang="ru-RU" sz="2000" dirty="0"/>
-          </a:p>
         </p:txBody>
       </p:sp>
       <p:sp>
@@ -15289,14 +15949,14 @@
           <p:nvPr>
             <p:extLst>
               <p:ext uri="{D42A27DB-BD31-4B8C-83A1-F6EECF244321}">
-                <p14:modId xmlns:p14="http://schemas.microsoft.com/office/powerpoint/2010/main" val="4094929765"/>
+                <p14:modId xmlns:p14="http://schemas.microsoft.com/office/powerpoint/2010/main" val="4169875910"/>
               </p:ext>
             </p:extLst>
           </p:nvPr>
         </p:nvGraphicFramePr>
         <p:xfrm>
           <a:off x="1616115" y="2108730"/>
-          <a:ext cx="9084057" cy="3992880"/>
+          <a:ext cx="9084057" cy="4389120"/>
         </p:xfrm>
         <a:graphic>
           <a:graphicData uri="http://schemas.openxmlformats.org/drawingml/2006/table">
@@ -15724,6 +16384,13 @@
                         <a:defRPr/>
                       </a:pPr>
                       <a:r>
+                        <a:rPr lang="en-US" sz="2000" dirty="0">
+                          <a:latin typeface="Courier New" panose="02070309020205020404" pitchFamily="49" charset="0"/>
+                          <a:cs typeface="Courier New" panose="02070309020205020404" pitchFamily="49" charset="0"/>
+                        </a:rPr>
+                        <a:t> </a:t>
+                      </a:r>
+                      <a:r>
                         <a:rPr lang="en-US" sz="2000" dirty="0" err="1">
                           <a:latin typeface="Courier New" panose="02070309020205020404" pitchFamily="49" charset="0"/>
                           <a:cs typeface="Courier New" panose="02070309020205020404" pitchFamily="49" charset="0"/>
@@ -15814,6 +16481,13 @@
                         <a:defRPr/>
                       </a:pPr>
                       <a:r>
+                        <a:rPr lang="en-US" sz="2000" dirty="0">
+                          <a:latin typeface="Courier New" panose="02070309020205020404" pitchFamily="49" charset="0"/>
+                          <a:cs typeface="Courier New" panose="02070309020205020404" pitchFamily="49" charset="0"/>
+                        </a:rPr>
+                        <a:t> </a:t>
+                      </a:r>
+                      <a:r>
                         <a:rPr lang="en-US" sz="2000" dirty="0" err="1">
                           <a:latin typeface="Courier New" panose="02070309020205020404" pitchFamily="49" charset="0"/>
                           <a:cs typeface="Courier New" panose="02070309020205020404" pitchFamily="49" charset="0"/>
@@ -15921,6 +16595,13 @@
                         <a:defRPr/>
                       </a:pPr>
                       <a:r>
+                        <a:rPr lang="en-US" sz="2000" dirty="0">
+                          <a:latin typeface="Courier New" panose="02070309020205020404" pitchFamily="49" charset="0"/>
+                          <a:cs typeface="Courier New" panose="02070309020205020404" pitchFamily="49" charset="0"/>
+                        </a:rPr>
+                        <a:t> </a:t>
+                      </a:r>
+                      <a:r>
                         <a:rPr lang="en-US" sz="2000" dirty="0" err="1">
                           <a:latin typeface="Courier New" panose="02070309020205020404" pitchFamily="49" charset="0"/>
                           <a:cs typeface="Courier New" panose="02070309020205020404" pitchFamily="49" charset="0"/>
@@ -16011,6 +16692,133 @@
                         <a:defRPr/>
                       </a:pPr>
                       <a:r>
+                        <a:rPr lang="en-US" sz="2000" dirty="0">
+                          <a:latin typeface="Courier New" panose="02070309020205020404" pitchFamily="49" charset="0"/>
+                          <a:cs typeface="Courier New" panose="02070309020205020404" pitchFamily="49" charset="0"/>
+                        </a:rPr>
+                        <a:t>mov</a:t>
+                      </a:r>
+                    </a:p>
+                  </a:txBody>
+                  <a:tcPr/>
+                </a:tc>
+                <a:tc>
+                  <a:txBody>
+                    <a:bodyPr/>
+                    <a:lstStyle/>
+                    <a:p>
+                      <a:pPr marL="0" marR="0" lvl="0" indent="0" algn="l" defTabSz="914400" rtl="0" eaLnBrk="1" fontAlgn="auto" latinLnBrk="0" hangingPunct="1">
+                        <a:lnSpc>
+                          <a:spcPct val="100000"/>
+                        </a:lnSpc>
+                        <a:spcBef>
+                          <a:spcPts val="0"/>
+                        </a:spcBef>
+                        <a:spcAft>
+                          <a:spcPts val="0"/>
+                        </a:spcAft>
+                        <a:buClrTx/>
+                        <a:buSzTx/>
+                        <a:buFontTx/>
+                        <a:buNone/>
+                        <a:tabLst/>
+                        <a:defRPr/>
+                      </a:pPr>
+                      <a:r>
+                        <a:rPr lang="en-US" sz="2000" dirty="0">
+                          <a:latin typeface="Courier New" panose="02070309020205020404" pitchFamily="49" charset="0"/>
+                          <a:cs typeface="Courier New" panose="02070309020205020404" pitchFamily="49" charset="0"/>
+                        </a:rPr>
+                        <a:t>[</a:t>
+                      </a:r>
+                      <a:r>
+                        <a:rPr lang="en-US" sz="2000" dirty="0" err="1">
+                          <a:latin typeface="Courier New" panose="02070309020205020404" pitchFamily="49" charset="0"/>
+                          <a:cs typeface="Courier New" panose="02070309020205020404" pitchFamily="49" charset="0"/>
+                        </a:rPr>
+                        <a:t>rax</a:t>
+                      </a:r>
+                      <a:r>
+                        <a:rPr lang="en-US" sz="2000" dirty="0">
+                          <a:latin typeface="Courier New" panose="02070309020205020404" pitchFamily="49" charset="0"/>
+                          <a:cs typeface="Courier New" panose="02070309020205020404" pitchFamily="49" charset="0"/>
+                        </a:rPr>
+                        <a:t>],</a:t>
+                      </a:r>
+                      <a:r>
+                        <a:rPr lang="en-US" sz="2000" dirty="0" err="1">
+                          <a:latin typeface="Courier New" panose="02070309020205020404" pitchFamily="49" charset="0"/>
+                          <a:cs typeface="Courier New" panose="02070309020205020404" pitchFamily="49" charset="0"/>
+                        </a:rPr>
+                        <a:t>rcx</a:t>
+                      </a:r>
+                      <a:endParaRPr lang="en-US" sz="2000" dirty="0">
+                        <a:latin typeface="Courier New" panose="02070309020205020404" pitchFamily="49" charset="0"/>
+                        <a:cs typeface="Courier New" panose="02070309020205020404" pitchFamily="49" charset="0"/>
+                      </a:endParaRPr>
+                    </a:p>
+                  </a:txBody>
+                  <a:tcPr/>
+                </a:tc>
+                <a:tc>
+                  <a:txBody>
+                    <a:bodyPr/>
+                    <a:lstStyle/>
+                    <a:p>
+                      <a:r>
+                        <a:rPr lang="en-US" sz="2000" dirty="0"/>
+                        <a:t>*</a:t>
+                      </a:r>
+                      <a:r>
+                        <a:rPr lang="ru-RU" sz="2000" dirty="0"/>
+                        <a:t>(</a:t>
+                      </a:r>
+                      <a:r>
+                        <a:rPr lang="en-US" sz="2000" dirty="0"/>
+                        <a:t>qword*</a:t>
+                      </a:r>
+                      <a:r>
+                        <a:rPr lang="ru-RU" sz="2000" dirty="0"/>
+                        <a:t>)</a:t>
+                      </a:r>
+                      <a:r>
+                        <a:rPr lang="en-US" sz="2000" dirty="0"/>
+                        <a:t>RBX=RCX</a:t>
+                      </a:r>
+                    </a:p>
+                  </a:txBody>
+                  <a:tcPr/>
+                </a:tc>
+                <a:extLst>
+                  <a:ext uri="{0D108BD9-81ED-4DB2-BD59-A6C34878D82A}">
+                    <a16:rowId xmlns:a16="http://schemas.microsoft.com/office/drawing/2014/main" val="1273933702"/>
+                  </a:ext>
+                </a:extLst>
+              </a:tr>
+              <a:tr h="370840">
+                <a:tc>
+                  <a:txBody>
+                    <a:bodyPr/>
+                    <a:lstStyle/>
+                    <a:p>
+                      <a:pPr marL="0" marR="0" lvl="0" indent="0" algn="r" defTabSz="914400" rtl="0" eaLnBrk="1" fontAlgn="auto" latinLnBrk="0" hangingPunct="1">
+                        <a:lnSpc>
+                          <a:spcPct val="100000"/>
+                        </a:lnSpc>
+                        <a:spcBef>
+                          <a:spcPts val="0"/>
+                        </a:spcBef>
+                        <a:spcAft>
+                          <a:spcPts val="0"/>
+                        </a:spcAft>
+                        <a:buClrTx/>
+                        <a:buSzTx/>
+                        <a:buFontTx/>
+                        <a:buNone/>
+                        <a:tabLst/>
+                        <a:defRPr/>
+                      </a:pPr>
+                      <a:r>
                         <a:rPr lang="en-US" sz="2000" b="0" kern="1200" dirty="0" err="1">
                           <a:solidFill>
                             <a:schemeClr val="tx1"/>
@@ -16068,6 +16876,53 @@
           </a:graphicData>
         </a:graphic>
       </p:graphicFrame>
+      <p:sp>
+        <p:nvSpPr>
+          <p:cNvPr id="7" name="TextBox 6">
+            <a:extLst>
+              <a:ext uri="{FF2B5EF4-FFF2-40B4-BE49-F238E27FC236}">
+                <a16:creationId xmlns:a16="http://schemas.microsoft.com/office/drawing/2014/main" id="{792CE0CD-7277-785C-5248-E78CC58FDB2F}"/>
+              </a:ext>
+            </a:extLst>
+          </p:cNvPr>
+          <p:cNvSpPr txBox="1"/>
+          <p:nvPr/>
+        </p:nvSpPr>
+        <p:spPr>
+          <a:xfrm>
+            <a:off x="110973" y="6484076"/>
+            <a:ext cx="6096000" cy="369332"/>
+          </a:xfrm>
+          <a:prstGeom prst="rect">
+            <a:avLst/>
+          </a:prstGeom>
+          <a:noFill/>
+        </p:spPr>
+        <p:txBody>
+          <a:bodyPr wrap="square">
+            <a:spAutoFit/>
+          </a:bodyPr>
+          <a:lstStyle/>
+          <a:p>
+            <a:pPr marL="0" indent="0">
+              <a:buNone/>
+            </a:pPr>
+            <a:r>
+              <a:rPr lang="ru-RU" sz="1800" b="1" dirty="0"/>
+              <a:t>Д/З: </a:t>
+            </a:r>
+            <a:r>
+              <a:rPr lang="ru-RU" sz="1800" dirty="0"/>
+              <a:t>синтаксис </a:t>
+            </a:r>
+            <a:r>
+              <a:rPr lang="en-US" sz="1800" dirty="0"/>
+              <a:t>AT&amp;T</a:t>
+            </a:r>
+            <a:endParaRPr lang="ru-RU" sz="1800" dirty="0"/>
+          </a:p>
+        </p:txBody>
+      </p:sp>
     </p:spTree>
     <p:extLst>
       <p:ext uri="{BB962C8B-B14F-4D97-AF65-F5344CB8AC3E}">
@@ -16174,8 +17029,8 @@
         </p:nvSpPr>
         <p:spPr>
           <a:xfrm>
-            <a:off x="838200" y="1825625"/>
-            <a:ext cx="9865242" cy="4351338"/>
+            <a:off x="838200" y="1403684"/>
+            <a:ext cx="9865242" cy="4773279"/>
           </a:xfrm>
         </p:spPr>
         <p:txBody>
@@ -16190,6 +17045,32 @@
             <a:r>
               <a:rPr lang="ru-RU" sz="2000" dirty="0"/>
               <a:t>В рамках предмета рассматриваются различные аспекты выполнения программ центральным процессором.  </a:t>
+            </a:r>
+          </a:p>
+          <a:p>
+            <a:pPr marL="0" indent="0">
+              <a:buNone/>
+            </a:pPr>
+            <a:r>
+              <a:rPr lang="ru-RU" sz="2000" dirty="0"/>
+              <a:t>Объем курса:</a:t>
+            </a:r>
+          </a:p>
+          <a:p>
+            <a:pPr marL="0" indent="0">
+              <a:buNone/>
+            </a:pPr>
+            <a:r>
+              <a:rPr lang="ru-RU" sz="2000" dirty="0"/>
+              <a:t>        12 лекций, </a:t>
+            </a:r>
+            <a:r>
+              <a:rPr lang="ru-RU" sz="2000" u="sng" dirty="0"/>
+              <a:t>5 л/р</a:t>
+            </a:r>
+            <a:r>
+              <a:rPr lang="ru-RU" sz="2000" dirty="0"/>
+              <a:t>.</a:t>
             </a:r>
           </a:p>
           <a:p>
@@ -28677,7 +29558,7 @@
         <p:spPr>
           <a:xfrm>
             <a:off x="359229" y="2275379"/>
-            <a:ext cx="4643845" cy="2862322"/>
+            <a:ext cx="4643845" cy="3170099"/>
           </a:xfrm>
           <a:prstGeom prst="rect">
             <a:avLst/>
@@ -28691,20 +29572,20 @@
           <a:lstStyle/>
           <a:p>
             <a:r>
-              <a:rPr lang="ru-RU" dirty="0"/>
+              <a:rPr lang="ru-RU" sz="2000" dirty="0"/>
               <a:t>Инструкции предназначены для корректного расширения числа в представление </a:t>
             </a:r>
             <a:r>
-              <a:rPr lang="ru-RU" i="1" dirty="0"/>
+              <a:rPr lang="ru-RU" sz="2000" i="1" dirty="0"/>
               <a:t>большей</a:t>
             </a:r>
             <a:r>
-              <a:rPr lang="ru-RU" dirty="0"/>
+              <a:rPr lang="ru-RU" sz="2000" dirty="0"/>
               <a:t> разрядности.</a:t>
             </a:r>
           </a:p>
           <a:p>
-            <a:endParaRPr lang="ru-RU" dirty="0"/>
+            <a:endParaRPr lang="ru-RU" sz="2000" dirty="0"/>
           </a:p>
           <a:p>
             <a:pPr marL="285750" indent="-285750">
@@ -28712,18 +29593,18 @@
               <a:buChar char="•"/>
             </a:pPr>
             <a:r>
-              <a:rPr lang="en-US" dirty="0" err="1">
+              <a:rPr lang="en-US" sz="2000" dirty="0" err="1">
                 <a:latin typeface="Courier New" panose="02070309020205020404" pitchFamily="49" charset="0"/>
                 <a:cs typeface="Courier New" panose="02070309020205020404" pitchFamily="49" charset="0"/>
               </a:rPr>
               <a:t>movSx</a:t>
             </a:r>
             <a:r>
-              <a:rPr lang="en-US" dirty="0"/>
+              <a:rPr lang="en-US" sz="2000" dirty="0"/>
               <a:t> </a:t>
             </a:r>
             <a:r>
-              <a:rPr lang="ru-RU" dirty="0"/>
+              <a:rPr lang="ru-RU" sz="2000" dirty="0"/>
               <a:t>– расширение числа с учетом знака.</a:t>
             </a:r>
           </a:p>
@@ -28733,22 +29614,22 @@
               <a:buChar char="•"/>
             </a:pPr>
             <a:r>
-              <a:rPr lang="en-US" dirty="0" err="1">
+              <a:rPr lang="en-US" sz="2000" dirty="0" err="1">
                 <a:latin typeface="Courier New" panose="02070309020205020404" pitchFamily="49" charset="0"/>
                 <a:cs typeface="Courier New" panose="02070309020205020404" pitchFamily="49" charset="0"/>
               </a:rPr>
               <a:t>movZx</a:t>
             </a:r>
             <a:r>
-              <a:rPr lang="en-US" dirty="0"/>
+              <a:rPr lang="en-US" sz="2000" dirty="0"/>
               <a:t> – </a:t>
             </a:r>
             <a:r>
-              <a:rPr lang="ru-RU" dirty="0"/>
+              <a:rPr lang="ru-RU" sz="2000" dirty="0"/>
               <a:t>расширение числа без учета знака</a:t>
             </a:r>
             <a:r>
-              <a:rPr lang="en-US" dirty="0"/>
+              <a:rPr lang="en-US" sz="2000" dirty="0"/>
               <a:t>.</a:t>
             </a:r>
           </a:p>
@@ -28758,10 +29639,10 @@
               <a:buChar char="•"/>
             </a:pPr>
             <a:r>
-              <a:rPr lang="ru-RU" dirty="0"/>
+              <a:rPr lang="ru-RU" sz="2000" dirty="0"/>
               <a:t>если операнд – адресное выражение, то указание размера обязательно.</a:t>
             </a:r>
-            <a:endParaRPr lang="en-US" dirty="0"/>
+            <a:endParaRPr lang="en-US" sz="2000" dirty="0"/>
           </a:p>
         </p:txBody>
       </p:sp>
@@ -28930,7 +29811,7 @@
             </a:r>
             <a:r>
               <a:rPr lang="ru-RU" sz="2000" dirty="0"/>
-              <a:t> Д. Профессиональное программирование на ассемблере x64 с расширениями AVX, AVX2 и AVX-512</a:t>
+              <a:t> Д. Профессиональное программирование на ассемблере x64 с расширениями 	AVX, AVX2 и AVX-512</a:t>
             </a:r>
           </a:p>
           <a:p>
@@ -30932,12 +31813,16 @@
               <a:t>указывает на </a:t>
             </a:r>
             <a:r>
+              <a:rPr lang="ru-RU" sz="2000" i="1" dirty="0" err="1"/>
+              <a:t>инструкци</a:t>
+            </a:r>
+            <a:r>
               <a:rPr lang="ru-RU" sz="2000" i="1" dirty="0"/>
-              <a:t>следующую</a:t>
+              <a:t>, которая будет выполнена следующей</a:t>
             </a:r>
             <a:r>
               <a:rPr lang="ru-RU" sz="2000" dirty="0"/>
-              <a:t> инструкцию, которая будет выполнена. Значение </a:t>
+              <a:t>. Значение </a:t>
             </a:r>
             <a:r>
               <a:rPr lang="en-US" sz="2000" dirty="0"/>
@@ -30965,8 +31850,26 @@
               <a:t>(и тем самым изменить порядок выполнения программы) можно только специальными инструкциями (</a:t>
             </a:r>
             <a:r>
+              <a:rPr lang="en-US" sz="2000" dirty="0">
+                <a:latin typeface="Courier New" panose="02070309020205020404" pitchFamily="49" charset="0"/>
+                <a:cs typeface="Courier New" panose="02070309020205020404" pitchFamily="49" charset="0"/>
+              </a:rPr>
+              <a:t>call</a:t>
+            </a:r>
+            <a:r>
               <a:rPr lang="en-US" sz="2000" dirty="0"/>
-              <a:t>call, ret, </a:t>
+              <a:t>, </a:t>
+            </a:r>
+            <a:r>
+              <a:rPr lang="en-US" sz="2000" dirty="0">
+                <a:latin typeface="Courier New" panose="02070309020205020404" pitchFamily="49" charset="0"/>
+                <a:cs typeface="Courier New" panose="02070309020205020404" pitchFamily="49" charset="0"/>
+              </a:rPr>
+              <a:t>ret</a:t>
+            </a:r>
+            <a:r>
+              <a:rPr lang="en-US" sz="2000" dirty="0"/>
+              <a:t>, </a:t>
             </a:r>
             <a:r>
               <a:rPr lang="ru-RU" sz="2000" dirty="0"/>
@@ -31949,6 +32852,99 @@
           </a:p>
         </p:txBody>
       </p:sp>
+      <p:cxnSp>
+        <p:nvCxnSpPr>
+          <p:cNvPr id="12" name="Прямая со стрелкой 3">
+            <a:extLst>
+              <a:ext uri="{FF2B5EF4-FFF2-40B4-BE49-F238E27FC236}">
+                <a16:creationId xmlns:a16="http://schemas.microsoft.com/office/drawing/2014/main" id="{A281518D-81D3-34EB-C779-A6A0209973AD}"/>
+              </a:ext>
+            </a:extLst>
+          </p:cNvPr>
+          <p:cNvCxnSpPr/>
+          <p:nvPr/>
+        </p:nvCxnSpPr>
+        <p:spPr>
+          <a:xfrm>
+            <a:off x="7756071" y="3429000"/>
+            <a:ext cx="699654" cy="0"/>
+          </a:xfrm>
+          <a:prstGeom prst="straightConnector1">
+            <a:avLst/>
+          </a:prstGeom>
+          <a:ln>
+            <a:solidFill>
+              <a:schemeClr val="bg2"/>
+            </a:solidFill>
+            <a:tailEnd type="triangle"/>
+          </a:ln>
+        </p:spPr>
+        <p:style>
+          <a:lnRef idx="1">
+            <a:schemeClr val="dk1"/>
+          </a:lnRef>
+          <a:fillRef idx="0">
+            <a:schemeClr val="dk1"/>
+          </a:fillRef>
+          <a:effectRef idx="0">
+            <a:schemeClr val="dk1"/>
+          </a:effectRef>
+          <a:fontRef idx="minor">
+            <a:schemeClr val="tx1"/>
+          </a:fontRef>
+        </p:style>
+      </p:cxnSp>
+      <p:sp>
+        <p:nvSpPr>
+          <p:cNvPr id="13" name="TextBox 12">
+            <a:extLst>
+              <a:ext uri="{FF2B5EF4-FFF2-40B4-BE49-F238E27FC236}">
+                <a16:creationId xmlns:a16="http://schemas.microsoft.com/office/drawing/2014/main" id="{0D0D52FA-2A87-2C46-B08B-7C1F7F78E8FD}"/>
+              </a:ext>
+            </a:extLst>
+          </p:cNvPr>
+          <p:cNvSpPr txBox="1"/>
+          <p:nvPr/>
+        </p:nvSpPr>
+        <p:spPr>
+          <a:xfrm>
+            <a:off x="7687970" y="3138054"/>
+            <a:ext cx="486030" cy="369332"/>
+          </a:xfrm>
+          <a:prstGeom prst="rect">
+            <a:avLst/>
+          </a:prstGeom>
+          <a:noFill/>
+          <a:ln>
+            <a:noFill/>
+          </a:ln>
+        </p:spPr>
+        <p:txBody>
+          <a:bodyPr wrap="none" rtlCol="0">
+            <a:spAutoFit/>
+          </a:bodyPr>
+          <a:lstStyle/>
+          <a:p>
+            <a:r>
+              <a:rPr lang="en-US" dirty="0">
+                <a:solidFill>
+                  <a:schemeClr val="bg2">
+                    <a:lumMod val="75000"/>
+                  </a:schemeClr>
+                </a:solidFill>
+              </a:rPr>
+              <a:t>RIP</a:t>
+            </a:r>
+            <a:endParaRPr lang="ru-RU" dirty="0">
+              <a:solidFill>
+                <a:schemeClr val="bg2">
+                  <a:lumMod val="75000"/>
+                </a:schemeClr>
+              </a:solidFill>
+            </a:endParaRPr>
+          </a:p>
+        </p:txBody>
+      </p:sp>
     </p:spTree>
     <p:extLst>
       <p:ext uri="{BB962C8B-B14F-4D97-AF65-F5344CB8AC3E}">
@@ -32068,7 +33064,23 @@
             </a:r>
             <a:r>
               <a:rPr lang="ru-RU" sz="2000" dirty="0"/>
-              <a:t>. Большинство битов слова состояния указывают на свойства результата последней операции </a:t>
+              <a:t>. Большинство битов слова состояния указывают на свойства </a:t>
+            </a:r>
+            <a:r>
+              <a:rPr lang="ru-RU" sz="2000" i="1" dirty="0"/>
+              <a:t>результата последней</a:t>
+            </a:r>
+            <a:r>
+              <a:rPr lang="en-US" sz="2000" i="1" dirty="0"/>
+              <a:t> </a:t>
+            </a:r>
+            <a:r>
+              <a:rPr lang="ru-RU" sz="2000" i="1" dirty="0"/>
+              <a:t>арифметической операции</a:t>
+            </a:r>
+            <a:r>
+              <a:rPr lang="ru-RU" sz="2000" dirty="0"/>
+              <a:t> </a:t>
             </a:r>
             <a:r>
               <a:rPr lang="en-US" sz="2000" dirty="0"/>
@@ -39402,7 +40414,11 @@
             </a:r>
             <a:r>
               <a:rPr lang="ru-RU" sz="2000" dirty="0"/>
-              <a:t>должен иметь то же значение, что и при входе в функцию – если на стеке есть локальные переменные, они должны быть удалены со стека;</a:t>
+              <a:t>должен иметь то же значение, что и при входе в функцию – </a:t>
+            </a:r>
+            <a:r>
+              <a:rPr lang="ru-RU" sz="2000" b="1" dirty="0"/>
+              <a:t>если на стеке есть локальные переменные, они должны быть удалены со стека;</a:t>
             </a:r>
           </a:p>
           <a:p>
@@ -39797,8 +40813,8 @@
         </p:nvSpPr>
         <p:spPr>
           <a:xfrm>
-            <a:off x="10917380" y="3014159"/>
-            <a:ext cx="1413164" cy="923330"/>
+            <a:off x="10778836" y="2734695"/>
+            <a:ext cx="1413164" cy="1477328"/>
           </a:xfrm>
           <a:prstGeom prst="rect">
             <a:avLst/>
@@ -39811,24 +40827,51 @@
           </a:bodyPr>
           <a:lstStyle/>
           <a:p>
+            <a:pPr algn="ctr"/>
+            <a:r>
+              <a:rPr lang="en-US" dirty="0">
+                <a:latin typeface="Courier New" panose="02070309020205020404" pitchFamily="49" charset="0"/>
+                <a:cs typeface="Courier New" panose="02070309020205020404" pitchFamily="49" charset="0"/>
+              </a:rPr>
+              <a:t>call</a:t>
+            </a:r>
+          </a:p>
+          <a:p>
+            <a:pPr algn="ctr"/>
             <a:r>
               <a:rPr lang="en-US" i="1" dirty="0">
                 <a:latin typeface="Courier New" panose="02070309020205020404" pitchFamily="49" charset="0"/>
                 <a:cs typeface="Courier New" panose="02070309020205020404" pitchFamily="49" charset="0"/>
               </a:rPr>
+              <a:t>=</a:t>
+            </a:r>
+          </a:p>
+          <a:p>
+            <a:pPr algn="ctr"/>
+            <a:r>
+              <a:rPr lang="en-US" i="1" dirty="0">
+                <a:latin typeface="Courier New" panose="02070309020205020404" pitchFamily="49" charset="0"/>
+                <a:cs typeface="Courier New" panose="02070309020205020404" pitchFamily="49" charset="0"/>
+              </a:rPr>
               <a:t>push rip</a:t>
             </a:r>
-          </a:p>
-          <a:p>
+            <a:endParaRPr lang="ru-RU" i="1" dirty="0">
+              <a:latin typeface="Courier New" panose="02070309020205020404" pitchFamily="49" charset="0"/>
+              <a:cs typeface="Courier New" panose="02070309020205020404" pitchFamily="49" charset="0"/>
+            </a:endParaRPr>
+          </a:p>
+          <a:p>
+            <a:pPr algn="ctr"/>
             <a:r>
               <a:rPr lang="en-US" i="1" dirty="0">
                 <a:latin typeface="Courier New" panose="02070309020205020404" pitchFamily="49" charset="0"/>
                 <a:cs typeface="Courier New" panose="02070309020205020404" pitchFamily="49" charset="0"/>
               </a:rPr>
-              <a:t>   +</a:t>
-            </a:r>
-          </a:p>
-          <a:p>
+              <a:t>+</a:t>
+            </a:r>
+          </a:p>
+          <a:p>
+            <a:pPr algn="ctr"/>
             <a:r>
               <a:rPr lang="en-US" i="1" dirty="0" err="1">
                 <a:latin typeface="Courier New" panose="02070309020205020404" pitchFamily="49" charset="0"/>
@@ -39916,7 +40959,7 @@
         <p:spPr>
           <a:xfrm>
             <a:off x="6705595" y="3660490"/>
-            <a:ext cx="1170713" cy="369332"/>
+            <a:ext cx="1170713" cy="923330"/>
           </a:xfrm>
           <a:prstGeom prst="rect">
             <a:avLst/>
@@ -39929,6 +40972,34 @@
           </a:bodyPr>
           <a:lstStyle/>
           <a:p>
+            <a:pPr algn="ctr"/>
+            <a:r>
+              <a:rPr lang="en-US" dirty="0">
+                <a:latin typeface="Courier New" panose="02070309020205020404" pitchFamily="49" charset="0"/>
+                <a:cs typeface="Courier New" panose="02070309020205020404" pitchFamily="49" charset="0"/>
+              </a:rPr>
+              <a:t>ret</a:t>
+            </a:r>
+            <a:r>
+              <a:rPr lang="en-US" i="1" dirty="0">
+                <a:latin typeface="Courier New" panose="02070309020205020404" pitchFamily="49" charset="0"/>
+                <a:cs typeface="Courier New" panose="02070309020205020404" pitchFamily="49" charset="0"/>
+              </a:rPr>
+              <a:t> </a:t>
+            </a:r>
+          </a:p>
+          <a:p>
+            <a:pPr algn="ctr"/>
+            <a:r>
+              <a:rPr lang="en-US" i="1" dirty="0">
+                <a:latin typeface="Courier New" panose="02070309020205020404" pitchFamily="49" charset="0"/>
+                <a:cs typeface="Courier New" panose="02070309020205020404" pitchFamily="49" charset="0"/>
+              </a:rPr>
+              <a:t>= </a:t>
+            </a:r>
+          </a:p>
+          <a:p>
+            <a:pPr algn="ctr"/>
             <a:r>
               <a:rPr lang="en-US" i="1" dirty="0">
                 <a:latin typeface="Courier New" panose="02070309020205020404" pitchFamily="49" charset="0"/>
@@ -41543,452 +42614,6 @@
               <a:t>5</a:t>
             </a:fld>
             <a:endParaRPr lang="en-US"/>
-          </a:p>
-        </p:txBody>
-      </p:sp>
-      <p:sp>
-        <p:nvSpPr>
-          <p:cNvPr id="8" name="Прямоугольник 7">
-            <a:extLst>
-              <a:ext uri="{FF2B5EF4-FFF2-40B4-BE49-F238E27FC236}">
-                <a16:creationId xmlns:a16="http://schemas.microsoft.com/office/drawing/2014/main" id="{84EF35D4-E4D1-4AEB-ACA4-EE961D2C6BEA}"/>
-              </a:ext>
-            </a:extLst>
-          </p:cNvPr>
-          <p:cNvSpPr/>
-          <p:nvPr/>
-        </p:nvSpPr>
-        <p:spPr>
-          <a:xfrm>
-            <a:off x="5625326" y="4887072"/>
-            <a:ext cx="941347" cy="878157"/>
-          </a:xfrm>
-          <a:prstGeom prst="rect">
-            <a:avLst/>
-          </a:prstGeom>
-        </p:spPr>
-        <p:style>
-          <a:lnRef idx="2">
-            <a:schemeClr val="accent5">
-              <a:shade val="50000"/>
-            </a:schemeClr>
-          </a:lnRef>
-          <a:fillRef idx="1">
-            <a:schemeClr val="accent5"/>
-          </a:fillRef>
-          <a:effectRef idx="0">
-            <a:schemeClr val="accent5"/>
-          </a:effectRef>
-          <a:fontRef idx="minor">
-            <a:schemeClr val="lt1"/>
-          </a:fontRef>
-        </p:style>
-        <p:txBody>
-          <a:bodyPr rtlCol="0" anchor="ctr"/>
-          <a:lstStyle/>
-          <a:p>
-            <a:pPr algn="ctr"/>
-            <a:r>
-              <a:rPr lang="ru-RU" sz="3600" dirty="0"/>
-              <a:t>ЦП</a:t>
-            </a:r>
-            <a:endParaRPr lang="en-US" sz="3600" dirty="0"/>
-          </a:p>
-        </p:txBody>
-      </p:sp>
-      <p:cxnSp>
-        <p:nvCxnSpPr>
-          <p:cNvPr id="7" name="Прямая со стрелкой 6">
-            <a:extLst>
-              <a:ext uri="{FF2B5EF4-FFF2-40B4-BE49-F238E27FC236}">
-                <a16:creationId xmlns:a16="http://schemas.microsoft.com/office/drawing/2014/main" id="{606B5863-FCBE-44A4-BCA6-3E4A7B289EA2}"/>
-              </a:ext>
-            </a:extLst>
-          </p:cNvPr>
-          <p:cNvCxnSpPr>
-            <a:cxnSpLocks/>
-          </p:cNvCxnSpPr>
-          <p:nvPr/>
-        </p:nvCxnSpPr>
-        <p:spPr>
-          <a:xfrm>
-            <a:off x="4313206" y="4947378"/>
-            <a:ext cx="1331150" cy="0"/>
-          </a:xfrm>
-          <a:prstGeom prst="straightConnector1">
-            <a:avLst/>
-          </a:prstGeom>
-          <a:ln>
-            <a:tailEnd type="triangle"/>
-          </a:ln>
-        </p:spPr>
-        <p:style>
-          <a:lnRef idx="1">
-            <a:schemeClr val="accent1"/>
-          </a:lnRef>
-          <a:fillRef idx="0">
-            <a:schemeClr val="accent1"/>
-          </a:fillRef>
-          <a:effectRef idx="0">
-            <a:schemeClr val="accent1"/>
-          </a:effectRef>
-          <a:fontRef idx="minor">
-            <a:schemeClr val="tx1"/>
-          </a:fontRef>
-        </p:style>
-      </p:cxnSp>
-      <p:cxnSp>
-        <p:nvCxnSpPr>
-          <p:cNvPr id="11" name="Прямая со стрелкой 10">
-            <a:extLst>
-              <a:ext uri="{FF2B5EF4-FFF2-40B4-BE49-F238E27FC236}">
-                <a16:creationId xmlns:a16="http://schemas.microsoft.com/office/drawing/2014/main" id="{166C2BDC-FDF5-476E-A886-DDC04E679918}"/>
-              </a:ext>
-            </a:extLst>
-          </p:cNvPr>
-          <p:cNvCxnSpPr>
-            <a:cxnSpLocks/>
-          </p:cNvCxnSpPr>
-          <p:nvPr/>
-        </p:nvCxnSpPr>
-        <p:spPr>
-          <a:xfrm>
-            <a:off x="4321070" y="5652872"/>
-            <a:ext cx="1331150" cy="92"/>
-          </a:xfrm>
-          <a:prstGeom prst="straightConnector1">
-            <a:avLst/>
-          </a:prstGeom>
-          <a:ln>
-            <a:tailEnd type="triangle"/>
-          </a:ln>
-        </p:spPr>
-        <p:style>
-          <a:lnRef idx="1">
-            <a:schemeClr val="accent1"/>
-          </a:lnRef>
-          <a:fillRef idx="0">
-            <a:schemeClr val="accent1"/>
-          </a:fillRef>
-          <a:effectRef idx="0">
-            <a:schemeClr val="accent1"/>
-          </a:effectRef>
-          <a:fontRef idx="minor">
-            <a:schemeClr val="tx1"/>
-          </a:fontRef>
-        </p:style>
-      </p:cxnSp>
-      <p:cxnSp>
-        <p:nvCxnSpPr>
-          <p:cNvPr id="12" name="Прямая со стрелкой 11">
-            <a:extLst>
-              <a:ext uri="{FF2B5EF4-FFF2-40B4-BE49-F238E27FC236}">
-                <a16:creationId xmlns:a16="http://schemas.microsoft.com/office/drawing/2014/main" id="{F1F60837-AE5A-46FF-8E9D-066965328551}"/>
-              </a:ext>
-            </a:extLst>
-          </p:cNvPr>
-          <p:cNvCxnSpPr>
-            <a:cxnSpLocks/>
-          </p:cNvCxnSpPr>
-          <p:nvPr/>
-        </p:nvCxnSpPr>
-        <p:spPr>
-          <a:xfrm>
-            <a:off x="6574404" y="5361552"/>
-            <a:ext cx="1061792" cy="0"/>
-          </a:xfrm>
-          <a:prstGeom prst="straightConnector1">
-            <a:avLst/>
-          </a:prstGeom>
-          <a:ln>
-            <a:tailEnd type="triangle"/>
-          </a:ln>
-        </p:spPr>
-        <p:style>
-          <a:lnRef idx="1">
-            <a:schemeClr val="accent1"/>
-          </a:lnRef>
-          <a:fillRef idx="0">
-            <a:schemeClr val="accent1"/>
-          </a:fillRef>
-          <a:effectRef idx="0">
-            <a:schemeClr val="accent1"/>
-          </a:effectRef>
-          <a:fontRef idx="minor">
-            <a:schemeClr val="tx1"/>
-          </a:fontRef>
-        </p:style>
-      </p:cxnSp>
-      <p:sp>
-        <p:nvSpPr>
-          <p:cNvPr id="9" name="TextBox 8">
-            <a:extLst>
-              <a:ext uri="{FF2B5EF4-FFF2-40B4-BE49-F238E27FC236}">
-                <a16:creationId xmlns:a16="http://schemas.microsoft.com/office/drawing/2014/main" id="{101E36A3-123D-425F-8E49-A415D579B293}"/>
-              </a:ext>
-            </a:extLst>
-          </p:cNvPr>
-          <p:cNvSpPr txBox="1"/>
-          <p:nvPr/>
-        </p:nvSpPr>
-        <p:spPr>
-          <a:xfrm>
-            <a:off x="4349442" y="4679099"/>
-            <a:ext cx="1151277" cy="307777"/>
-          </a:xfrm>
-          <a:prstGeom prst="rect">
-            <a:avLst/>
-          </a:prstGeom>
-          <a:noFill/>
-        </p:spPr>
-        <p:txBody>
-          <a:bodyPr wrap="none" rtlCol="0">
-            <a:spAutoFit/>
-          </a:bodyPr>
-          <a:lstStyle/>
-          <a:p>
-            <a:r>
-              <a:rPr lang="en-US" sz="1400" dirty="0">
-                <a:latin typeface="Courier New" panose="02070309020205020404" pitchFamily="49" charset="0"/>
-                <a:cs typeface="Courier New" panose="02070309020205020404" pitchFamily="49" charset="0"/>
-              </a:rPr>
-              <a:t>…</a:t>
-            </a:r>
-            <a:r>
-              <a:rPr lang="ru-RU" sz="1400" dirty="0">
-                <a:latin typeface="Courier New" panose="02070309020205020404" pitchFamily="49" charset="0"/>
-                <a:cs typeface="Courier New" panose="02070309020205020404" pitchFamily="49" charset="0"/>
-              </a:rPr>
-              <a:t>1010110</a:t>
-            </a:r>
-            <a:r>
-              <a:rPr lang="en-US" sz="1400" dirty="0">
-                <a:latin typeface="Courier New" panose="02070309020205020404" pitchFamily="49" charset="0"/>
-                <a:cs typeface="Courier New" panose="02070309020205020404" pitchFamily="49" charset="0"/>
-              </a:rPr>
-              <a:t>…</a:t>
-            </a:r>
-            <a:endParaRPr lang="ru-RU" sz="1400" dirty="0">
-              <a:latin typeface="Courier New" panose="02070309020205020404" pitchFamily="49" charset="0"/>
-              <a:cs typeface="Courier New" panose="02070309020205020404" pitchFamily="49" charset="0"/>
-            </a:endParaRPr>
-          </a:p>
-        </p:txBody>
-      </p:sp>
-      <p:sp>
-        <p:nvSpPr>
-          <p:cNvPr id="14" name="TextBox 13">
-            <a:extLst>
-              <a:ext uri="{FF2B5EF4-FFF2-40B4-BE49-F238E27FC236}">
-                <a16:creationId xmlns:a16="http://schemas.microsoft.com/office/drawing/2014/main" id="{67F7849F-4245-4B5B-818D-868014E89260}"/>
-              </a:ext>
-            </a:extLst>
-          </p:cNvPr>
-          <p:cNvSpPr txBox="1"/>
-          <p:nvPr/>
-        </p:nvSpPr>
-        <p:spPr>
-          <a:xfrm>
-            <a:off x="4280198" y="5425999"/>
-            <a:ext cx="1151277" cy="307777"/>
-          </a:xfrm>
-          <a:prstGeom prst="rect">
-            <a:avLst/>
-          </a:prstGeom>
-          <a:noFill/>
-        </p:spPr>
-        <p:txBody>
-          <a:bodyPr wrap="none" rtlCol="0">
-            <a:spAutoFit/>
-          </a:bodyPr>
-          <a:lstStyle/>
-          <a:p>
-            <a:r>
-              <a:rPr lang="en-US" sz="1400" dirty="0">
-                <a:latin typeface="Courier New" panose="02070309020205020404" pitchFamily="49" charset="0"/>
-                <a:cs typeface="Courier New" panose="02070309020205020404" pitchFamily="49" charset="0"/>
-              </a:rPr>
-              <a:t>…</a:t>
-            </a:r>
-            <a:r>
-              <a:rPr lang="ru-RU" sz="1400" dirty="0">
-                <a:latin typeface="Courier New" panose="02070309020205020404" pitchFamily="49" charset="0"/>
-                <a:cs typeface="Courier New" panose="02070309020205020404" pitchFamily="49" charset="0"/>
-              </a:rPr>
-              <a:t>1101010</a:t>
-            </a:r>
-            <a:r>
-              <a:rPr lang="en-US" sz="1400" dirty="0">
-                <a:latin typeface="Courier New" panose="02070309020205020404" pitchFamily="49" charset="0"/>
-                <a:cs typeface="Courier New" panose="02070309020205020404" pitchFamily="49" charset="0"/>
-              </a:rPr>
-              <a:t>…</a:t>
-            </a:r>
-            <a:endParaRPr lang="ru-RU" sz="1400" dirty="0">
-              <a:latin typeface="Courier New" panose="02070309020205020404" pitchFamily="49" charset="0"/>
-              <a:cs typeface="Courier New" panose="02070309020205020404" pitchFamily="49" charset="0"/>
-            </a:endParaRPr>
-          </a:p>
-        </p:txBody>
-      </p:sp>
-      <p:sp>
-        <p:nvSpPr>
-          <p:cNvPr id="15" name="TextBox 14">
-            <a:extLst>
-              <a:ext uri="{FF2B5EF4-FFF2-40B4-BE49-F238E27FC236}">
-                <a16:creationId xmlns:a16="http://schemas.microsoft.com/office/drawing/2014/main" id="{D0E95827-E22F-4D88-8CCD-8ECCEEAF4E2C}"/>
-              </a:ext>
-            </a:extLst>
-          </p:cNvPr>
-          <p:cNvSpPr txBox="1"/>
-          <p:nvPr/>
-        </p:nvSpPr>
-        <p:spPr>
-          <a:xfrm>
-            <a:off x="6566673" y="5092414"/>
-            <a:ext cx="1290738" cy="338554"/>
-          </a:xfrm>
-          <a:prstGeom prst="rect">
-            <a:avLst/>
-          </a:prstGeom>
-          <a:noFill/>
-        </p:spPr>
-        <p:txBody>
-          <a:bodyPr wrap="none" rtlCol="0">
-            <a:spAutoFit/>
-          </a:bodyPr>
-          <a:lstStyle/>
-          <a:p>
-            <a:r>
-              <a:rPr lang="ru-RU" sz="1600" dirty="0">
-                <a:latin typeface="Courier New" panose="02070309020205020404" pitchFamily="49" charset="0"/>
-                <a:cs typeface="Courier New" panose="02070309020205020404" pitchFamily="49" charset="0"/>
-              </a:rPr>
-              <a:t>…</a:t>
-            </a:r>
-            <a:r>
-              <a:rPr lang="ru-RU" sz="1400" dirty="0">
-                <a:latin typeface="Courier New" panose="02070309020205020404" pitchFamily="49" charset="0"/>
-                <a:cs typeface="Courier New" panose="02070309020205020404" pitchFamily="49" charset="0"/>
-              </a:rPr>
-              <a:t>00101010</a:t>
-            </a:r>
-            <a:r>
-              <a:rPr lang="en-US" sz="1600" dirty="0">
-                <a:latin typeface="Courier New" panose="02070309020205020404" pitchFamily="49" charset="0"/>
-                <a:cs typeface="Courier New" panose="02070309020205020404" pitchFamily="49" charset="0"/>
-              </a:rPr>
-              <a:t>…</a:t>
-            </a:r>
-            <a:endParaRPr lang="ru-RU" sz="1600" dirty="0">
-              <a:latin typeface="Courier New" panose="02070309020205020404" pitchFamily="49" charset="0"/>
-              <a:cs typeface="Courier New" panose="02070309020205020404" pitchFamily="49" charset="0"/>
-            </a:endParaRPr>
-          </a:p>
-        </p:txBody>
-      </p:sp>
-      <p:sp>
-        <p:nvSpPr>
-          <p:cNvPr id="17" name="TextBox 16">
-            <a:extLst>
-              <a:ext uri="{FF2B5EF4-FFF2-40B4-BE49-F238E27FC236}">
-                <a16:creationId xmlns:a16="http://schemas.microsoft.com/office/drawing/2014/main" id="{048B5391-E22D-4393-AC8A-C039BE3CFA30}"/>
-              </a:ext>
-            </a:extLst>
-          </p:cNvPr>
-          <p:cNvSpPr txBox="1"/>
-          <p:nvPr/>
-        </p:nvSpPr>
-        <p:spPr>
-          <a:xfrm>
-            <a:off x="4375265" y="4875349"/>
-            <a:ext cx="1217128" cy="338554"/>
-          </a:xfrm>
-          <a:prstGeom prst="rect">
-            <a:avLst/>
-          </a:prstGeom>
-          <a:noFill/>
-        </p:spPr>
-        <p:txBody>
-          <a:bodyPr wrap="none" rtlCol="0">
-            <a:spAutoFit/>
-          </a:bodyPr>
-          <a:lstStyle/>
-          <a:p>
-            <a:r>
-              <a:rPr lang="ru-RU" sz="1600" dirty="0"/>
-              <a:t>Инструкции</a:t>
-            </a:r>
-          </a:p>
-        </p:txBody>
-      </p:sp>
-      <p:sp>
-        <p:nvSpPr>
-          <p:cNvPr id="21" name="TextBox 20">
-            <a:extLst>
-              <a:ext uri="{FF2B5EF4-FFF2-40B4-BE49-F238E27FC236}">
-                <a16:creationId xmlns:a16="http://schemas.microsoft.com/office/drawing/2014/main" id="{03A5CDD8-360F-4A13-A522-2068850D5890}"/>
-              </a:ext>
-            </a:extLst>
-          </p:cNvPr>
-          <p:cNvSpPr txBox="1"/>
-          <p:nvPr/>
-        </p:nvSpPr>
-        <p:spPr>
-          <a:xfrm>
-            <a:off x="4484958" y="5590812"/>
-            <a:ext cx="870751" cy="338554"/>
-          </a:xfrm>
-          <a:prstGeom prst="rect">
-            <a:avLst/>
-          </a:prstGeom>
-          <a:noFill/>
-        </p:spPr>
-        <p:txBody>
-          <a:bodyPr wrap="none" rtlCol="0">
-            <a:spAutoFit/>
-          </a:bodyPr>
-          <a:lstStyle/>
-          <a:p>
-            <a:r>
-              <a:rPr lang="ru-RU" sz="1600" dirty="0"/>
-              <a:t>Данные</a:t>
-            </a:r>
-          </a:p>
-        </p:txBody>
-      </p:sp>
-      <p:sp>
-        <p:nvSpPr>
-          <p:cNvPr id="22" name="TextBox 21">
-            <a:extLst>
-              <a:ext uri="{FF2B5EF4-FFF2-40B4-BE49-F238E27FC236}">
-                <a16:creationId xmlns:a16="http://schemas.microsoft.com/office/drawing/2014/main" id="{4F4289B4-E39B-44C5-88B9-A569B959D77C}"/>
-              </a:ext>
-            </a:extLst>
-          </p:cNvPr>
-          <p:cNvSpPr txBox="1"/>
-          <p:nvPr/>
-        </p:nvSpPr>
-        <p:spPr>
-          <a:xfrm>
-            <a:off x="6637492" y="5314318"/>
-            <a:ext cx="1011815" cy="338554"/>
-          </a:xfrm>
-          <a:prstGeom prst="rect">
-            <a:avLst/>
-          </a:prstGeom>
-          <a:noFill/>
-        </p:spPr>
-        <p:txBody>
-          <a:bodyPr wrap="none" rtlCol="0">
-            <a:spAutoFit/>
-          </a:bodyPr>
-          <a:lstStyle/>
-          <a:p>
-            <a:r>
-              <a:rPr lang="ru-RU" sz="1600" dirty="0"/>
-              <a:t>Результат</a:t>
-            </a:r>
           </a:p>
         </p:txBody>
       </p:sp>
@@ -42192,6 +42817,452 @@
           </a:p>
         </p:txBody>
       </p:sp>
+      <p:sp>
+        <p:nvSpPr>
+          <p:cNvPr id="4" name="Прямоугольник 7">
+            <a:extLst>
+              <a:ext uri="{FF2B5EF4-FFF2-40B4-BE49-F238E27FC236}">
+                <a16:creationId xmlns:a16="http://schemas.microsoft.com/office/drawing/2014/main" id="{2F39E1C3-02E6-9C72-95EA-15A61901F9A7}"/>
+              </a:ext>
+            </a:extLst>
+          </p:cNvPr>
+          <p:cNvSpPr/>
+          <p:nvPr/>
+        </p:nvSpPr>
+        <p:spPr>
+          <a:xfrm>
+            <a:off x="9673750" y="291055"/>
+            <a:ext cx="941347" cy="878157"/>
+          </a:xfrm>
+          <a:prstGeom prst="rect">
+            <a:avLst/>
+          </a:prstGeom>
+        </p:spPr>
+        <p:style>
+          <a:lnRef idx="2">
+            <a:schemeClr val="accent5">
+              <a:shade val="50000"/>
+            </a:schemeClr>
+          </a:lnRef>
+          <a:fillRef idx="1">
+            <a:schemeClr val="accent5"/>
+          </a:fillRef>
+          <a:effectRef idx="0">
+            <a:schemeClr val="accent5"/>
+          </a:effectRef>
+          <a:fontRef idx="minor">
+            <a:schemeClr val="lt1"/>
+          </a:fontRef>
+        </p:style>
+        <p:txBody>
+          <a:bodyPr rtlCol="0" anchor="ctr"/>
+          <a:lstStyle/>
+          <a:p>
+            <a:pPr algn="ctr"/>
+            <a:r>
+              <a:rPr lang="ru-RU" sz="3600" dirty="0"/>
+              <a:t>ЦП</a:t>
+            </a:r>
+            <a:endParaRPr lang="en-US" sz="3600" dirty="0"/>
+          </a:p>
+        </p:txBody>
+      </p:sp>
+      <p:cxnSp>
+        <p:nvCxnSpPr>
+          <p:cNvPr id="6" name="Прямая со стрелкой 6">
+            <a:extLst>
+              <a:ext uri="{FF2B5EF4-FFF2-40B4-BE49-F238E27FC236}">
+                <a16:creationId xmlns:a16="http://schemas.microsoft.com/office/drawing/2014/main" id="{01F988BE-284F-2B54-2AAF-CE8264732737}"/>
+              </a:ext>
+            </a:extLst>
+          </p:cNvPr>
+          <p:cNvCxnSpPr>
+            <a:cxnSpLocks/>
+          </p:cNvCxnSpPr>
+          <p:nvPr/>
+        </p:nvCxnSpPr>
+        <p:spPr>
+          <a:xfrm>
+            <a:off x="8361630" y="351361"/>
+            <a:ext cx="1331150" cy="0"/>
+          </a:xfrm>
+          <a:prstGeom prst="straightConnector1">
+            <a:avLst/>
+          </a:prstGeom>
+          <a:ln>
+            <a:tailEnd type="triangle"/>
+          </a:ln>
+        </p:spPr>
+        <p:style>
+          <a:lnRef idx="1">
+            <a:schemeClr val="accent1"/>
+          </a:lnRef>
+          <a:fillRef idx="0">
+            <a:schemeClr val="accent1"/>
+          </a:fillRef>
+          <a:effectRef idx="0">
+            <a:schemeClr val="accent1"/>
+          </a:effectRef>
+          <a:fontRef idx="minor">
+            <a:schemeClr val="tx1"/>
+          </a:fontRef>
+        </p:style>
+      </p:cxnSp>
+      <p:cxnSp>
+        <p:nvCxnSpPr>
+          <p:cNvPr id="10" name="Прямая со стрелкой 10">
+            <a:extLst>
+              <a:ext uri="{FF2B5EF4-FFF2-40B4-BE49-F238E27FC236}">
+                <a16:creationId xmlns:a16="http://schemas.microsoft.com/office/drawing/2014/main" id="{31597F4A-C7FB-C457-2FCD-6E90DCCECAAC}"/>
+              </a:ext>
+            </a:extLst>
+          </p:cNvPr>
+          <p:cNvCxnSpPr>
+            <a:cxnSpLocks/>
+          </p:cNvCxnSpPr>
+          <p:nvPr/>
+        </p:nvCxnSpPr>
+        <p:spPr>
+          <a:xfrm>
+            <a:off x="8369494" y="1056855"/>
+            <a:ext cx="1331150" cy="92"/>
+          </a:xfrm>
+          <a:prstGeom prst="straightConnector1">
+            <a:avLst/>
+          </a:prstGeom>
+          <a:ln>
+            <a:tailEnd type="triangle"/>
+          </a:ln>
+        </p:spPr>
+        <p:style>
+          <a:lnRef idx="1">
+            <a:schemeClr val="accent1"/>
+          </a:lnRef>
+          <a:fillRef idx="0">
+            <a:schemeClr val="accent1"/>
+          </a:fillRef>
+          <a:effectRef idx="0">
+            <a:schemeClr val="accent1"/>
+          </a:effectRef>
+          <a:fontRef idx="minor">
+            <a:schemeClr val="tx1"/>
+          </a:fontRef>
+        </p:style>
+      </p:cxnSp>
+      <p:cxnSp>
+        <p:nvCxnSpPr>
+          <p:cNvPr id="13" name="Прямая со стрелкой 11">
+            <a:extLst>
+              <a:ext uri="{FF2B5EF4-FFF2-40B4-BE49-F238E27FC236}">
+                <a16:creationId xmlns:a16="http://schemas.microsoft.com/office/drawing/2014/main" id="{ED351CB4-79EA-E33E-7D6F-9DBA06A1A315}"/>
+              </a:ext>
+            </a:extLst>
+          </p:cNvPr>
+          <p:cNvCxnSpPr>
+            <a:cxnSpLocks/>
+          </p:cNvCxnSpPr>
+          <p:nvPr/>
+        </p:nvCxnSpPr>
+        <p:spPr>
+          <a:xfrm>
+            <a:off x="10622828" y="765535"/>
+            <a:ext cx="1061792" cy="0"/>
+          </a:xfrm>
+          <a:prstGeom prst="straightConnector1">
+            <a:avLst/>
+          </a:prstGeom>
+          <a:ln>
+            <a:tailEnd type="triangle"/>
+          </a:ln>
+        </p:spPr>
+        <p:style>
+          <a:lnRef idx="1">
+            <a:schemeClr val="accent1"/>
+          </a:lnRef>
+          <a:fillRef idx="0">
+            <a:schemeClr val="accent1"/>
+          </a:fillRef>
+          <a:effectRef idx="0">
+            <a:schemeClr val="accent1"/>
+          </a:effectRef>
+          <a:fontRef idx="minor">
+            <a:schemeClr val="tx1"/>
+          </a:fontRef>
+        </p:style>
+      </p:cxnSp>
+      <p:sp>
+        <p:nvSpPr>
+          <p:cNvPr id="16" name="TextBox 15">
+            <a:extLst>
+              <a:ext uri="{FF2B5EF4-FFF2-40B4-BE49-F238E27FC236}">
+                <a16:creationId xmlns:a16="http://schemas.microsoft.com/office/drawing/2014/main" id="{1E5A0056-ABB0-9471-583E-9816DCF05B41}"/>
+              </a:ext>
+            </a:extLst>
+          </p:cNvPr>
+          <p:cNvSpPr txBox="1"/>
+          <p:nvPr/>
+        </p:nvSpPr>
+        <p:spPr>
+          <a:xfrm>
+            <a:off x="8397866" y="83082"/>
+            <a:ext cx="1151277" cy="307777"/>
+          </a:xfrm>
+          <a:prstGeom prst="rect">
+            <a:avLst/>
+          </a:prstGeom>
+          <a:noFill/>
+        </p:spPr>
+        <p:txBody>
+          <a:bodyPr wrap="none" rtlCol="0">
+            <a:spAutoFit/>
+          </a:bodyPr>
+          <a:lstStyle/>
+          <a:p>
+            <a:r>
+              <a:rPr lang="en-US" sz="1400" dirty="0">
+                <a:latin typeface="Courier New" panose="02070309020205020404" pitchFamily="49" charset="0"/>
+                <a:cs typeface="Courier New" panose="02070309020205020404" pitchFamily="49" charset="0"/>
+              </a:rPr>
+              <a:t>…</a:t>
+            </a:r>
+            <a:r>
+              <a:rPr lang="ru-RU" sz="1400" dirty="0">
+                <a:latin typeface="Courier New" panose="02070309020205020404" pitchFamily="49" charset="0"/>
+                <a:cs typeface="Courier New" panose="02070309020205020404" pitchFamily="49" charset="0"/>
+              </a:rPr>
+              <a:t>1010110</a:t>
+            </a:r>
+            <a:r>
+              <a:rPr lang="en-US" sz="1400" dirty="0">
+                <a:latin typeface="Courier New" panose="02070309020205020404" pitchFamily="49" charset="0"/>
+                <a:cs typeface="Courier New" panose="02070309020205020404" pitchFamily="49" charset="0"/>
+              </a:rPr>
+              <a:t>…</a:t>
+            </a:r>
+            <a:endParaRPr lang="ru-RU" sz="1400" dirty="0">
+              <a:latin typeface="Courier New" panose="02070309020205020404" pitchFamily="49" charset="0"/>
+              <a:cs typeface="Courier New" panose="02070309020205020404" pitchFamily="49" charset="0"/>
+            </a:endParaRPr>
+          </a:p>
+        </p:txBody>
+      </p:sp>
+      <p:sp>
+        <p:nvSpPr>
+          <p:cNvPr id="18" name="TextBox 17">
+            <a:extLst>
+              <a:ext uri="{FF2B5EF4-FFF2-40B4-BE49-F238E27FC236}">
+                <a16:creationId xmlns:a16="http://schemas.microsoft.com/office/drawing/2014/main" id="{EC445FB0-1E16-B80F-C268-7CA6600BCAC7}"/>
+              </a:ext>
+            </a:extLst>
+          </p:cNvPr>
+          <p:cNvSpPr txBox="1"/>
+          <p:nvPr/>
+        </p:nvSpPr>
+        <p:spPr>
+          <a:xfrm>
+            <a:off x="8328622" y="829982"/>
+            <a:ext cx="1151277" cy="307777"/>
+          </a:xfrm>
+          <a:prstGeom prst="rect">
+            <a:avLst/>
+          </a:prstGeom>
+          <a:noFill/>
+        </p:spPr>
+        <p:txBody>
+          <a:bodyPr wrap="none" rtlCol="0">
+            <a:spAutoFit/>
+          </a:bodyPr>
+          <a:lstStyle/>
+          <a:p>
+            <a:r>
+              <a:rPr lang="en-US" sz="1400" dirty="0">
+                <a:latin typeface="Courier New" panose="02070309020205020404" pitchFamily="49" charset="0"/>
+                <a:cs typeface="Courier New" panose="02070309020205020404" pitchFamily="49" charset="0"/>
+              </a:rPr>
+              <a:t>…</a:t>
+            </a:r>
+            <a:r>
+              <a:rPr lang="ru-RU" sz="1400" dirty="0">
+                <a:latin typeface="Courier New" panose="02070309020205020404" pitchFamily="49" charset="0"/>
+                <a:cs typeface="Courier New" panose="02070309020205020404" pitchFamily="49" charset="0"/>
+              </a:rPr>
+              <a:t>1101010</a:t>
+            </a:r>
+            <a:r>
+              <a:rPr lang="en-US" sz="1400" dirty="0">
+                <a:latin typeface="Courier New" panose="02070309020205020404" pitchFamily="49" charset="0"/>
+                <a:cs typeface="Courier New" panose="02070309020205020404" pitchFamily="49" charset="0"/>
+              </a:rPr>
+              <a:t>…</a:t>
+            </a:r>
+            <a:endParaRPr lang="ru-RU" sz="1400" dirty="0">
+              <a:latin typeface="Courier New" panose="02070309020205020404" pitchFamily="49" charset="0"/>
+              <a:cs typeface="Courier New" panose="02070309020205020404" pitchFamily="49" charset="0"/>
+            </a:endParaRPr>
+          </a:p>
+        </p:txBody>
+      </p:sp>
+      <p:sp>
+        <p:nvSpPr>
+          <p:cNvPr id="19" name="TextBox 18">
+            <a:extLst>
+              <a:ext uri="{FF2B5EF4-FFF2-40B4-BE49-F238E27FC236}">
+                <a16:creationId xmlns:a16="http://schemas.microsoft.com/office/drawing/2014/main" id="{AA64679D-4159-F7D1-D686-8CCD143786A4}"/>
+              </a:ext>
+            </a:extLst>
+          </p:cNvPr>
+          <p:cNvSpPr txBox="1"/>
+          <p:nvPr/>
+        </p:nvSpPr>
+        <p:spPr>
+          <a:xfrm>
+            <a:off x="10615097" y="496397"/>
+            <a:ext cx="1290738" cy="338554"/>
+          </a:xfrm>
+          <a:prstGeom prst="rect">
+            <a:avLst/>
+          </a:prstGeom>
+          <a:noFill/>
+        </p:spPr>
+        <p:txBody>
+          <a:bodyPr wrap="none" rtlCol="0">
+            <a:spAutoFit/>
+          </a:bodyPr>
+          <a:lstStyle/>
+          <a:p>
+            <a:r>
+              <a:rPr lang="ru-RU" sz="1600" dirty="0">
+                <a:latin typeface="Courier New" panose="02070309020205020404" pitchFamily="49" charset="0"/>
+                <a:cs typeface="Courier New" panose="02070309020205020404" pitchFamily="49" charset="0"/>
+              </a:rPr>
+              <a:t>…</a:t>
+            </a:r>
+            <a:r>
+              <a:rPr lang="ru-RU" sz="1400" dirty="0">
+                <a:latin typeface="Courier New" panose="02070309020205020404" pitchFamily="49" charset="0"/>
+                <a:cs typeface="Courier New" panose="02070309020205020404" pitchFamily="49" charset="0"/>
+              </a:rPr>
+              <a:t>00101010</a:t>
+            </a:r>
+            <a:r>
+              <a:rPr lang="en-US" sz="1600" dirty="0">
+                <a:latin typeface="Courier New" panose="02070309020205020404" pitchFamily="49" charset="0"/>
+                <a:cs typeface="Courier New" panose="02070309020205020404" pitchFamily="49" charset="0"/>
+              </a:rPr>
+              <a:t>…</a:t>
+            </a:r>
+            <a:endParaRPr lang="ru-RU" sz="1600" dirty="0">
+              <a:latin typeface="Courier New" panose="02070309020205020404" pitchFamily="49" charset="0"/>
+              <a:cs typeface="Courier New" panose="02070309020205020404" pitchFamily="49" charset="0"/>
+            </a:endParaRPr>
+          </a:p>
+        </p:txBody>
+      </p:sp>
+      <p:sp>
+        <p:nvSpPr>
+          <p:cNvPr id="20" name="TextBox 19">
+            <a:extLst>
+              <a:ext uri="{FF2B5EF4-FFF2-40B4-BE49-F238E27FC236}">
+                <a16:creationId xmlns:a16="http://schemas.microsoft.com/office/drawing/2014/main" id="{56CFF739-3367-4C4D-0E97-776AE31D27BF}"/>
+              </a:ext>
+            </a:extLst>
+          </p:cNvPr>
+          <p:cNvSpPr txBox="1"/>
+          <p:nvPr/>
+        </p:nvSpPr>
+        <p:spPr>
+          <a:xfrm>
+            <a:off x="8423689" y="279332"/>
+            <a:ext cx="1217128" cy="338554"/>
+          </a:xfrm>
+          <a:prstGeom prst="rect">
+            <a:avLst/>
+          </a:prstGeom>
+          <a:noFill/>
+        </p:spPr>
+        <p:txBody>
+          <a:bodyPr wrap="none" rtlCol="0">
+            <a:spAutoFit/>
+          </a:bodyPr>
+          <a:lstStyle/>
+          <a:p>
+            <a:r>
+              <a:rPr lang="ru-RU" sz="1600" dirty="0"/>
+              <a:t>Инструкции</a:t>
+            </a:r>
+          </a:p>
+        </p:txBody>
+      </p:sp>
+      <p:sp>
+        <p:nvSpPr>
+          <p:cNvPr id="23" name="TextBox 22">
+            <a:extLst>
+              <a:ext uri="{FF2B5EF4-FFF2-40B4-BE49-F238E27FC236}">
+                <a16:creationId xmlns:a16="http://schemas.microsoft.com/office/drawing/2014/main" id="{2DD18DE9-D9FE-5BAE-4BA5-8CD62C0EF255}"/>
+              </a:ext>
+            </a:extLst>
+          </p:cNvPr>
+          <p:cNvSpPr txBox="1"/>
+          <p:nvPr/>
+        </p:nvSpPr>
+        <p:spPr>
+          <a:xfrm>
+            <a:off x="8533382" y="994795"/>
+            <a:ext cx="870751" cy="338554"/>
+          </a:xfrm>
+          <a:prstGeom prst="rect">
+            <a:avLst/>
+          </a:prstGeom>
+          <a:noFill/>
+        </p:spPr>
+        <p:txBody>
+          <a:bodyPr wrap="none" rtlCol="0">
+            <a:spAutoFit/>
+          </a:bodyPr>
+          <a:lstStyle/>
+          <a:p>
+            <a:r>
+              <a:rPr lang="ru-RU" sz="1600" dirty="0"/>
+              <a:t>Данные</a:t>
+            </a:r>
+          </a:p>
+        </p:txBody>
+      </p:sp>
+      <p:sp>
+        <p:nvSpPr>
+          <p:cNvPr id="24" name="TextBox 23">
+            <a:extLst>
+              <a:ext uri="{FF2B5EF4-FFF2-40B4-BE49-F238E27FC236}">
+                <a16:creationId xmlns:a16="http://schemas.microsoft.com/office/drawing/2014/main" id="{BA96186F-6552-26CF-6927-F8FEF983E590}"/>
+              </a:ext>
+            </a:extLst>
+          </p:cNvPr>
+          <p:cNvSpPr txBox="1"/>
+          <p:nvPr/>
+        </p:nvSpPr>
+        <p:spPr>
+          <a:xfrm>
+            <a:off x="10685916" y="718301"/>
+            <a:ext cx="1011815" cy="338554"/>
+          </a:xfrm>
+          <a:prstGeom prst="rect">
+            <a:avLst/>
+          </a:prstGeom>
+          <a:noFill/>
+        </p:spPr>
+        <p:txBody>
+          <a:bodyPr wrap="none" rtlCol="0">
+            <a:spAutoFit/>
+          </a:bodyPr>
+          <a:lstStyle/>
+          <a:p>
+            <a:r>
+              <a:rPr lang="ru-RU" sz="1600" dirty="0"/>
+              <a:t>Результат</a:t>
+            </a:r>
+          </a:p>
+        </p:txBody>
+      </p:sp>
     </p:spTree>
     <p:extLst>
       <p:ext uri="{BB962C8B-B14F-4D97-AF65-F5344CB8AC3E}">
@@ -42776,7 +43847,7 @@
         <p:spPr>
           <a:xfrm>
             <a:off x="8423689" y="279332"/>
-            <a:ext cx="1217128" cy="338554"/>
+            <a:ext cx="1246944" cy="338554"/>
           </a:xfrm>
           <a:prstGeom prst="rect">
             <a:avLst/>
@@ -42790,7 +43861,7 @@
           <a:lstStyle/>
           <a:p>
             <a:r>
-              <a:rPr lang="ru-RU" sz="1600" dirty="0"/>
+              <a:rPr lang="ru-RU" sz="1600" b="1" dirty="0"/>
               <a:t>Инструкции</a:t>
             </a:r>
           </a:p>
@@ -43581,6 +44652,505 @@
           </a:p>
         </p:txBody>
       </p:sp>
+      <p:sp>
+        <p:nvSpPr>
+          <p:cNvPr id="4" name="Прямоугольник 7">
+            <a:extLst>
+              <a:ext uri="{FF2B5EF4-FFF2-40B4-BE49-F238E27FC236}">
+                <a16:creationId xmlns:a16="http://schemas.microsoft.com/office/drawing/2014/main" id="{E51BABEB-994F-E5E4-ECEF-17DC7202B783}"/>
+              </a:ext>
+            </a:extLst>
+          </p:cNvPr>
+          <p:cNvSpPr/>
+          <p:nvPr/>
+        </p:nvSpPr>
+        <p:spPr>
+          <a:xfrm>
+            <a:off x="9673750" y="291055"/>
+            <a:ext cx="941347" cy="878157"/>
+          </a:xfrm>
+          <a:prstGeom prst="rect">
+            <a:avLst/>
+          </a:prstGeom>
+        </p:spPr>
+        <p:style>
+          <a:lnRef idx="2">
+            <a:schemeClr val="accent5">
+              <a:shade val="50000"/>
+            </a:schemeClr>
+          </a:lnRef>
+          <a:fillRef idx="1">
+            <a:schemeClr val="accent5"/>
+          </a:fillRef>
+          <a:effectRef idx="0">
+            <a:schemeClr val="accent5"/>
+          </a:effectRef>
+          <a:fontRef idx="minor">
+            <a:schemeClr val="lt1"/>
+          </a:fontRef>
+        </p:style>
+        <p:txBody>
+          <a:bodyPr rtlCol="0" anchor="ctr"/>
+          <a:lstStyle/>
+          <a:p>
+            <a:pPr algn="ctr"/>
+            <a:r>
+              <a:rPr lang="ru-RU" sz="3600" dirty="0"/>
+              <a:t>ЦП</a:t>
+            </a:r>
+            <a:endParaRPr lang="en-US" sz="3600" dirty="0"/>
+          </a:p>
+        </p:txBody>
+      </p:sp>
+      <p:cxnSp>
+        <p:nvCxnSpPr>
+          <p:cNvPr id="6" name="Прямая со стрелкой 6">
+            <a:extLst>
+              <a:ext uri="{FF2B5EF4-FFF2-40B4-BE49-F238E27FC236}">
+                <a16:creationId xmlns:a16="http://schemas.microsoft.com/office/drawing/2014/main" id="{BCA5B00B-CCE1-E65D-68E2-CDFD6EDCA9D5}"/>
+              </a:ext>
+            </a:extLst>
+          </p:cNvPr>
+          <p:cNvCxnSpPr>
+            <a:cxnSpLocks/>
+          </p:cNvCxnSpPr>
+          <p:nvPr/>
+        </p:nvCxnSpPr>
+        <p:spPr>
+          <a:xfrm>
+            <a:off x="8361630" y="351361"/>
+            <a:ext cx="1331150" cy="0"/>
+          </a:xfrm>
+          <a:prstGeom prst="straightConnector1">
+            <a:avLst/>
+          </a:prstGeom>
+          <a:ln>
+            <a:tailEnd type="triangle"/>
+          </a:ln>
+        </p:spPr>
+        <p:style>
+          <a:lnRef idx="1">
+            <a:schemeClr val="accent1"/>
+          </a:lnRef>
+          <a:fillRef idx="0">
+            <a:schemeClr val="accent1"/>
+          </a:fillRef>
+          <a:effectRef idx="0">
+            <a:schemeClr val="accent1"/>
+          </a:effectRef>
+          <a:fontRef idx="minor">
+            <a:schemeClr val="tx1"/>
+          </a:fontRef>
+        </p:style>
+      </p:cxnSp>
+      <p:cxnSp>
+        <p:nvCxnSpPr>
+          <p:cNvPr id="8" name="Прямая со стрелкой 10">
+            <a:extLst>
+              <a:ext uri="{FF2B5EF4-FFF2-40B4-BE49-F238E27FC236}">
+                <a16:creationId xmlns:a16="http://schemas.microsoft.com/office/drawing/2014/main" id="{4C8FFC46-2C98-6090-B4C0-40901C6C166B}"/>
+              </a:ext>
+            </a:extLst>
+          </p:cNvPr>
+          <p:cNvCxnSpPr>
+            <a:cxnSpLocks/>
+          </p:cNvCxnSpPr>
+          <p:nvPr/>
+        </p:nvCxnSpPr>
+        <p:spPr>
+          <a:xfrm>
+            <a:off x="8369494" y="1056855"/>
+            <a:ext cx="1331150" cy="92"/>
+          </a:xfrm>
+          <a:prstGeom prst="straightConnector1">
+            <a:avLst/>
+          </a:prstGeom>
+          <a:ln>
+            <a:tailEnd type="triangle"/>
+          </a:ln>
+        </p:spPr>
+        <p:style>
+          <a:lnRef idx="1">
+            <a:schemeClr val="accent1"/>
+          </a:lnRef>
+          <a:fillRef idx="0">
+            <a:schemeClr val="accent1"/>
+          </a:fillRef>
+          <a:effectRef idx="0">
+            <a:schemeClr val="accent1"/>
+          </a:effectRef>
+          <a:fontRef idx="minor">
+            <a:schemeClr val="tx1"/>
+          </a:fontRef>
+        </p:style>
+      </p:cxnSp>
+      <p:sp>
+        <p:nvSpPr>
+          <p:cNvPr id="10" name="TextBox 9">
+            <a:extLst>
+              <a:ext uri="{FF2B5EF4-FFF2-40B4-BE49-F238E27FC236}">
+                <a16:creationId xmlns:a16="http://schemas.microsoft.com/office/drawing/2014/main" id="{BEC99916-6CFB-AD91-77D7-E832776441DF}"/>
+              </a:ext>
+            </a:extLst>
+          </p:cNvPr>
+          <p:cNvSpPr txBox="1"/>
+          <p:nvPr/>
+        </p:nvSpPr>
+        <p:spPr>
+          <a:xfrm>
+            <a:off x="8397866" y="83082"/>
+            <a:ext cx="1151277" cy="307777"/>
+          </a:xfrm>
+          <a:prstGeom prst="rect">
+            <a:avLst/>
+          </a:prstGeom>
+          <a:noFill/>
+        </p:spPr>
+        <p:txBody>
+          <a:bodyPr wrap="none" rtlCol="0">
+            <a:spAutoFit/>
+          </a:bodyPr>
+          <a:lstStyle/>
+          <a:p>
+            <a:r>
+              <a:rPr lang="en-US" sz="1400" dirty="0">
+                <a:latin typeface="Courier New" panose="02070309020205020404" pitchFamily="49" charset="0"/>
+                <a:cs typeface="Courier New" panose="02070309020205020404" pitchFamily="49" charset="0"/>
+              </a:rPr>
+              <a:t>…</a:t>
+            </a:r>
+            <a:r>
+              <a:rPr lang="ru-RU" sz="1400" dirty="0">
+                <a:latin typeface="Courier New" panose="02070309020205020404" pitchFamily="49" charset="0"/>
+                <a:cs typeface="Courier New" panose="02070309020205020404" pitchFamily="49" charset="0"/>
+              </a:rPr>
+              <a:t>1010110</a:t>
+            </a:r>
+            <a:r>
+              <a:rPr lang="en-US" sz="1400" dirty="0">
+                <a:latin typeface="Courier New" panose="02070309020205020404" pitchFamily="49" charset="0"/>
+                <a:cs typeface="Courier New" panose="02070309020205020404" pitchFamily="49" charset="0"/>
+              </a:rPr>
+              <a:t>…</a:t>
+            </a:r>
+            <a:endParaRPr lang="ru-RU" sz="1400" dirty="0">
+              <a:latin typeface="Courier New" panose="02070309020205020404" pitchFamily="49" charset="0"/>
+              <a:cs typeface="Courier New" panose="02070309020205020404" pitchFamily="49" charset="0"/>
+            </a:endParaRPr>
+          </a:p>
+        </p:txBody>
+      </p:sp>
+      <p:sp>
+        <p:nvSpPr>
+          <p:cNvPr id="11" name="TextBox 10">
+            <a:extLst>
+              <a:ext uri="{FF2B5EF4-FFF2-40B4-BE49-F238E27FC236}">
+                <a16:creationId xmlns:a16="http://schemas.microsoft.com/office/drawing/2014/main" id="{A7A73DE2-0491-2FD9-C847-20722139BE4A}"/>
+              </a:ext>
+            </a:extLst>
+          </p:cNvPr>
+          <p:cNvSpPr txBox="1"/>
+          <p:nvPr/>
+        </p:nvSpPr>
+        <p:spPr>
+          <a:xfrm>
+            <a:off x="8328622" y="829982"/>
+            <a:ext cx="1151277" cy="307777"/>
+          </a:xfrm>
+          <a:prstGeom prst="rect">
+            <a:avLst/>
+          </a:prstGeom>
+          <a:noFill/>
+        </p:spPr>
+        <p:txBody>
+          <a:bodyPr wrap="none" rtlCol="0">
+            <a:spAutoFit/>
+          </a:bodyPr>
+          <a:lstStyle/>
+          <a:p>
+            <a:r>
+              <a:rPr lang="en-US" sz="1400" dirty="0">
+                <a:latin typeface="Courier New" panose="02070309020205020404" pitchFamily="49" charset="0"/>
+                <a:cs typeface="Courier New" panose="02070309020205020404" pitchFamily="49" charset="0"/>
+              </a:rPr>
+              <a:t>…</a:t>
+            </a:r>
+            <a:r>
+              <a:rPr lang="ru-RU" sz="1400" dirty="0">
+                <a:latin typeface="Courier New" panose="02070309020205020404" pitchFamily="49" charset="0"/>
+                <a:cs typeface="Courier New" panose="02070309020205020404" pitchFamily="49" charset="0"/>
+              </a:rPr>
+              <a:t>1101010</a:t>
+            </a:r>
+            <a:r>
+              <a:rPr lang="en-US" sz="1400" dirty="0">
+                <a:latin typeface="Courier New" panose="02070309020205020404" pitchFamily="49" charset="0"/>
+                <a:cs typeface="Courier New" panose="02070309020205020404" pitchFamily="49" charset="0"/>
+              </a:rPr>
+              <a:t>…</a:t>
+            </a:r>
+            <a:endParaRPr lang="ru-RU" sz="1400" dirty="0">
+              <a:latin typeface="Courier New" panose="02070309020205020404" pitchFamily="49" charset="0"/>
+              <a:cs typeface="Courier New" panose="02070309020205020404" pitchFamily="49" charset="0"/>
+            </a:endParaRPr>
+          </a:p>
+        </p:txBody>
+      </p:sp>
+      <p:sp>
+        <p:nvSpPr>
+          <p:cNvPr id="12" name="TextBox 11">
+            <a:extLst>
+              <a:ext uri="{FF2B5EF4-FFF2-40B4-BE49-F238E27FC236}">
+                <a16:creationId xmlns:a16="http://schemas.microsoft.com/office/drawing/2014/main" id="{54C3A3BF-03FE-CE10-7FF1-F46D26E61B42}"/>
+              </a:ext>
+            </a:extLst>
+          </p:cNvPr>
+          <p:cNvSpPr txBox="1"/>
+          <p:nvPr/>
+        </p:nvSpPr>
+        <p:spPr>
+          <a:xfrm>
+            <a:off x="10615097" y="464313"/>
+            <a:ext cx="1290738" cy="338554"/>
+          </a:xfrm>
+          <a:prstGeom prst="rect">
+            <a:avLst/>
+          </a:prstGeom>
+          <a:noFill/>
+        </p:spPr>
+        <p:txBody>
+          <a:bodyPr wrap="none" rtlCol="0">
+            <a:spAutoFit/>
+          </a:bodyPr>
+          <a:lstStyle/>
+          <a:p>
+            <a:r>
+              <a:rPr lang="ru-RU" sz="1600" dirty="0">
+                <a:latin typeface="Courier New" panose="02070309020205020404" pitchFamily="49" charset="0"/>
+                <a:cs typeface="Courier New" panose="02070309020205020404" pitchFamily="49" charset="0"/>
+              </a:rPr>
+              <a:t>…</a:t>
+            </a:r>
+            <a:r>
+              <a:rPr lang="ru-RU" sz="1400" dirty="0">
+                <a:latin typeface="Courier New" panose="02070309020205020404" pitchFamily="49" charset="0"/>
+                <a:cs typeface="Courier New" panose="02070309020205020404" pitchFamily="49" charset="0"/>
+              </a:rPr>
+              <a:t>00101010</a:t>
+            </a:r>
+            <a:r>
+              <a:rPr lang="en-US" sz="1600" dirty="0">
+                <a:latin typeface="Courier New" panose="02070309020205020404" pitchFamily="49" charset="0"/>
+                <a:cs typeface="Courier New" panose="02070309020205020404" pitchFamily="49" charset="0"/>
+              </a:rPr>
+              <a:t>…</a:t>
+            </a:r>
+            <a:endParaRPr lang="ru-RU" sz="1600" dirty="0">
+              <a:latin typeface="Courier New" panose="02070309020205020404" pitchFamily="49" charset="0"/>
+              <a:cs typeface="Courier New" panose="02070309020205020404" pitchFamily="49" charset="0"/>
+            </a:endParaRPr>
+          </a:p>
+        </p:txBody>
+      </p:sp>
+      <p:sp>
+        <p:nvSpPr>
+          <p:cNvPr id="13" name="TextBox 12">
+            <a:extLst>
+              <a:ext uri="{FF2B5EF4-FFF2-40B4-BE49-F238E27FC236}">
+                <a16:creationId xmlns:a16="http://schemas.microsoft.com/office/drawing/2014/main" id="{C03715B2-059B-D342-429C-5E8AFF0F28E4}"/>
+              </a:ext>
+            </a:extLst>
+          </p:cNvPr>
+          <p:cNvSpPr txBox="1"/>
+          <p:nvPr/>
+        </p:nvSpPr>
+        <p:spPr>
+          <a:xfrm>
+            <a:off x="8423689" y="279332"/>
+            <a:ext cx="1217128" cy="338554"/>
+          </a:xfrm>
+          <a:prstGeom prst="rect">
+            <a:avLst/>
+          </a:prstGeom>
+          <a:noFill/>
+        </p:spPr>
+        <p:txBody>
+          <a:bodyPr wrap="none" rtlCol="0">
+            <a:spAutoFit/>
+          </a:bodyPr>
+          <a:lstStyle/>
+          <a:p>
+            <a:r>
+              <a:rPr lang="ru-RU" sz="1600" dirty="0"/>
+              <a:t>Инструкции</a:t>
+            </a:r>
+          </a:p>
+        </p:txBody>
+      </p:sp>
+      <p:sp>
+        <p:nvSpPr>
+          <p:cNvPr id="14" name="TextBox 13">
+            <a:extLst>
+              <a:ext uri="{FF2B5EF4-FFF2-40B4-BE49-F238E27FC236}">
+                <a16:creationId xmlns:a16="http://schemas.microsoft.com/office/drawing/2014/main" id="{83445B81-524A-D0E8-0C2B-2DD52B94526B}"/>
+              </a:ext>
+            </a:extLst>
+          </p:cNvPr>
+          <p:cNvSpPr txBox="1"/>
+          <p:nvPr/>
+        </p:nvSpPr>
+        <p:spPr>
+          <a:xfrm>
+            <a:off x="8533382" y="994795"/>
+            <a:ext cx="870751" cy="338554"/>
+          </a:xfrm>
+          <a:prstGeom prst="rect">
+            <a:avLst/>
+          </a:prstGeom>
+          <a:noFill/>
+        </p:spPr>
+        <p:txBody>
+          <a:bodyPr wrap="none" rtlCol="0">
+            <a:spAutoFit/>
+          </a:bodyPr>
+          <a:lstStyle/>
+          <a:p>
+            <a:r>
+              <a:rPr lang="ru-RU" sz="1600" dirty="0"/>
+              <a:t>Данные</a:t>
+            </a:r>
+          </a:p>
+        </p:txBody>
+      </p:sp>
+      <p:sp>
+        <p:nvSpPr>
+          <p:cNvPr id="15" name="TextBox 14">
+            <a:extLst>
+              <a:ext uri="{FF2B5EF4-FFF2-40B4-BE49-F238E27FC236}">
+                <a16:creationId xmlns:a16="http://schemas.microsoft.com/office/drawing/2014/main" id="{4A9AE802-B56E-23F9-C6F4-7E2E203DA1BF}"/>
+              </a:ext>
+            </a:extLst>
+          </p:cNvPr>
+          <p:cNvSpPr txBox="1"/>
+          <p:nvPr/>
+        </p:nvSpPr>
+        <p:spPr>
+          <a:xfrm>
+            <a:off x="10685916" y="686217"/>
+            <a:ext cx="1011815" cy="338554"/>
+          </a:xfrm>
+          <a:prstGeom prst="rect">
+            <a:avLst/>
+          </a:prstGeom>
+          <a:noFill/>
+        </p:spPr>
+        <p:txBody>
+          <a:bodyPr wrap="none" rtlCol="0">
+            <a:spAutoFit/>
+          </a:bodyPr>
+          <a:lstStyle/>
+          <a:p>
+            <a:r>
+              <a:rPr lang="ru-RU" sz="1600" dirty="0"/>
+              <a:t>Результат</a:t>
+            </a:r>
+          </a:p>
+        </p:txBody>
+      </p:sp>
+      <p:sp>
+        <p:nvSpPr>
+          <p:cNvPr id="16" name="Прямоугольник 15">
+            <a:extLst>
+              <a:ext uri="{FF2B5EF4-FFF2-40B4-BE49-F238E27FC236}">
+                <a16:creationId xmlns:a16="http://schemas.microsoft.com/office/drawing/2014/main" id="{88824444-59F2-7ED7-DCD5-9724A3A7506B}"/>
+              </a:ext>
+            </a:extLst>
+          </p:cNvPr>
+          <p:cNvSpPr/>
+          <p:nvPr/>
+        </p:nvSpPr>
+        <p:spPr>
+          <a:xfrm>
+            <a:off x="7406304" y="83082"/>
+            <a:ext cx="961343" cy="1311286"/>
+          </a:xfrm>
+          <a:prstGeom prst="rect">
+            <a:avLst/>
+          </a:prstGeom>
+        </p:spPr>
+        <p:style>
+          <a:lnRef idx="2">
+            <a:schemeClr val="accent1">
+              <a:shade val="50000"/>
+            </a:schemeClr>
+          </a:lnRef>
+          <a:fillRef idx="1">
+            <a:schemeClr val="accent1"/>
+          </a:fillRef>
+          <a:effectRef idx="0">
+            <a:schemeClr val="accent1"/>
+          </a:effectRef>
+          <a:fontRef idx="minor">
+            <a:schemeClr val="lt1"/>
+          </a:fontRef>
+        </p:style>
+        <p:txBody>
+          <a:bodyPr rtlCol="0" anchor="ctr"/>
+          <a:lstStyle/>
+          <a:p>
+            <a:pPr algn="ctr"/>
+            <a:r>
+              <a:rPr lang="ru-RU" sz="3600" dirty="0"/>
+              <a:t>ОЗУ</a:t>
+            </a:r>
+            <a:endParaRPr lang="en-US" sz="3600" dirty="0"/>
+          </a:p>
+        </p:txBody>
+      </p:sp>
+      <p:cxnSp>
+        <p:nvCxnSpPr>
+          <p:cNvPr id="18" name="Connector: Elbow 17">
+            <a:extLst>
+              <a:ext uri="{FF2B5EF4-FFF2-40B4-BE49-F238E27FC236}">
+                <a16:creationId xmlns:a16="http://schemas.microsoft.com/office/drawing/2014/main" id="{07B039FF-9000-17CC-046A-40C654328DAD}"/>
+              </a:ext>
+            </a:extLst>
+          </p:cNvPr>
+          <p:cNvCxnSpPr>
+            <a:cxnSpLocks/>
+            <a:stCxn id="4" idx="3"/>
+          </p:cNvCxnSpPr>
+          <p:nvPr/>
+        </p:nvCxnSpPr>
+        <p:spPr>
+          <a:xfrm flipH="1">
+            <a:off x="8369494" y="730134"/>
+            <a:ext cx="2245603" cy="664326"/>
+          </a:xfrm>
+          <a:prstGeom prst="bentConnector3">
+            <a:avLst>
+              <a:gd name="adj1" fmla="val -53388"/>
+            </a:avLst>
+          </a:prstGeom>
+          <a:ln>
+            <a:tailEnd type="triangle"/>
+          </a:ln>
+        </p:spPr>
+        <p:style>
+          <a:lnRef idx="1">
+            <a:schemeClr val="accent1"/>
+          </a:lnRef>
+          <a:fillRef idx="0">
+            <a:schemeClr val="accent1"/>
+          </a:fillRef>
+          <a:effectRef idx="0">
+            <a:schemeClr val="accent1"/>
+          </a:effectRef>
+          <a:fontRef idx="minor">
+            <a:schemeClr val="tx1"/>
+          </a:fontRef>
+        </p:style>
+      </p:cxnSp>
     </p:spTree>
     <p:extLst>
       <p:ext uri="{BB962C8B-B14F-4D97-AF65-F5344CB8AC3E}">
@@ -44628,7 +46198,7 @@
             </a:pPr>
             <a:r>
               <a:rPr lang="ru-RU" sz="2000" dirty="0"/>
-              <a:t>С каждым ЦП связаны архитектура набора команд и микроархитектура.</a:t>
+              <a:t>Каждый ЦП имеет определенную архитектуру набора команд и микроархитектуру.</a:t>
             </a:r>
           </a:p>
           <a:p>
